--- a/docs/CODEX-05-전략발표.pptx
+++ b/docs/CODEX-05-전략발표.pptx
@@ -20,6 +20,7 @@
     <p:sldId id="268" r:id="rId19"/>
     <p:sldId id="269" r:id="rId20"/>
     <p:sldId id="270" r:id="rId21"/>
+    <p:sldId id="271" r:id="rId22"/>
   </p:sldIdLst>
   <p:sldSz cx="12191695" cy="6858000" type="screen4x3"/>
   <p:notesSz cx="6858000" cy="9144000"/>
@@ -3230,7 +3231,7 @@
                 </a:solidFill>
                 <a:latin typeface="맑은 고딕"/>
               </a:rPr>
-              <a:t>커스텀 하나가 어떻게 등록되고 · 검사되고 · 증거로 남는가</a:t>
+              <a:t>규칙 기반 검사기에서 무엇을 LLM 체제로 가져갈 것인가</a:t>
             </a:r>
           </a:p>
         </p:txBody>
@@ -3264,7 +3265,7 @@
                 </a:solidFill>
                 <a:latin typeface="맑은 고딕"/>
               </a:rPr>
-              <a:t>규칙 기반 자동 검사(단독) → LLM이 일하고 검사기가 근거를 뒷받침</a:t>
+              <a:t>1.13.0→1.13.1 통과 · 1.13.1→1.13.2에서 드러난 한계 · 그래서 정한 방향</a:t>
             </a:r>
           </a:p>
           <a:p>
@@ -3275,7 +3276,7 @@
                 </a:solidFill>
                 <a:latin typeface="맑은 고딕"/>
               </a:rPr>
-              <a:t>1.13.1 → 1.13.2 예행연습으로 직접 확인 · 정본 CODEX-05 기반</a:t>
+              <a:t>관리 파일 18종 1차 검토 결과 포함 · 정본 CODEX-05 기반</a:t>
             </a:r>
           </a:p>
           <a:p>
@@ -3286,7 +3287,7 @@
                 </a:solidFill>
                 <a:latin typeface="맑은 고딕"/>
               </a:rPr>
-              <a:t>2026-08-10</a:t>
+              <a:t>2026-08-12</a:t>
             </a:r>
           </a:p>
         </p:txBody>
@@ -3426,7 +3427,7 @@
                 </a:solidFill>
                 <a:latin typeface="맑은 고딕"/>
               </a:rPr>
-              <a:t>도입 제안 — LLM 작업의 ‘증거 층’으로 이 검사기를 도입(자랑 아님)</a:t>
+              <a:t>도입 제안 ① — 검증되는 과정</a:t>
             </a:r>
           </a:p>
         </p:txBody>
@@ -3507,11 +3508,179 @@
             <a:r>
               <a:rPr sz="1500" b="1">
                 <a:solidFill>
+                  <a:srgbClr val="0E8F8F"/>
+                </a:solidFill>
+                <a:latin typeface="맑은 고딕"/>
+              </a:rPr>
+              <a:t>제안 — 하이브리드에서 LLM 작업의 ‘증거 층’으로 이 검사기를 도입한다 (자랑이 아니라 도입 대상)</a:t>
+            </a:r>
+          </a:p>
+          <a:p>
+            <a:pPr lvl="1">
+              <a:spcBef>
+                <a:spcPts val="200"/>
+              </a:spcBef>
+              <a:spcAft>
+                <a:spcPts val="600"/>
+              </a:spcAft>
+            </a:pPr>
+            <a:r>
+              <a:rPr sz="1300" b="0">
+                <a:solidFill>
+                  <a:srgbClr val="555B66"/>
+                </a:solidFill>
+                <a:latin typeface="맑은 고딕"/>
+              </a:rPr>
+              <a:t>– </a:t>
+            </a:r>
+            <a:r>
+              <a:rPr sz="1300" b="0">
+                <a:solidFill>
                   <a:srgbClr val="222730"/>
                 </a:solidFill>
                 <a:latin typeface="맑은 고딕"/>
               </a:rPr>
-              <a:t>제안: 하이브리드에서 LLM 판단의 증거 층으로 이 시스템을 도입한다. 커스텀 하나가 아래 6단계로 등록·검사·증거화된다.</a:t>
+              <a:t>① 등록 — Manifest·Registry·Contract. 무엇을·어디를 바꿨고 어떤 검사로 지킬지 선언</a:t>
+            </a:r>
+          </a:p>
+          <a:p>
+            <a:pPr lvl="1">
+              <a:spcBef>
+                <a:spcPts val="200"/>
+              </a:spcBef>
+              <a:spcAft>
+                <a:spcPts val="600"/>
+              </a:spcAft>
+            </a:pPr>
+            <a:r>
+              <a:rPr sz="1300" b="0">
+                <a:solidFill>
+                  <a:srgbClr val="555B66"/>
+                </a:solidFill>
+                <a:latin typeface="맑은 고딕"/>
+              </a:rPr>
+              <a:t>– </a:t>
+            </a:r>
+            <a:r>
+              <a:rPr sz="1300" b="0">
+                <a:solidFill>
+                  <a:srgbClr val="222730"/>
+                </a:solidFill>
+                <a:latin typeface="맑은 고딕"/>
+              </a:rPr>
+              <a:t>② 커밋·변경범위 검사 — 선언한 범위만 건드렸는지, 공식 계보 위에 얹혔는지</a:t>
+            </a:r>
+          </a:p>
+          <a:p>
+            <a:pPr lvl="1">
+              <a:spcBef>
+                <a:spcPts val="200"/>
+              </a:spcBef>
+              <a:spcAft>
+                <a:spcPts val="600"/>
+              </a:spcAft>
+            </a:pPr>
+            <a:r>
+              <a:rPr sz="1300" b="0">
+                <a:solidFill>
+                  <a:srgbClr val="555B66"/>
+                </a:solidFill>
+                <a:latin typeface="맑은 고딕"/>
+              </a:rPr>
+              <a:t>– </a:t>
+            </a:r>
+            <a:r>
+              <a:rPr sz="1300" b="0">
+                <a:solidFill>
+                  <a:srgbClr val="222730"/>
+                </a:solidFill>
+                <a:latin typeface="맑은 고딕"/>
+              </a:rPr>
+              <a:t>③ 공용 파일의 ID별 코드 검사 — 공유 파일에서 이 ID 몫의 코드가 살아있는지</a:t>
+            </a:r>
+          </a:p>
+          <a:p>
+            <a:pPr lvl="1">
+              <a:spcBef>
+                <a:spcPts val="200"/>
+              </a:spcBef>
+              <a:spcAft>
+                <a:spcPts val="600"/>
+              </a:spcAft>
+            </a:pPr>
+            <a:r>
+              <a:rPr sz="1300" b="0">
+                <a:solidFill>
+                  <a:srgbClr val="555B66"/>
+                </a:solidFill>
+                <a:latin typeface="맑은 고딕"/>
+              </a:rPr>
+              <a:t>– </a:t>
+            </a:r>
+            <a:r>
+              <a:rPr sz="1300" b="0">
+                <a:solidFill>
+                  <a:srgbClr val="222730"/>
+                </a:solidFill>
+                <a:latin typeface="맑은 고딕"/>
+              </a:rPr>
+              <a:t>④ 전용 검사 실행 — 이 기능만의 검사(API/화면/소스). 속 빈 테스트면 patch-kill로 걸러낸다</a:t>
+            </a:r>
+          </a:p>
+          <a:p>
+            <a:pPr lvl="1">
+              <a:spcBef>
+                <a:spcPts val="200"/>
+              </a:spcBef>
+              <a:spcAft>
+                <a:spcPts val="600"/>
+              </a:spcAft>
+            </a:pPr>
+            <a:r>
+              <a:rPr sz="1300" b="0">
+                <a:solidFill>
+                  <a:srgbClr val="555B66"/>
+                </a:solidFill>
+                <a:latin typeface="맑은 고딕"/>
+              </a:rPr>
+              <a:t>– </a:t>
+            </a:r>
+            <a:r>
+              <a:rPr sz="1300" b="0">
+                <a:solidFill>
+                  <a:srgbClr val="222730"/>
+                </a:solidFill>
+                <a:latin typeface="맑은 고딕"/>
+              </a:rPr>
+              <a:t>⑤ commit·이미지와 결과 결속 — 바꿔치기·사후수정을 감지</a:t>
+            </a:r>
+          </a:p>
+          <a:p>
+            <a:pPr lvl="1">
+              <a:spcBef>
+                <a:spcPts val="200"/>
+              </a:spcBef>
+              <a:spcAft>
+                <a:spcPts val="600"/>
+              </a:spcAft>
+            </a:pPr>
+            <a:r>
+              <a:rPr sz="1300" b="0">
+                <a:solidFill>
+                  <a:srgbClr val="555B66"/>
+                </a:solidFill>
+                <a:latin typeface="맑은 고딕"/>
+              </a:rPr>
+              <a:t>– </a:t>
+            </a:r>
+            <a:r>
+              <a:rPr sz="1300" b="0">
+                <a:solidFill>
+                  <a:srgbClr val="222730"/>
+                </a:solidFill>
+                <a:latin typeface="맑은 고딕"/>
+              </a:rPr>
+              <a:t>⑥ 승인·증거 보관 — 권한자 승인 + 증거 보관. 승인은 결과에 결속</a:t>
             </a:r>
           </a:p>
           <a:p>
@@ -3539,315 +3708,7 @@
                 </a:solidFill>
                 <a:latin typeface="맑은 고딕"/>
               </a:rPr>
-              <a:t>① 등록 — Manifest·Registry·Contract에 올린다</a:t>
-            </a:r>
-          </a:p>
-          <a:p>
-            <a:pPr lvl="1">
-              <a:spcBef>
-                <a:spcPts val="200"/>
-              </a:spcBef>
-              <a:spcAft>
-                <a:spcPts val="600"/>
-              </a:spcAft>
-            </a:pPr>
-            <a:r>
-              <a:rPr sz="1300" b="0">
-                <a:solidFill>
-                  <a:srgbClr val="555B66"/>
-                </a:solidFill>
-                <a:latin typeface="맑은 고딕"/>
-              </a:rPr>
-              <a:t>– </a:t>
-            </a:r>
-            <a:r>
-              <a:rPr sz="1300" b="0">
-                <a:solidFill>
-                  <a:srgbClr val="222730"/>
-                </a:solidFill>
-                <a:latin typeface="맑은 고딕"/>
-              </a:rPr>
-              <a:t>무엇을·어디를 바꿨고, 어떤 전용 계약으로 지킬지 선언</a:t>
-            </a:r>
-          </a:p>
-          <a:p>
-            <a:pPr>
-              <a:spcBef>
-                <a:spcPts val="200"/>
-              </a:spcBef>
-              <a:spcAft>
-                <a:spcPts val="600"/>
-              </a:spcAft>
-            </a:pPr>
-            <a:r>
-              <a:rPr sz="1500" b="1">
-                <a:solidFill>
-                  <a:srgbClr val="0E8F8F"/>
-                </a:solidFill>
-                <a:latin typeface="맑은 고딕"/>
-              </a:rPr>
-              <a:t>■ </a:t>
-            </a:r>
-            <a:r>
-              <a:rPr sz="1500" b="1">
-                <a:solidFill>
-                  <a:srgbClr val="0E8F8F"/>
-                </a:solidFill>
-                <a:latin typeface="맑은 고딕"/>
-              </a:rPr>
-              <a:t>② 커밋·변경범위 검사</a:t>
-            </a:r>
-          </a:p>
-          <a:p>
-            <a:pPr lvl="1">
-              <a:spcBef>
-                <a:spcPts val="200"/>
-              </a:spcBef>
-              <a:spcAft>
-                <a:spcPts val="600"/>
-              </a:spcAft>
-            </a:pPr>
-            <a:r>
-              <a:rPr sz="1300" b="0">
-                <a:solidFill>
-                  <a:srgbClr val="555B66"/>
-                </a:solidFill>
-                <a:latin typeface="맑은 고딕"/>
-              </a:rPr>
-              <a:t>– </a:t>
-            </a:r>
-            <a:r>
-              <a:rPr sz="1300" b="0">
-                <a:solidFill>
-                  <a:srgbClr val="222730"/>
-                </a:solidFill>
-                <a:latin typeface="맑은 고딕"/>
-              </a:rPr>
-              <a:t>이 ID가 선언한 범위만 건드렸는지, 공식 계보 위에 얹혔는지 확인</a:t>
-            </a:r>
-          </a:p>
-          <a:p>
-            <a:pPr>
-              <a:spcBef>
-                <a:spcPts val="200"/>
-              </a:spcBef>
-              <a:spcAft>
-                <a:spcPts val="600"/>
-              </a:spcAft>
-            </a:pPr>
-            <a:r>
-              <a:rPr sz="1500" b="1">
-                <a:solidFill>
-                  <a:srgbClr val="0E8F8F"/>
-                </a:solidFill>
-                <a:latin typeface="맑은 고딕"/>
-              </a:rPr>
-              <a:t>■ </a:t>
-            </a:r>
-            <a:r>
-              <a:rPr sz="1500" b="1">
-                <a:solidFill>
-                  <a:srgbClr val="0E8F8F"/>
-                </a:solidFill>
-                <a:latin typeface="맑은 고딕"/>
-              </a:rPr>
-              <a:t>③ 공용 파일의 ID별 코드 검사</a:t>
-            </a:r>
-          </a:p>
-          <a:p>
-            <a:pPr lvl="1">
-              <a:spcBef>
-                <a:spcPts val="200"/>
-              </a:spcBef>
-              <a:spcAft>
-                <a:spcPts val="600"/>
-              </a:spcAft>
-            </a:pPr>
-            <a:r>
-              <a:rPr sz="1300" b="0">
-                <a:solidFill>
-                  <a:srgbClr val="555B66"/>
-                </a:solidFill>
-                <a:latin typeface="맑은 고딕"/>
-              </a:rPr>
-              <a:t>– </a:t>
-            </a:r>
-            <a:r>
-              <a:rPr sz="1300" b="0">
-                <a:solidFill>
-                  <a:srgbClr val="222730"/>
-                </a:solidFill>
-                <a:latin typeface="맑은 고딕"/>
-              </a:rPr>
-              <a:t>여러 기능이 공유하는 파일에서 이 ID 몫의 코드가 살아있고 공식과 달라졌는지</a:t>
-            </a:r>
-          </a:p>
-          <a:p>
-            <a:pPr>
-              <a:spcBef>
-                <a:spcPts val="200"/>
-              </a:spcBef>
-              <a:spcAft>
-                <a:spcPts val="600"/>
-              </a:spcAft>
-            </a:pPr>
-            <a:r>
-              <a:rPr sz="1500" b="1">
-                <a:solidFill>
-                  <a:srgbClr val="0E8F8F"/>
-                </a:solidFill>
-                <a:latin typeface="맑은 고딕"/>
-              </a:rPr>
-              <a:t>■ </a:t>
-            </a:r>
-            <a:r>
-              <a:rPr sz="1500" b="1">
-                <a:solidFill>
-                  <a:srgbClr val="0E8F8F"/>
-                </a:solidFill>
-                <a:latin typeface="맑은 고딕"/>
-              </a:rPr>
-              <a:t>④ 전용 Contract 실행</a:t>
-            </a:r>
-          </a:p>
-          <a:p>
-            <a:pPr lvl="1">
-              <a:spcBef>
-                <a:spcPts val="200"/>
-              </a:spcBef>
-              <a:spcAft>
-                <a:spcPts val="600"/>
-              </a:spcAft>
-            </a:pPr>
-            <a:r>
-              <a:rPr sz="1300" b="0">
-                <a:solidFill>
-                  <a:srgbClr val="555B66"/>
-                </a:solidFill>
-                <a:latin typeface="맑은 고딕"/>
-              </a:rPr>
-              <a:t>– </a:t>
-            </a:r>
-            <a:r>
-              <a:rPr sz="1300" b="0">
-                <a:solidFill>
-                  <a:srgbClr val="222730"/>
-                </a:solidFill>
-                <a:latin typeface="맑은 고딕"/>
-              </a:rPr>
-              <a:t>이 기능만의 계약 테스트를 돌린다 (API / 화면 / 소스) — 속 빈 테스트면 patch-kill로 걸러냄</a:t>
-            </a:r>
-          </a:p>
-          <a:p>
-            <a:pPr>
-              <a:spcBef>
-                <a:spcPts val="200"/>
-              </a:spcBef>
-              <a:spcAft>
-                <a:spcPts val="600"/>
-              </a:spcAft>
-            </a:pPr>
-            <a:r>
-              <a:rPr sz="1500" b="1">
-                <a:solidFill>
-                  <a:srgbClr val="0E8F8F"/>
-                </a:solidFill>
-                <a:latin typeface="맑은 고딕"/>
-              </a:rPr>
-              <a:t>■ </a:t>
-            </a:r>
-            <a:r>
-              <a:rPr sz="1500" b="1">
-                <a:solidFill>
-                  <a:srgbClr val="0E8F8F"/>
-                </a:solidFill>
-                <a:latin typeface="맑은 고딕"/>
-              </a:rPr>
-              <a:t>⑤ commit·이미지와 결과 결속</a:t>
-            </a:r>
-          </a:p>
-          <a:p>
-            <a:pPr lvl="1">
-              <a:spcBef>
-                <a:spcPts val="200"/>
-              </a:spcBef>
-              <a:spcAft>
-                <a:spcPts val="600"/>
-              </a:spcAft>
-            </a:pPr>
-            <a:r>
-              <a:rPr sz="1300" b="0">
-                <a:solidFill>
-                  <a:srgbClr val="555B66"/>
-                </a:solidFill>
-                <a:latin typeface="맑은 고딕"/>
-              </a:rPr>
-              <a:t>– </a:t>
-            </a:r>
-            <a:r>
-              <a:rPr sz="1300" b="0">
-                <a:solidFill>
-                  <a:srgbClr val="222730"/>
-                </a:solidFill>
-                <a:latin typeface="맑은 고딕"/>
-              </a:rPr>
-              <a:t>검사 결과를 특정 커밋·이미지에 못박아 바꿔치기·사후수정을 탐지</a:t>
-            </a:r>
-          </a:p>
-          <a:p>
-            <a:pPr>
-              <a:spcBef>
-                <a:spcPts val="200"/>
-              </a:spcBef>
-              <a:spcAft>
-                <a:spcPts val="600"/>
-              </a:spcAft>
-            </a:pPr>
-            <a:r>
-              <a:rPr sz="1500" b="1">
-                <a:solidFill>
-                  <a:srgbClr val="0E8F8F"/>
-                </a:solidFill>
-                <a:latin typeface="맑은 고딕"/>
-              </a:rPr>
-              <a:t>■ </a:t>
-            </a:r>
-            <a:r>
-              <a:rPr sz="1500" b="1">
-                <a:solidFill>
-                  <a:srgbClr val="0E8F8F"/>
-                </a:solidFill>
-                <a:latin typeface="맑은 고딕"/>
-              </a:rPr>
-              <a:t>⑥ 승인·증거 보관</a:t>
-            </a:r>
-          </a:p>
-          <a:p>
-            <a:pPr lvl="1">
-              <a:spcBef>
-                <a:spcPts val="200"/>
-              </a:spcBef>
-              <a:spcAft>
-                <a:spcPts val="600"/>
-              </a:spcAft>
-            </a:pPr>
-            <a:r>
-              <a:rPr sz="1300" b="0">
-                <a:solidFill>
-                  <a:srgbClr val="555B66"/>
-                </a:solidFill>
-                <a:latin typeface="맑은 고딕"/>
-              </a:rPr>
-              <a:t>– </a:t>
-            </a:r>
-            <a:r>
-              <a:rPr sz="1300" b="0">
-                <a:solidFill>
-                  <a:srgbClr val="222730"/>
-                </a:solidFill>
-                <a:latin typeface="맑은 고딕"/>
-              </a:rPr>
-              <a:t>권한자 승인 + 증거(무엇을·어떤 코드에서·어떤 결과) 보관 — 승인은 결과에 결속</a:t>
+              <a:t>6페이지 한계와의 연결 — “관리 파일이 많다”는 부담을 그대로 두지 않는다. 이 산출물을 사람이 아니라 LLM이 생성·갱신하고, 검사기는 검증만 한다</a:t>
             </a:r>
           </a:p>
         </p:txBody>
@@ -3998,7 +3859,7 @@
             <a:avLst/>
           </a:prstGeom>
           <a:solidFill>
-            <a:srgbClr val="0E8F8F"/>
+            <a:srgbClr val="2E6CB1"/>
           </a:solidFill>
           <a:ln>
             <a:noFill/>
@@ -4052,11 +3913,11 @@
             <a:r>
               <a:rPr sz="1200" b="1">
                 <a:solidFill>
-                  <a:srgbClr val="0E8F8F"/>
-                </a:solidFill>
-                <a:latin typeface="맑은 고딕"/>
-              </a:rPr>
-              <a:t>기능마다 전용 계약이 할당된다</a:t>
+                  <a:srgbClr val="2E6CB1"/>
+                </a:solidFill>
+                <a:latin typeface="맑은 고딕"/>
+              </a:rPr>
+              <a:t>도입 제안 ② — LLM이 만든다</a:t>
             </a:r>
           </a:p>
         </p:txBody>
@@ -4090,7 +3951,7 @@
                 </a:solidFill>
                 <a:latin typeface="맑은 고딕"/>
               </a:rPr>
-              <a:t>7개 기능별 Contract 검사표 (BANK-OM-001~007)</a:t>
+              <a:t>LLM이 만들고, 사람이 확인한다  (관리 파일 9종)</a:t>
             </a:r>
           </a:p>
         </p:txBody>
@@ -4105,7 +3966,7 @@
         </p:nvGraphicFramePr>
         <p:xfrm>
           <a:off x="548640" y="1371600"/>
-          <a:ext cx="11064240" cy="2926080"/>
+          <a:ext cx="11064240" cy="3657600"/>
         </p:xfrm>
         <a:graphic>
           <a:graphicData uri="http://schemas.openxmlformats.org/drawingml/2006/table">
@@ -4114,11 +3975,10 @@
                 <a:tableStyleId>{5C22544A-7EE6-4342-B048-85BDC9FD1C3A}</a:tableStyleId>
               </a:tblPr>
               <a:tblGrid>
+                <a:gridCol w="3200400"/>
+                <a:gridCol w="2286000"/>
                 <a:gridCol w="731520"/>
-                <a:gridCol w="2743200"/>
-                <a:gridCol w="1737360"/>
-                <a:gridCol w="1097280"/>
-                <a:gridCol w="4754880"/>
+                <a:gridCol w="4846320"/>
               </a:tblGrid>
               <a:tr h="365760">
                 <a:tc>
@@ -4133,7 +3993,7 @@
                           </a:solidFill>
                           <a:latin typeface="맑은 고딕"/>
                         </a:rPr>
-                        <a:t>ID</a:t>
+                        <a:t>파일</a:t>
                       </a:r>
                     </a:p>
                   </a:txBody>
@@ -4155,7 +4015,7 @@
                           </a:solidFill>
                           <a:latin typeface="맑은 고딕"/>
                         </a:rPr>
-                        <a:t>기능</a:t>
+                        <a:t>용도</a:t>
                       </a:r>
                     </a:p>
                   </a:txBody>
@@ -4177,7 +4037,7 @@
                           </a:solidFill>
                           <a:latin typeface="맑은 고딕"/>
                         </a:rPr>
-                        <a:t>계약 유형</a:t>
+                        <a:t>판정</a:t>
                       </a:r>
                     </a:p>
                   </a:txBody>
@@ -4199,29 +4059,7 @@
                           </a:solidFill>
                           <a:latin typeface="맑은 고딕"/>
                         </a:rPr>
-                        <a:t>중요도</a:t>
-                      </a:r>
-                    </a:p>
-                  </a:txBody>
-                  <a:tcPr anchor="ctr" marT="38100" marB="38100">
-                    <a:solidFill>
-                      <a:srgbClr val="1F2A44"/>
-                    </a:solidFill>
-                  </a:tcPr>
-                </a:tc>
-                <a:tc>
-                  <a:txBody>
-                    <a:bodyPr/>
-                    <a:lstStyle/>
-                    <a:p>
-                      <a:r>
-                        <a:rPr sz="1100" b="1">
-                          <a:solidFill>
-                            <a:srgbClr val="FFFFFF"/>
-                          </a:solidFill>
-                          <a:latin typeface="맑은 고딕"/>
-                        </a:rPr>
-                        <a:t>현재 검증 상태</a:t>
+                        <a:t>LLM 체제에서의 역할</a:t>
                       </a:r>
                     </a:p>
                   </a:txBody>
@@ -4245,7 +4083,7 @@
                           </a:solidFill>
                           <a:latin typeface="맑은 고딕"/>
                         </a:rPr>
-                        <a:t>001</a:t>
+                        <a:t>customization-registry.yaml</a:t>
                       </a:r>
                     </a:p>
                   </a:txBody>
@@ -4267,7 +4105,29 @@
                           </a:solidFill>
                           <a:latin typeface="맑은 고딕"/>
                         </a:rPr>
-                        <a:t>InstanceCode</a:t>
+                        <a:t>우리가 손댄 기능 전체 명단</a:t>
+                      </a:r>
+                    </a:p>
+                  </a:txBody>
+                  <a:tcPr anchor="ctr" marT="25400" marB="25400" marL="76200">
+                    <a:solidFill>
+                      <a:srgbClr val="FFFFFF"/>
+                    </a:solidFill>
+                  </a:tcPr>
+                </a:tc>
+                <a:tc>
+                  <a:txBody>
+                    <a:bodyPr/>
+                    <a:lstStyle/>
+                    <a:p>
+                      <a:r>
+                        <a:rPr sz="1050" b="0">
+                          <a:solidFill>
+                            <a:srgbClr val="2E8B57"/>
+                          </a:solidFill>
+                          <a:latin typeface="맑은 고딕"/>
+                        </a:rPr>
+                        <a:t>채택</a:t>
                       </a:r>
                     </a:p>
                   </a:txBody>
@@ -4289,51 +4149,7 @@
                           </a:solidFill>
                           <a:latin typeface="맑은 고딕"/>
                         </a:rPr>
-                        <a:t>API</a:t>
-                      </a:r>
-                    </a:p>
-                  </a:txBody>
-                  <a:tcPr anchor="ctr" marT="25400" marB="25400" marL="76200">
-                    <a:solidFill>
-                      <a:srgbClr val="FFFFFF"/>
-                    </a:solidFill>
-                  </a:tcPr>
-                </a:tc>
-                <a:tc>
-                  <a:txBody>
-                    <a:bodyPr/>
-                    <a:lstStyle/>
-                    <a:p>
-                      <a:r>
-                        <a:rPr sz="1050" b="0">
-                          <a:solidFill>
-                            <a:srgbClr val="222730"/>
-                          </a:solidFill>
-                          <a:latin typeface="맑은 고딕"/>
-                        </a:rPr>
-                        <a:t>high</a:t>
-                      </a:r>
-                    </a:p>
-                  </a:txBody>
-                  <a:tcPr anchor="ctr" marT="25400" marB="25400" marL="76200">
-                    <a:solidFill>
-                      <a:srgbClr val="FFFFFF"/>
-                    </a:solidFill>
-                  </a:tcPr>
-                </a:tc>
-                <a:tc>
-                  <a:txBody>
-                    <a:bodyPr/>
-                    <a:lstStyle/>
-                    <a:p>
-                      <a:r>
-                        <a:rPr sz="1050" b="0">
-                          <a:solidFill>
-                            <a:srgbClr val="2E8B57"/>
-                          </a:solidFill>
-                          <a:latin typeface="맑은 고딕"/>
-                        </a:rPr>
-                        <a:t>1.13.1 통과 · 1.13.2 실제 동작 통과</a:t>
+                        <a:t>LLM이 명단을 갱신, 사람은 확인만</a:t>
                       </a:r>
                     </a:p>
                   </a:txBody>
@@ -4357,7 +4173,7 @@
                           </a:solidFill>
                           <a:latin typeface="맑은 고딕"/>
                         </a:rPr>
-                        <a:t>002</a:t>
+                        <a:t>manifests/BANK-OM-00N.yaml (11개)</a:t>
                       </a:r>
                     </a:p>
                   </a:txBody>
@@ -4379,7 +4195,29 @@
                           </a:solidFill>
                           <a:latin typeface="맑은 고딕"/>
                         </a:rPr>
-                        <a:t>QueryReport</a:t>
+                        <a:t>기능별 상세 카드</a:t>
+                      </a:r>
+                    </a:p>
+                  </a:txBody>
+                  <a:tcPr anchor="ctr" marT="25400" marB="25400" marL="76200">
+                    <a:solidFill>
+                      <a:srgbClr val="EEF2F7"/>
+                    </a:solidFill>
+                  </a:tcPr>
+                </a:tc>
+                <a:tc>
+                  <a:txBody>
+                    <a:bodyPr/>
+                    <a:lstStyle/>
+                    <a:p>
+                      <a:r>
+                        <a:rPr sz="1050" b="0">
+                          <a:solidFill>
+                            <a:srgbClr val="2E8B57"/>
+                          </a:solidFill>
+                          <a:latin typeface="맑은 고딕"/>
+                        </a:rPr>
+                        <a:t>채택</a:t>
                       </a:r>
                     </a:p>
                   </a:txBody>
@@ -4401,51 +4239,7 @@
                           </a:solidFill>
                           <a:latin typeface="맑은 고딕"/>
                         </a:rPr>
-                        <a:t>API</a:t>
-                      </a:r>
-                    </a:p>
-                  </a:txBody>
-                  <a:tcPr anchor="ctr" marT="25400" marB="25400" marL="76200">
-                    <a:solidFill>
-                      <a:srgbClr val="EEF2F7"/>
-                    </a:solidFill>
-                  </a:tcPr>
-                </a:tc>
-                <a:tc>
-                  <a:txBody>
-                    <a:bodyPr/>
-                    <a:lstStyle/>
-                    <a:p>
-                      <a:r>
-                        <a:rPr sz="1050" b="0">
-                          <a:solidFill>
-                            <a:srgbClr val="222730"/>
-                          </a:solidFill>
-                          <a:latin typeface="맑은 고딕"/>
-                        </a:rPr>
-                        <a:t>high</a:t>
-                      </a:r>
-                    </a:p>
-                  </a:txBody>
-                  <a:tcPr anchor="ctr" marT="25400" marB="25400" marL="76200">
-                    <a:solidFill>
-                      <a:srgbClr val="EEF2F7"/>
-                    </a:solidFill>
-                  </a:tcPr>
-                </a:tc>
-                <a:tc>
-                  <a:txBody>
-                    <a:bodyPr/>
-                    <a:lstStyle/>
-                    <a:p>
-                      <a:r>
-                        <a:rPr sz="1050" b="0">
-                          <a:solidFill>
-                            <a:srgbClr val="B8791F"/>
-                          </a:solidFill>
-                          <a:latin typeface="맑은 고딕"/>
-                        </a:rPr>
-                        <a:t>1.13.1 통과 · 1.13.2 부분(픽스처 필요)</a:t>
+                        <a:t>리로케이션 대응이 여기로 — LLM이 새 위치를 찾아 경로를 고쳐 제안</a:t>
                       </a:r>
                     </a:p>
                   </a:txBody>
@@ -4469,7 +4263,7 @@
                           </a:solidFill>
                           <a:latin typeface="맑은 고딕"/>
                         </a:rPr>
-                        <a:t>003</a:t>
+                        <a:t>contracts.yaml</a:t>
                       </a:r>
                     </a:p>
                   </a:txBody>
@@ -4491,7 +4285,29 @@
                           </a:solidFill>
                           <a:latin typeface="맑은 고딕"/>
                         </a:rPr>
-                        <a:t>Data Assertions</a:t>
+                        <a:t>지켜야 할 약속 + 확인 테스트</a:t>
+                      </a:r>
+                    </a:p>
+                  </a:txBody>
+                  <a:tcPr anchor="ctr" marT="25400" marB="25400" marL="76200">
+                    <a:solidFill>
+                      <a:srgbClr val="FFFFFF"/>
+                    </a:solidFill>
+                  </a:tcPr>
+                </a:tc>
+                <a:tc>
+                  <a:txBody>
+                    <a:bodyPr/>
+                    <a:lstStyle/>
+                    <a:p>
+                      <a:r>
+                        <a:rPr sz="1050" b="0">
+                          <a:solidFill>
+                            <a:srgbClr val="2E8B57"/>
+                          </a:solidFill>
+                          <a:latin typeface="맑은 고딕"/>
+                        </a:rPr>
+                        <a:t>채택</a:t>
                       </a:r>
                     </a:p>
                   </a:txBody>
@@ -4513,51 +4329,7 @@
                           </a:solidFill>
                           <a:latin typeface="맑은 고딕"/>
                         </a:rPr>
-                        <a:t>API + 화면</a:t>
-                      </a:r>
-                    </a:p>
-                  </a:txBody>
-                  <a:tcPr anchor="ctr" marT="25400" marB="25400" marL="76200">
-                    <a:solidFill>
-                      <a:srgbClr val="FFFFFF"/>
-                    </a:solidFill>
-                  </a:tcPr>
-                </a:tc>
-                <a:tc>
-                  <a:txBody>
-                    <a:bodyPr/>
-                    <a:lstStyle/>
-                    <a:p>
-                      <a:r>
-                        <a:rPr sz="1050" b="0">
-                          <a:solidFill>
-                            <a:srgbClr val="222730"/>
-                          </a:solidFill>
-                          <a:latin typeface="맑은 고딕"/>
-                        </a:rPr>
-                        <a:t>high</a:t>
-                      </a:r>
-                    </a:p>
-                  </a:txBody>
-                  <a:tcPr anchor="ctr" marT="25400" marB="25400" marL="76200">
-                    <a:solidFill>
-                      <a:srgbClr val="FFFFFF"/>
-                    </a:solidFill>
-                  </a:tcPr>
-                </a:tc>
-                <a:tc>
-                  <a:txBody>
-                    <a:bodyPr/>
-                    <a:lstStyle/>
-                    <a:p>
-                      <a:r>
-                        <a:rPr sz="1050" b="0">
-                          <a:solidFill>
-                            <a:srgbClr val="B8791F"/>
-                          </a:solidFill>
-                          <a:latin typeface="맑은 고딕"/>
-                        </a:rPr>
-                        <a:t>API 통과 · 화면 별도 도구로 확인</a:t>
+                        <a:t>사람과 LLM의 경계선 — 불변식(무엇)은 사람이, 테스트(어떻게)는 LLM이</a:t>
                       </a:r>
                     </a:p>
                   </a:txBody>
@@ -4581,7 +4353,7 @@
                           </a:solidFill>
                           <a:latin typeface="맑은 고딕"/>
                         </a:rPr>
-                        <a:t>004</a:t>
+                        <a:t>shared-path-owners.yaml</a:t>
                       </a:r>
                     </a:p>
                   </a:txBody>
@@ -4603,7 +4375,29 @@
                           </a:solidFill>
                           <a:latin typeface="맑은 고딕"/>
                         </a:rPr>
-                        <a:t>은행 컬럼 확장 표시</a:t>
+                        <a:t>공유 파일의 기능별 지분(37개)</a:t>
+                      </a:r>
+                    </a:p>
+                  </a:txBody>
+                  <a:tcPr anchor="ctr" marT="25400" marB="25400" marL="76200">
+                    <a:solidFill>
+                      <a:srgbClr val="EEF2F7"/>
+                    </a:solidFill>
+                  </a:tcPr>
+                </a:tc>
+                <a:tc>
+                  <a:txBody>
+                    <a:bodyPr/>
+                    <a:lstStyle/>
+                    <a:p>
+                      <a:r>
+                        <a:rPr sz="1050" b="0">
+                          <a:solidFill>
+                            <a:srgbClr val="2E8B57"/>
+                          </a:solidFill>
+                          <a:latin typeface="맑은 고딕"/>
+                        </a:rPr>
+                        <a:t>채택</a:t>
                       </a:r>
                     </a:p>
                   </a:txBody>
@@ -4625,51 +4419,7 @@
                           </a:solidFill>
                           <a:latin typeface="맑은 고딕"/>
                         </a:rPr>
-                        <a:t>API + 화면</a:t>
-                      </a:r>
-                    </a:p>
-                  </a:txBody>
-                  <a:tcPr anchor="ctr" marT="25400" marB="25400" marL="76200">
-                    <a:solidFill>
-                      <a:srgbClr val="EEF2F7"/>
-                    </a:solidFill>
-                  </a:tcPr>
-                </a:tc>
-                <a:tc>
-                  <a:txBody>
-                    <a:bodyPr/>
-                    <a:lstStyle/>
-                    <a:p>
-                      <a:r>
-                        <a:rPr sz="1050" b="0">
-                          <a:solidFill>
-                            <a:srgbClr val="222730"/>
-                          </a:solidFill>
-                          <a:latin typeface="맑은 고딕"/>
-                        </a:rPr>
-                        <a:t>medium</a:t>
-                      </a:r>
-                    </a:p>
-                  </a:txBody>
-                  <a:tcPr anchor="ctr" marT="25400" marB="25400" marL="76200">
-                    <a:solidFill>
-                      <a:srgbClr val="EEF2F7"/>
-                    </a:solidFill>
-                  </a:tcPr>
-                </a:tc>
-                <a:tc>
-                  <a:txBody>
-                    <a:bodyPr/>
-                    <a:lstStyle/>
-                    <a:p>
-                      <a:r>
-                        <a:rPr sz="1050" b="0">
-                          <a:solidFill>
-                            <a:srgbClr val="2E8B57"/>
-                          </a:solidFill>
-                          <a:latin typeface="맑은 고딕"/>
-                        </a:rPr>
-                        <a:t>API 통과 · 화면 통과(도구)</a:t>
+                        <a:t>LLM이 초안 작성 (사람이 일일이 세던 일)</a:t>
                       </a:r>
                     </a:p>
                   </a:txBody>
@@ -4693,7 +4443,7 @@
                           </a:solidFill>
                           <a:latin typeface="맑은 고딕"/>
                         </a:rPr>
-                        <a:t>005</a:t>
+                        <a:t>source-diff-paths.txt</a:t>
                       </a:r>
                     </a:p>
                   </a:txBody>
@@ -4715,7 +4465,29 @@
                           </a:solidFill>
                           <a:latin typeface="맑은 고딕"/>
                         </a:rPr>
-                        <a:t>한글 IME 보정</a:t>
+                        <a:t>바뀐 파일 전체 목록(113)</a:t>
+                      </a:r>
+                    </a:p>
+                  </a:txBody>
+                  <a:tcPr anchor="ctr" marT="25400" marB="25400" marL="76200">
+                    <a:solidFill>
+                      <a:srgbClr val="FFFFFF"/>
+                    </a:solidFill>
+                  </a:tcPr>
+                </a:tc>
+                <a:tc>
+                  <a:txBody>
+                    <a:bodyPr/>
+                    <a:lstStyle/>
+                    <a:p>
+                      <a:r>
+                        <a:rPr sz="1050" b="0">
+                          <a:solidFill>
+                            <a:srgbClr val="2E8B57"/>
+                          </a:solidFill>
+                          <a:latin typeface="맑은 고딕"/>
+                        </a:rPr>
+                        <a:t>채택</a:t>
                       </a:r>
                     </a:p>
                   </a:txBody>
@@ -4737,51 +4509,7 @@
                           </a:solidFill>
                           <a:latin typeface="맑은 고딕"/>
                         </a:rPr>
-                        <a:t>화면</a:t>
-                      </a:r>
-                    </a:p>
-                  </a:txBody>
-                  <a:tcPr anchor="ctr" marT="25400" marB="25400" marL="76200">
-                    <a:solidFill>
-                      <a:srgbClr val="FFFFFF"/>
-                    </a:solidFill>
-                  </a:tcPr>
-                </a:tc>
-                <a:tc>
-                  <a:txBody>
-                    <a:bodyPr/>
-                    <a:lstStyle/>
-                    <a:p>
-                      <a:r>
-                        <a:rPr sz="1050" b="0">
-                          <a:solidFill>
-                            <a:srgbClr val="222730"/>
-                          </a:solidFill>
-                          <a:latin typeface="맑은 고딕"/>
-                        </a:rPr>
-                        <a:t>medium</a:t>
-                      </a:r>
-                    </a:p>
-                  </a:txBody>
-                  <a:tcPr anchor="ctr" marT="25400" marB="25400" marL="76200">
-                    <a:solidFill>
-                      <a:srgbClr val="FFFFFF"/>
-                    </a:solidFill>
-                  </a:tcPr>
-                </a:tc>
-                <a:tc>
-                  <a:txBody>
-                    <a:bodyPr/>
-                    <a:lstStyle/>
-                    <a:p>
-                      <a:r>
-                        <a:rPr sz="1050" b="0">
-                          <a:solidFill>
-                            <a:srgbClr val="B8791F"/>
-                          </a:solidFill>
-                          <a:latin typeface="맑은 고딕"/>
-                        </a:rPr>
-                        <a:t>도구 지원 확인됨 · 경로 확보 후 실행</a:t>
+                        <a:t>LLM이 읽고 ‘등록 누락’을 찾아 제안</a:t>
                       </a:r>
                     </a:p>
                   </a:txBody>
@@ -4805,7 +4533,7 @@
                           </a:solidFill>
                           <a:latin typeface="맑은 고딕"/>
                         </a:rPr>
-                        <a:t>006</a:t>
+                        <a:t>patch-kill-plan.yaml</a:t>
                       </a:r>
                     </a:p>
                   </a:txBody>
@@ -4827,7 +4555,29 @@
                           </a:solidFill>
                           <a:latin typeface="맑은 고딕"/>
                         </a:rPr>
-                        <a:t>Sybase 커넥터</a:t>
+                        <a:t>빼보기 검사 계획(소스)</a:t>
+                      </a:r>
+                    </a:p>
+                  </a:txBody>
+                  <a:tcPr anchor="ctr" marT="25400" marB="25400" marL="76200">
+                    <a:solidFill>
+                      <a:srgbClr val="EEF2F7"/>
+                    </a:solidFill>
+                  </a:tcPr>
+                </a:tc>
+                <a:tc>
+                  <a:txBody>
+                    <a:bodyPr/>
+                    <a:lstStyle/>
+                    <a:p>
+                      <a:r>
+                        <a:rPr sz="1050" b="0">
+                          <a:solidFill>
+                            <a:srgbClr val="B8791F"/>
+                          </a:solidFill>
+                          <a:latin typeface="맑은 고딕"/>
+                        </a:rPr>
+                        <a:t>보류</a:t>
                       </a:r>
                     </a:p>
                   </a:txBody>
@@ -4849,51 +4599,7 @@
                           </a:solidFill>
                           <a:latin typeface="맑은 고딕"/>
                         </a:rPr>
-                        <a:t>소스 정합성</a:t>
-                      </a:r>
-                    </a:p>
-                  </a:txBody>
-                  <a:tcPr anchor="ctr" marT="25400" marB="25400" marL="76200">
-                    <a:solidFill>
-                      <a:srgbClr val="EEF2F7"/>
-                    </a:solidFill>
-                  </a:tcPr>
-                </a:tc>
-                <a:tc>
-                  <a:txBody>
-                    <a:bodyPr/>
-                    <a:lstStyle/>
-                    <a:p>
-                      <a:r>
-                        <a:rPr sz="1050" b="0">
-                          <a:solidFill>
-                            <a:srgbClr val="222730"/>
-                          </a:solidFill>
-                          <a:latin typeface="맑은 고딕"/>
-                        </a:rPr>
-                        <a:t>high</a:t>
-                      </a:r>
-                    </a:p>
-                  </a:txBody>
-                  <a:tcPr anchor="ctr" marT="25400" marB="25400" marL="76200">
-                    <a:solidFill>
-                      <a:srgbClr val="EEF2F7"/>
-                    </a:solidFill>
-                  </a:tcPr>
-                </a:tc>
-                <a:tc>
-                  <a:txBody>
-                    <a:bodyPr/>
-                    <a:lstStyle/>
-                    <a:p>
-                      <a:r>
-                        <a:rPr sz="1050" b="0">
-                          <a:solidFill>
-                            <a:srgbClr val="B8791F"/>
-                          </a:solidFill>
-                          <a:latin typeface="맑은 고딕"/>
-                        </a:rPr>
-                        <a:t>1.13.1 통과 · patch-kill 입증 · 1.13.2 코드이동→재anchor</a:t>
+                        <a:t>LLM은 ‘이 테스트가 진짜다’를 스스로 주장할 수 없다</a:t>
                       </a:r>
                     </a:p>
                   </a:txBody>
@@ -4917,7 +4623,7 @@
                           </a:solidFill>
                           <a:latin typeface="맑은 고딕"/>
                         </a:rPr>
-                        <a:t>007</a:t>
+                        <a:t>runtime-patch-kill-plan.yaml</a:t>
                       </a:r>
                     </a:p>
                   </a:txBody>
@@ -4939,7 +4645,29 @@
                           </a:solidFill>
                           <a:latin typeface="맑은 고딕"/>
                         </a:rPr>
-                        <a:t>Tibero 커넥터</a:t>
+                        <a:t>빼보기 검사 계획(실서버)</a:t>
+                      </a:r>
+                    </a:p>
+                  </a:txBody>
+                  <a:tcPr anchor="ctr" marT="25400" marB="25400" marL="76200">
+                    <a:solidFill>
+                      <a:srgbClr val="FFFFFF"/>
+                    </a:solidFill>
+                  </a:tcPr>
+                </a:tc>
+                <a:tc>
+                  <a:txBody>
+                    <a:bodyPr/>
+                    <a:lstStyle/>
+                    <a:p>
+                      <a:r>
+                        <a:rPr sz="1050" b="0">
+                          <a:solidFill>
+                            <a:srgbClr val="B8791F"/>
+                          </a:solidFill>
+                          <a:latin typeface="맑은 고딕"/>
+                        </a:rPr>
+                        <a:t>보류</a:t>
                       </a:r>
                     </a:p>
                   </a:txBody>
@@ -4961,7 +4689,121 @@
                           </a:solidFill>
                           <a:latin typeface="맑은 고딕"/>
                         </a:rPr>
-                        <a:t>소스 정합성</a:t>
+                        <a:t>공식 이미지로 한 번 돌리는 것으로 정리된다</a:t>
+                      </a:r>
+                    </a:p>
+                  </a:txBody>
+                  <a:tcPr anchor="ctr" marT="25400" marB="25400" marL="76200">
+                    <a:solidFill>
+                      <a:srgbClr val="FFFFFF"/>
+                    </a:solidFill>
+                  </a:tcPr>
+                </a:tc>
+              </a:tr>
+              <a:tr h="365760">
+                <a:tc>
+                  <a:txBody>
+                    <a:bodyPr/>
+                    <a:lstStyle/>
+                    <a:p>
+                      <a:r>
+                        <a:rPr sz="1050" b="1">
+                          <a:solidFill>
+                            <a:srgbClr val="222730"/>
+                          </a:solidFill>
+                          <a:latin typeface="맑은 고딕"/>
+                        </a:rPr>
+                        <a:t>upgrade-rehearsal-matrix.yaml</a:t>
+                      </a:r>
+                    </a:p>
+                  </a:txBody>
+                  <a:tcPr anchor="ctr" marT="25400" marB="25400" marL="76200">
+                    <a:solidFill>
+                      <a:srgbClr val="EEF2F7"/>
+                    </a:solidFill>
+                  </a:tcPr>
+                </a:tc>
+                <a:tc>
+                  <a:txBody>
+                    <a:bodyPr/>
+                    <a:lstStyle/>
+                    <a:p>
+                      <a:r>
+                        <a:rPr sz="1050" b="0">
+                          <a:solidFill>
+                            <a:srgbClr val="222730"/>
+                          </a:solidFill>
+                          <a:latin typeface="맑은 고딕"/>
+                        </a:rPr>
+                        <a:t>버전 올림 예행연습 표</a:t>
+                      </a:r>
+                    </a:p>
+                  </a:txBody>
+                  <a:tcPr anchor="ctr" marT="25400" marB="25400" marL="76200">
+                    <a:solidFill>
+                      <a:srgbClr val="EEF2F7"/>
+                    </a:solidFill>
+                  </a:tcPr>
+                </a:tc>
+                <a:tc>
+                  <a:txBody>
+                    <a:bodyPr/>
+                    <a:lstStyle/>
+                    <a:p>
+                      <a:r>
+                        <a:rPr sz="1050" b="0">
+                          <a:solidFill>
+                            <a:srgbClr val="B8791F"/>
+                          </a:solidFill>
+                          <a:latin typeface="맑은 고딕"/>
+                        </a:rPr>
+                        <a:t>보류</a:t>
+                      </a:r>
+                    </a:p>
+                  </a:txBody>
+                  <a:tcPr anchor="ctr" marT="25400" marB="25400" marL="76200">
+                    <a:solidFill>
+                      <a:srgbClr val="EEF2F7"/>
+                    </a:solidFill>
+                  </a:tcPr>
+                </a:tc>
+                <a:tc>
+                  <a:txBody>
+                    <a:bodyPr/>
+                    <a:lstStyle/>
+                    <a:p>
+                      <a:r>
+                        <a:rPr sz="1050" b="0">
+                          <a:solidFill>
+                            <a:srgbClr val="222730"/>
+                          </a:solidFill>
+                          <a:latin typeface="맑은 고딕"/>
+                        </a:rPr>
+                        <a:t>LLM에게 병합을 맡길수록 격리가 중요해진다</a:t>
+                      </a:r>
+                    </a:p>
+                  </a:txBody>
+                  <a:tcPr anchor="ctr" marT="25400" marB="25400" marL="76200">
+                    <a:solidFill>
+                      <a:srgbClr val="EEF2F7"/>
+                    </a:solidFill>
+                  </a:tcPr>
+                </a:tc>
+              </a:tr>
+              <a:tr h="365760">
+                <a:tc>
+                  <a:txBody>
+                    <a:bodyPr/>
+                    <a:lstStyle/>
+                    <a:p>
+                      <a:r>
+                        <a:rPr sz="1050" b="1">
+                          <a:solidFill>
+                            <a:srgbClr val="222730"/>
+                          </a:solidFill>
+                          <a:latin typeface="맑은 고딕"/>
+                        </a:rPr>
+                        <a:t>previous-run-test-review.yaml</a:t>
                       </a:r>
                     </a:p>
                   </a:txBody>
@@ -4983,7 +4825,7 @@
                           </a:solidFill>
                           <a:latin typeface="맑은 고딕"/>
                         </a:rPr>
-                        <a:t>high</a:t>
+                        <a:t>직전 버전 테스트 기록 확인</a:t>
                       </a:r>
                     </a:p>
                   </a:txBody>
@@ -5001,11 +4843,33 @@
                       <a:r>
                         <a:rPr sz="1050" b="0">
                           <a:solidFill>
-                            <a:srgbClr val="B8791F"/>
+                            <a:srgbClr val="2E6CB1"/>
                           </a:solidFill>
                           <a:latin typeface="맑은 고딕"/>
                         </a:rPr>
-                        <a:t>1.13.1 통과 · patch-kill 입증 · 1.13.2 코드이동→재anchor</a:t>
+                        <a:t>신규</a:t>
+                      </a:r>
+                    </a:p>
+                  </a:txBody>
+                  <a:tcPr anchor="ctr" marT="25400" marB="25400" marL="76200">
+                    <a:solidFill>
+                      <a:srgbClr val="FFFFFF"/>
+                    </a:solidFill>
+                  </a:tcPr>
+                </a:tc>
+                <a:tc>
+                  <a:txBody>
+                    <a:bodyPr/>
+                    <a:lstStyle/>
+                    <a:p>
+                      <a:r>
+                        <a:rPr sz="1050" b="0">
+                          <a:solidFill>
+                            <a:srgbClr val="222730"/>
+                          </a:solidFill>
+                          <a:latin typeface="맑은 고딕"/>
+                        </a:rPr>
+                        <a:t>LLM이 가장 잘하는 일 — 직전 기록을 읽고 원인을 정리</a:t>
                       </a:r>
                     </a:p>
                   </a:txBody>
@@ -5049,7 +4913,7 @@
                 </a:solidFill>
                 <a:latin typeface="맑은 고딕"/>
               </a:rPr>
-              <a:t>필수 Contract 9개 = 위 required_test 합(API 4 · 화면 3 · 소스 2). 008~011은 기술 보완용 임시 ID(InstanceCode·QueryReport 계약에 연결, 사용자 확정 전).</a:t>
+              <a:t>1차 검토 전체 18종 기준 — 채택 8 · 제외 3 · 보류 5 · 신규 2 제안   ※ 4페이지와 모순 아닌가: 버리는 것은 ‘경로가 안 맞으면 죽었다고 판정’하던 것. 남기는 것은 ‘어디서부터 찾을지의 출발점’ — 경로 목록이 없으면 LLM도 일을 못 한다</a:t>
             </a:r>
           </a:p>
         </p:txBody>
@@ -5200,7 +5064,7 @@
             <a:avLst/>
           </a:prstGeom>
           <a:solidFill>
-            <a:srgbClr val="1F2A44"/>
+            <a:srgbClr val="0E8F8F"/>
           </a:solidFill>
           <a:ln>
             <a:noFill/>
@@ -5254,11 +5118,11 @@
             <a:r>
               <a:rPr sz="1200" b="1">
                 <a:solidFill>
-                  <a:srgbClr val="1F2A44"/>
-                </a:solidFill>
-                <a:latin typeface="맑은 고딕"/>
-              </a:rPr>
-              <a:t>무엇이 어디까지 됐나 — 과장 없이</a:t>
+                  <a:srgbClr val="0E8F8F"/>
+                </a:solidFill>
+                <a:latin typeface="맑은 고딕"/>
+              </a:rPr>
+              <a:t>도입 제안 ③ — LLM이 못 바꾼다</a:t>
             </a:r>
           </a:p>
         </p:txBody>
@@ -5292,7 +5156,7 @@
                 </a:solidFill>
                 <a:latin typeface="맑은 고딕"/>
               </a:rPr>
-              <a:t>정직한 검증 현황</a:t>
+              <a:t>사람이 정하고, LLM이 못 바꾼다  (관리 파일 5종)</a:t>
             </a:r>
           </a:p>
         </p:txBody>
@@ -5307,7 +5171,7 @@
         </p:nvGraphicFramePr>
         <p:xfrm>
           <a:off x="548640" y="1371600"/>
-          <a:ext cx="11064240" cy="1828800"/>
+          <a:ext cx="11064240" cy="2194560"/>
         </p:xfrm>
         <a:graphic>
           <a:graphicData uri="http://schemas.openxmlformats.org/drawingml/2006/table">
@@ -5316,8 +5180,10 @@
                 <a:tableStyleId>{5C22544A-7EE6-4342-B048-85BDC9FD1C3A}</a:tableStyleId>
               </a:tblPr>
               <a:tblGrid>
-                <a:gridCol w="2926080"/>
-                <a:gridCol w="8138160"/>
+                <a:gridCol w="3200400"/>
+                <a:gridCol w="2286000"/>
+                <a:gridCol w="731520"/>
+                <a:gridCol w="4846320"/>
               </a:tblGrid>
               <a:tr h="365760">
                 <a:tc>
@@ -5332,7 +5198,7 @@
                           </a:solidFill>
                           <a:latin typeface="맑은 고딕"/>
                         </a:rPr>
-                        <a:t>항목</a:t>
+                        <a:t>파일</a:t>
                       </a:r>
                     </a:p>
                   </a:txBody>
@@ -5354,7 +5220,51 @@
                           </a:solidFill>
                           <a:latin typeface="맑은 고딕"/>
                         </a:rPr>
-                        <a:t>현황</a:t>
+                        <a:t>용도</a:t>
+                      </a:r>
+                    </a:p>
+                  </a:txBody>
+                  <a:tcPr anchor="ctr" marT="38100" marB="38100">
+                    <a:solidFill>
+                      <a:srgbClr val="1F2A44"/>
+                    </a:solidFill>
+                  </a:tcPr>
+                </a:tc>
+                <a:tc>
+                  <a:txBody>
+                    <a:bodyPr/>
+                    <a:lstStyle/>
+                    <a:p>
+                      <a:r>
+                        <a:rPr sz="1100" b="1">
+                          <a:solidFill>
+                            <a:srgbClr val="FFFFFF"/>
+                          </a:solidFill>
+                          <a:latin typeface="맑은 고딕"/>
+                        </a:rPr>
+                        <a:t>판정</a:t>
+                      </a:r>
+                    </a:p>
+                  </a:txBody>
+                  <a:tcPr anchor="ctr" marT="38100" marB="38100">
+                    <a:solidFill>
+                      <a:srgbClr val="1F2A44"/>
+                    </a:solidFill>
+                  </a:tcPr>
+                </a:tc>
+                <a:tc>
+                  <a:txBody>
+                    <a:bodyPr/>
+                    <a:lstStyle/>
+                    <a:p>
+                      <a:r>
+                        <a:rPr sz="1100" b="1">
+                          <a:solidFill>
+                            <a:srgbClr val="FFFFFF"/>
+                          </a:solidFill>
+                          <a:latin typeface="맑은 고딕"/>
+                        </a:rPr>
+                        <a:t>LLM 체제에서의 역할</a:t>
                       </a:r>
                     </a:p>
                   </a:txBody>
@@ -5378,7 +5288,29 @@
                           </a:solidFill>
                           <a:latin typeface="맑은 고딕"/>
                         </a:rPr>
-                        <a:t>1.13.1 필수 Contract</a:t>
+                        <a:t>policies/sensitive-zones.yaml</a:t>
+                      </a:r>
+                    </a:p>
+                  </a:txBody>
+                  <a:tcPr anchor="ctr" marT="25400" marB="25400" marL="76200">
+                    <a:solidFill>
+                      <a:srgbClr val="FFFFFF"/>
+                    </a:solidFill>
+                  </a:tcPr>
+                </a:tc>
+                <a:tc>
+                  <a:txBody>
+                    <a:bodyPr/>
+                    <a:lstStyle/>
+                    <a:p>
+                      <a:r>
+                        <a:rPr sz="1050" b="0">
+                          <a:solidFill>
+                            <a:srgbClr val="222730"/>
+                          </a:solidFill>
+                          <a:latin typeface="맑은 고딕"/>
+                        </a:rPr>
+                        <a:t>손대면 위험한 구역</a:t>
                       </a:r>
                     </a:p>
                   </a:txBody>
@@ -5400,7 +5332,29 @@
                           </a:solidFill>
                           <a:latin typeface="맑은 고딕"/>
                         </a:rPr>
-                        <a:t>9/9 통과 (API 4 · 화면 3 · 소스 정합성 2)</a:t>
+                        <a:t>채택</a:t>
+                      </a:r>
+                    </a:p>
+                  </a:txBody>
+                  <a:tcPr anchor="ctr" marT="25400" marB="25400" marL="76200">
+                    <a:solidFill>
+                      <a:srgbClr val="FFFFFF"/>
+                    </a:solidFill>
+                  </a:tcPr>
+                </a:tc>
+                <a:tc>
+                  <a:txBody>
+                    <a:bodyPr/>
+                    <a:lstStyle/>
+                    <a:p>
+                      <a:r>
+                        <a:rPr sz="1050" b="0">
+                          <a:solidFill>
+                            <a:srgbClr val="222730"/>
+                          </a:solidFill>
+                          <a:latin typeface="맑은 고딕"/>
+                        </a:rPr>
+                        <a:t>LLM에게 주는 유일한 하드 제약. 이 파일 자체를 못 고친다</a:t>
                       </a:r>
                     </a:p>
                   </a:txBody>
@@ -5424,7 +5378,7 @@
                           </a:solidFill>
                           <a:latin typeface="맑은 고딕"/>
                         </a:rPr>
-                        <a:t>Patch-kill (속 빈 테스트 방지)</a:t>
+                        <a:t>policies/repository-layout.yaml</a:t>
                       </a:r>
                     </a:p>
                   </a:txBody>
@@ -5442,11 +5396,55 @@
                       <a:r>
                         <a:rPr sz="1050" b="0">
                           <a:solidFill>
-                            <a:srgbClr val="B8791F"/>
+                            <a:srgbClr val="222730"/>
                           </a:solidFill>
                           <a:latin typeface="맑은 고딕"/>
                         </a:rPr>
-                        <a:t>Sybase·Tibero 소스 제거 실험 입증 완료 / 나머지 Runtime 제거 실험은 미완료</a:t>
+                        <a:t>공식/우리 것 구분 지도</a:t>
+                      </a:r>
+                    </a:p>
+                  </a:txBody>
+                  <a:tcPr anchor="ctr" marT="25400" marB="25400" marL="76200">
+                    <a:solidFill>
+                      <a:srgbClr val="EEF2F7"/>
+                    </a:solidFill>
+                  </a:tcPr>
+                </a:tc>
+                <a:tc>
+                  <a:txBody>
+                    <a:bodyPr/>
+                    <a:lstStyle/>
+                    <a:p>
+                      <a:r>
+                        <a:rPr sz="1050" b="0">
+                          <a:solidFill>
+                            <a:srgbClr val="555B66"/>
+                          </a:solidFill>
+                          <a:latin typeface="맑은 고딕"/>
+                        </a:rPr>
+                        <a:t>제외</a:t>
+                      </a:r>
+                    </a:p>
+                  </a:txBody>
+                  <a:tcPr anchor="ctr" marT="25400" marB="25400" marL="76200">
+                    <a:solidFill>
+                      <a:srgbClr val="EEF2F7"/>
+                    </a:solidFill>
+                  </a:tcPr>
+                </a:tc>
+                <a:tc>
+                  <a:txBody>
+                    <a:bodyPr/>
+                    <a:lstStyle/>
+                    <a:p>
+                      <a:r>
+                        <a:rPr sz="1050" b="0">
+                          <a:solidFill>
+                            <a:srgbClr val="222730"/>
+                          </a:solidFill>
+                          <a:latin typeface="맑은 고딕"/>
+                        </a:rPr>
+                        <a:t>폴더 구분 판단은 LLM이 한다</a:t>
                       </a:r>
                     </a:p>
                   </a:txBody>
@@ -5470,7 +5468,7 @@
                           </a:solidFill>
                           <a:latin typeface="맑은 고딕"/>
                         </a:rPr>
-                        <a:t>1.13.2 업그레이드</a:t>
+                        <a:t>policies/debt-thresholds.yaml</a:t>
                       </a:r>
                     </a:p>
                   </a:txBody>
@@ -5488,11 +5486,55 @@
                       <a:r>
                         <a:rPr sz="1050" b="0">
                           <a:solidFill>
-                            <a:srgbClr val="B8791F"/>
+                            <a:srgbClr val="222730"/>
                           </a:solidFill>
                           <a:latin typeface="맑은 고딕"/>
                         </a:rPr>
-                        <a:t>InstanceCode 실제 동작 통과 / 나머지는 부분 검증</a:t>
+                        <a:t>고친 양 상한선</a:t>
+                      </a:r>
+                    </a:p>
+                  </a:txBody>
+                  <a:tcPr anchor="ctr" marT="25400" marB="25400" marL="76200">
+                    <a:solidFill>
+                      <a:srgbClr val="FFFFFF"/>
+                    </a:solidFill>
+                  </a:tcPr>
+                </a:tc>
+                <a:tc>
+                  <a:txBody>
+                    <a:bodyPr/>
+                    <a:lstStyle/>
+                    <a:p>
+                      <a:r>
+                        <a:rPr sz="1050" b="0">
+                          <a:solidFill>
+                            <a:srgbClr val="555B66"/>
+                          </a:solidFill>
+                          <a:latin typeface="맑은 고딕"/>
+                        </a:rPr>
+                        <a:t>제외</a:t>
+                      </a:r>
+                    </a:p>
+                  </a:txBody>
+                  <a:tcPr anchor="ctr" marT="25400" marB="25400" marL="76200">
+                    <a:solidFill>
+                      <a:srgbClr val="FFFFFF"/>
+                    </a:solidFill>
+                  </a:tcPr>
+                </a:tc>
+                <a:tc>
+                  <a:txBody>
+                    <a:bodyPr/>
+                    <a:lstStyle/>
+                    <a:p>
+                      <a:r>
+                        <a:rPr sz="1050" b="0">
+                          <a:solidFill>
+                            <a:srgbClr val="222730"/>
+                          </a:solidFill>
+                          <a:latin typeface="맑은 고딕"/>
+                        </a:rPr>
+                        <a:t>LLM은 필요하면 대규모로 고칠 수 있어야 한다</a:t>
                       </a:r>
                     </a:p>
                   </a:txBody>
@@ -5516,7 +5558,29 @@
                           </a:solidFill>
                           <a:latin typeface="맑은 고딕"/>
                         </a:rPr>
-                        <a:t>주장–증거 자동 대조기</a:t>
+                        <a:t>change-intent-current.yaml</a:t>
+                      </a:r>
+                    </a:p>
+                  </a:txBody>
+                  <a:tcPr anchor="ctr" marT="25400" marB="25400" marL="76200">
+                    <a:solidFill>
+                      <a:srgbClr val="EEF2F7"/>
+                    </a:solidFill>
+                  </a:tcPr>
+                </a:tc>
+                <a:tc>
+                  <a:txBody>
+                    <a:bodyPr/>
+                    <a:lstStyle/>
+                    <a:p>
+                      <a:r>
+                        <a:rPr sz="1050" b="0">
+                          <a:solidFill>
+                            <a:srgbClr val="222730"/>
+                          </a:solidFill>
+                          <a:latin typeface="맑은 고딕"/>
+                        </a:rPr>
+                        <a:t>이번 작업의 허용/금지 범위</a:t>
                       </a:r>
                     </a:p>
                   </a:txBody>
@@ -5538,7 +5602,29 @@
                           </a:solidFill>
                           <a:latin typeface="맑은 고딕"/>
                         </a:rPr>
-                        <a:t>향후 설계 (미구현)</a:t>
+                        <a:t>제외</a:t>
+                      </a:r>
+                    </a:p>
+                  </a:txBody>
+                  <a:tcPr anchor="ctr" marT="25400" marB="25400" marL="76200">
+                    <a:solidFill>
+                      <a:srgbClr val="EEF2F7"/>
+                    </a:solidFill>
+                  </a:tcPr>
+                </a:tc>
+                <a:tc>
+                  <a:txBody>
+                    <a:bodyPr/>
+                    <a:lstStyle/>
+                    <a:p>
+                      <a:r>
+                        <a:rPr sz="1050" b="0">
+                          <a:solidFill>
+                            <a:srgbClr val="222730"/>
+                          </a:solidFill>
+                          <a:latin typeface="맑은 고딕"/>
+                        </a:rPr>
+                        <a:t>LLM이 매니페스트에서 범위를 읽어 판단</a:t>
                       </a:r>
                     </a:p>
                   </a:txBody>
@@ -5549,6 +5635,96 @@
                   </a:tcPr>
                 </a:tc>
               </a:tr>
+              <a:tr h="365760">
+                <a:tc>
+                  <a:txBody>
+                    <a:bodyPr/>
+                    <a:lstStyle/>
+                    <a:p>
+                      <a:r>
+                        <a:rPr sz="1050" b="1">
+                          <a:solidFill>
+                            <a:srgbClr val="222730"/>
+                          </a:solidFill>
+                          <a:latin typeface="맑은 고딕"/>
+                        </a:rPr>
+                        <a:t>candidate-locks/ (lock+approval)</a:t>
+                      </a:r>
+                    </a:p>
+                  </a:txBody>
+                  <a:tcPr anchor="ctr" marT="25400" marB="25400" marL="76200">
+                    <a:solidFill>
+                      <a:srgbClr val="FFFFFF"/>
+                    </a:solidFill>
+                  </a:tcPr>
+                </a:tc>
+                <a:tc>
+                  <a:txBody>
+                    <a:bodyPr/>
+                    <a:lstStyle/>
+                    <a:p>
+                      <a:r>
+                        <a:rPr sz="1050" b="0">
+                          <a:solidFill>
+                            <a:srgbClr val="222730"/>
+                          </a:solidFill>
+                          <a:latin typeface="맑은 고딕"/>
+                        </a:rPr>
+                        <a:t>코드 봉인 + 승인 묶기</a:t>
+                      </a:r>
+                    </a:p>
+                  </a:txBody>
+                  <a:tcPr anchor="ctr" marT="25400" marB="25400" marL="76200">
+                    <a:solidFill>
+                      <a:srgbClr val="FFFFFF"/>
+                    </a:solidFill>
+                  </a:tcPr>
+                </a:tc>
+                <a:tc>
+                  <a:txBody>
+                    <a:bodyPr/>
+                    <a:lstStyle/>
+                    <a:p>
+                      <a:r>
+                        <a:rPr sz="1050" b="0">
+                          <a:solidFill>
+                            <a:srgbClr val="2E8B57"/>
+                          </a:solidFill>
+                          <a:latin typeface="맑은 고딕"/>
+                        </a:rPr>
+                        <a:t>채택</a:t>
+                      </a:r>
+                    </a:p>
+                  </a:txBody>
+                  <a:tcPr anchor="ctr" marT="25400" marB="25400" marL="76200">
+                    <a:solidFill>
+                      <a:srgbClr val="FFFFFF"/>
+                    </a:solidFill>
+                  </a:tcPr>
+                </a:tc>
+                <a:tc>
+                  <a:txBody>
+                    <a:bodyPr/>
+                    <a:lstStyle/>
+                    <a:p>
+                      <a:r>
+                        <a:rPr sz="1050" b="0">
+                          <a:solidFill>
+                            <a:srgbClr val="222730"/>
+                          </a:solidFill>
+                          <a:latin typeface="맑은 고딕"/>
+                        </a:rPr>
+                        <a:t>LLM이 손댈 수 없는 영역. 판정과 승인은 못 바꾼다</a:t>
+                      </a:r>
+                    </a:p>
+                  </a:txBody>
+                  <a:tcPr anchor="ctr" marT="25400" marB="25400" marL="76200">
+                    <a:solidFill>
+                      <a:srgbClr val="FFFFFF"/>
+                    </a:solidFill>
+                  </a:tcPr>
+                </a:tc>
+              </a:tr>
             </a:tbl>
           </a:graphicData>
         </a:graphic>
@@ -5561,8 +5737,8 @@
         </p:nvSpPr>
         <p:spPr>
           <a:xfrm>
-            <a:off x="365760" y="6455664"/>
-            <a:ext cx="9144000" cy="301752"/>
+            <a:off x="548640" y="6126480"/>
+            <a:ext cx="11064240" cy="457200"/>
           </a:xfrm>
           <a:prstGeom prst="rect">
             <a:avLst/>
@@ -5576,6 +5752,40 @@
           <a:lstStyle/>
           <a:p>
             <a:r>
+              <a:rPr sz="1000" b="0">
+                <a:solidFill>
+                  <a:srgbClr val="555B66"/>
+                </a:solidFill>
+                <a:latin typeface="맑은 고딕"/>
+              </a:rPr>
+              <a:t>다 덜어내도 이 둘은 남긴다 — ① 손대면 안 되는 구역(sensitive-zones) ② 검사한 코드와 승인을 못 바꾸게 묶는 것(candidate-locks)</a:t>
+            </a:r>
+          </a:p>
+        </p:txBody>
+      </p:sp>
+      <p:sp>
+        <p:nvSpPr>
+          <p:cNvPr id="8" name="TextBox 7"/>
+          <p:cNvSpPr txBox="1"/>
+          <p:nvPr/>
+        </p:nvSpPr>
+        <p:spPr>
+          <a:xfrm>
+            <a:off x="365760" y="6455664"/>
+            <a:ext cx="9144000" cy="301752"/>
+          </a:xfrm>
+          <a:prstGeom prst="rect">
+            <a:avLst/>
+          </a:prstGeom>
+          <a:noFill/>
+        </p:spPr>
+        <p:txBody>
+          <a:bodyPr wrap="square">
+            <a:spAutoFit/>
+          </a:bodyPr>
+          <a:lstStyle/>
+          <a:p>
+            <a:r>
               <a:rPr sz="900" b="0">
                 <a:solidFill>
                   <a:srgbClr val="555B66"/>
@@ -5589,7 +5799,7 @@
       </p:sp>
       <p:sp>
         <p:nvSpPr>
-          <p:cNvPr id="8" name="TextBox 7"/>
+          <p:cNvPr id="9" name="TextBox 8"/>
           <p:cNvSpPr txBox="1"/>
           <p:nvPr/>
         </p:nvSpPr>
@@ -5699,7 +5909,7 @@
             <a:avLst/>
           </a:prstGeom>
           <a:solidFill>
-            <a:srgbClr val="0E8F8F"/>
+            <a:srgbClr val="2E8B57"/>
           </a:solidFill>
           <a:ln>
             <a:noFill/>
@@ -5753,11 +5963,11 @@
             <a:r>
               <a:rPr sz="1200" b="1">
                 <a:solidFill>
-                  <a:srgbClr val="0E8F8F"/>
-                </a:solidFill>
-                <a:latin typeface="맑은 고딕"/>
-              </a:rPr>
-              <a:t>원리 — 대표 예시 4개 (전부가 아님)</a:t>
+                  <a:srgbClr val="2E8B57"/>
+                </a:solidFill>
+                <a:latin typeface="맑은 고딕"/>
+              </a:rPr>
+              <a:t>도입 제안 ④ — 검사기가 남긴다</a:t>
             </a:r>
           </a:p>
         </p:txBody>
@@ -5791,65 +6001,22 @@
                 </a:solidFill>
                 <a:latin typeface="맑은 고딕"/>
               </a:rPr>
-              <a:t>왜 ‘MD 문서’가 아니라 ‘검사기’인가</a:t>
-            </a:r>
-          </a:p>
-        </p:txBody>
-      </p:sp>
-      <p:sp>
-        <p:nvSpPr>
-          <p:cNvPr id="6" name="TextBox 5"/>
-          <p:cNvSpPr txBox="1"/>
-          <p:nvPr/>
-        </p:nvSpPr>
-        <p:spPr>
-          <a:xfrm>
-            <a:off x="548640" y="1280160"/>
-            <a:ext cx="11064240" cy="960120"/>
-          </a:xfrm>
-          <a:prstGeom prst="rect">
-            <a:avLst/>
-          </a:prstGeom>
-          <a:noFill/>
-        </p:spPr>
-        <p:txBody>
-          <a:bodyPr wrap="square">
-            <a:spAutoFit/>
-          </a:bodyPr>
-          <a:lstStyle/>
-          <a:p>
-            <a:r>
-              <a:rPr sz="1250" b="1">
-                <a:solidFill>
-                  <a:srgbClr val="222730"/>
-                </a:solidFill>
-                <a:latin typeface="맑은 고딕"/>
-              </a:rPr>
-              <a:t>‘도움’은 아래 4개가 아니다 — 앞의 6단계 × 7개 전용 계약 전부가 LLM의 각 주장에 증거를 붙인다. 아래는 그 원리의 대표 예시다. </a:t>
-            </a:r>
-            <a:r>
-              <a:rPr sz="1250" b="0">
-                <a:solidFill>
-                  <a:srgbClr val="222730"/>
-                </a:solidFill>
-                <a:latin typeface="맑은 고딕"/>
-              </a:rPr>
-              <a:t>문서는 스스로 적는 글이라 안 해보고/고쳐도 티가 안 나지만, 검사기 증거는 지어내기 어렵고 보호된 CI에서 생성·보관하면 임의 변경을 탐지할 수 있다.</a:t>
+              <a:t>검사기가 자동으로 남긴다  (관리 파일 4종)</a:t>
             </a:r>
           </a:p>
         </p:txBody>
       </p:sp>
       <p:graphicFrame>
         <p:nvGraphicFramePr>
-          <p:cNvPr id="7" name="Table 6"/>
+          <p:cNvPr id="6" name="Table 5"/>
           <p:cNvGraphicFramePr>
             <a:graphicFrameLocks noGrp="1"/>
           </p:cNvGraphicFramePr>
           <p:nvPr/>
         </p:nvGraphicFramePr>
         <p:xfrm>
-          <a:off x="548640" y="2286000"/>
-          <a:ext cx="11064240" cy="2743200"/>
+          <a:off x="548640" y="1371600"/>
+          <a:ext cx="11064240" cy="1828800"/>
         </p:xfrm>
         <a:graphic>
           <a:graphicData uri="http://schemas.openxmlformats.org/drawingml/2006/table">
@@ -5858,11 +6025,12 @@
                 <a:tableStyleId>{5C22544A-7EE6-4342-B048-85BDC9FD1C3A}</a:tableStyleId>
               </a:tblPr>
               <a:tblGrid>
-                <a:gridCol w="2743200"/>
-                <a:gridCol w="3566160"/>
-                <a:gridCol w="4754880"/>
+                <a:gridCol w="3200400"/>
+                <a:gridCol w="2286000"/>
+                <a:gridCol w="731520"/>
+                <a:gridCol w="4846320"/>
               </a:tblGrid>
-              <a:tr h="548640">
+              <a:tr h="365760">
                 <a:tc>
                   <a:txBody>
                     <a:bodyPr/>
@@ -5875,11 +6043,11 @@
                           </a:solidFill>
                           <a:latin typeface="맑은 고딕"/>
                         </a:rPr>
-                        <a:t>LLM의 주장</a:t>
+                        <a:t>파일</a:t>
                       </a:r>
                     </a:p>
                   </a:txBody>
-                  <a:tcPr marL="76200">
+                  <a:tcPr anchor="ctr" marT="38100" marB="38100">
                     <a:solidFill>
                       <a:srgbClr val="1F2A44"/>
                     </a:solidFill>
@@ -5897,11 +6065,11 @@
                           </a:solidFill>
                           <a:latin typeface="맑은 고딕"/>
                         </a:rPr>
-                        <a:t>문서(MD)만: 위험</a:t>
+                        <a:t>용도</a:t>
                       </a:r>
                     </a:p>
                   </a:txBody>
-                  <a:tcPr marL="76200">
+                  <a:tcPr anchor="ctr" marT="38100" marB="38100">
                     <a:solidFill>
                       <a:srgbClr val="1F2A44"/>
                     </a:solidFill>
@@ -5919,18 +6087,16 @@
                           </a:solidFill>
                           <a:latin typeface="맑은 고딕"/>
                         </a:rPr>
-                        <a:t>검사기가 하는 것</a:t>
+                        <a:t>판정</a:t>
                       </a:r>
                     </a:p>
                   </a:txBody>
-                  <a:tcPr marL="76200">
+                  <a:tcPr anchor="ctr" marT="38100" marB="38100">
                     <a:solidFill>
                       <a:srgbClr val="1F2A44"/>
                     </a:solidFill>
                   </a:tcPr>
                 </a:tc>
-              </a:tr>
-              <a:tr h="548640">
                 <a:tc>
                   <a:txBody>
                     <a:bodyPr/>
@@ -5939,15 +6105,39 @@
                       <a:r>
                         <a:rPr sz="1100" b="1">
                           <a:solidFill>
+                            <a:srgbClr val="FFFFFF"/>
+                          </a:solidFill>
+                          <a:latin typeface="맑은 고딕"/>
+                        </a:rPr>
+                        <a:t>LLM 체제에서의 역할</a:t>
+                      </a:r>
+                    </a:p>
+                  </a:txBody>
+                  <a:tcPr anchor="ctr" marT="38100" marB="38100">
+                    <a:solidFill>
+                      <a:srgbClr val="1F2A44"/>
+                    </a:solidFill>
+                  </a:tcPr>
+                </a:tc>
+              </a:tr>
+              <a:tr h="365760">
+                <a:tc>
+                  <a:txBody>
+                    <a:bodyPr/>
+                    <a:lstStyle/>
+                    <a:p>
+                      <a:r>
+                        <a:rPr sz="1050" b="1">
+                          <a:solidFill>
                             <a:srgbClr val="222730"/>
                           </a:solidFill>
                           <a:latin typeface="맑은 고딕"/>
                         </a:rPr>
-                        <a:t>“이 파일 바꿨다”</a:t>
+                        <a:t>source-candidate-evidence.yaml</a:t>
                       </a:r>
                     </a:p>
                   </a:txBody>
-                  <a:tcPr marL="76200">
+                  <a:tcPr anchor="ctr" marT="25400" marB="25400" marL="76200">
                     <a:solidFill>
                       <a:srgbClr val="FFFFFF"/>
                     </a:solidFill>
@@ -5959,17 +6149,17 @@
                     <a:lstStyle/>
                     <a:p>
                       <a:r>
-                        <a:rPr sz="1100" b="0">
+                        <a:rPr sz="1050" b="0">
                           <a:solidFill>
-                            <a:srgbClr val="B03A2E"/>
+                            <a:srgbClr val="222730"/>
                           </a:solidFill>
                           <a:latin typeface="맑은 고딕"/>
                         </a:rPr>
-                        <a:t>말만 믿게 됨</a:t>
+                        <a:t>소스 검사 결과 기록</a:t>
                       </a:r>
                     </a:p>
                   </a:txBody>
-                  <a:tcPr marL="76200">
+                  <a:tcPr anchor="ctr" marT="25400" marB="25400" marL="76200">
                     <a:solidFill>
                       <a:srgbClr val="FFFFFF"/>
                     </a:solidFill>
@@ -5981,41 +6171,63 @@
                     <a:lstStyle/>
                     <a:p>
                       <a:r>
-                        <a:rPr sz="1100" b="0">
+                        <a:rPr sz="1050" b="0">
                           <a:solidFill>
                             <a:srgbClr val="2E8B57"/>
                           </a:solidFill>
                           <a:latin typeface="맑은 고딕"/>
                         </a:rPr>
-                        <a:t>실제 커밋 변경을 직접 대조</a:t>
+                        <a:t>채택</a:t>
                       </a:r>
                     </a:p>
                   </a:txBody>
-                  <a:tcPr marL="76200">
+                  <a:tcPr anchor="ctr" marT="25400" marB="25400" marL="76200">
+                    <a:solidFill>
+                      <a:srgbClr val="FFFFFF"/>
+                    </a:solidFill>
+                  </a:tcPr>
+                </a:tc>
+                <a:tc>
+                  <a:txBody>
+                    <a:bodyPr/>
+                    <a:lstStyle/>
+                    <a:p>
+                      <a:r>
+                        <a:rPr sz="1050" b="0">
+                          <a:solidFill>
+                            <a:srgbClr val="222730"/>
+                          </a:solidFill>
+                          <a:latin typeface="맑은 고딕"/>
+                        </a:rPr>
+                        <a:t>LLM 주장과 대조할 원본. LLM은 이 파일을 만들지 않는다</a:t>
+                      </a:r>
+                    </a:p>
+                  </a:txBody>
+                  <a:tcPr anchor="ctr" marT="25400" marB="25400" marL="76200">
                     <a:solidFill>
                       <a:srgbClr val="FFFFFF"/>
                     </a:solidFill>
                   </a:tcPr>
                 </a:tc>
               </a:tr>
-              <a:tr h="548640">
+              <a:tr h="365760">
                 <a:tc>
                   <a:txBody>
                     <a:bodyPr/>
                     <a:lstStyle/>
                     <a:p>
                       <a:r>
-                        <a:rPr sz="1100" b="1">
+                        <a:rPr sz="1050" b="1">
                           <a:solidFill>
                             <a:srgbClr val="222730"/>
                           </a:solidFill>
                           <a:latin typeface="맑은 고딕"/>
                         </a:rPr>
-                        <a:t>“충돌 0건”</a:t>
+                        <a:t>source-patch-kill-evidence.yaml</a:t>
                       </a:r>
                     </a:p>
                   </a:txBody>
-                  <a:tcPr marL="76200">
+                  <a:tcPr anchor="ctr" marT="25400" marB="25400" marL="76200">
                     <a:solidFill>
                       <a:srgbClr val="EEF2F7"/>
                     </a:solidFill>
@@ -6027,17 +6239,17 @@
                     <a:lstStyle/>
                     <a:p>
                       <a:r>
-                        <a:rPr sz="1100" b="0">
+                        <a:rPr sz="1050" b="0">
                           <a:solidFill>
-                            <a:srgbClr val="B03A2E"/>
+                            <a:srgbClr val="222730"/>
                           </a:solidFill>
                           <a:latin typeface="맑은 고딕"/>
                         </a:rPr>
-                        <a:t>안 해봐도 적힘</a:t>
+                        <a:t>빼보기 결과 기록</a:t>
                       </a:r>
                     </a:p>
                   </a:txBody>
-                  <a:tcPr marL="76200">
+                  <a:tcPr anchor="ctr" marT="25400" marB="25400" marL="76200">
                     <a:solidFill>
                       <a:srgbClr val="EEF2F7"/>
                     </a:solidFill>
@@ -6049,41 +6261,63 @@
                     <a:lstStyle/>
                     <a:p>
                       <a:r>
-                        <a:rPr sz="1100" b="0">
+                        <a:rPr sz="1050" b="0">
                           <a:solidFill>
-                            <a:srgbClr val="2E8B57"/>
+                            <a:srgbClr val="B8791F"/>
                           </a:solidFill>
                           <a:latin typeface="맑은 고딕"/>
                         </a:rPr>
-                        <a:t>임시로 실제 병합해 충돌 수를 센다</a:t>
+                        <a:t>보류</a:t>
                       </a:r>
                     </a:p>
                   </a:txBody>
-                  <a:tcPr marL="76200">
+                  <a:tcPr anchor="ctr" marT="25400" marB="25400" marL="76200">
+                    <a:solidFill>
+                      <a:srgbClr val="EEF2F7"/>
+                    </a:solidFill>
+                  </a:tcPr>
+                </a:tc>
+                <a:tc>
+                  <a:txBody>
+                    <a:bodyPr/>
+                    <a:lstStyle/>
+                    <a:p>
+                      <a:r>
+                        <a:rPr sz="1050" b="0">
+                          <a:solidFill>
+                            <a:srgbClr val="222730"/>
+                          </a:solidFill>
+                          <a:latin typeface="맑은 고딕"/>
+                        </a:rPr>
+                        <a:t>‘공식 버전에서 몇 개가 제대로 실패했나’가 기록될 자리</a:t>
+                      </a:r>
+                    </a:p>
+                  </a:txBody>
+                  <a:tcPr anchor="ctr" marT="25400" marB="25400" marL="76200">
                     <a:solidFill>
                       <a:srgbClr val="EEF2F7"/>
                     </a:solidFill>
                   </a:tcPr>
                 </a:tc>
               </a:tr>
-              <a:tr h="548640">
+              <a:tr h="365760">
                 <a:tc>
                   <a:txBody>
                     <a:bodyPr/>
                     <a:lstStyle/>
                     <a:p>
                       <a:r>
-                        <a:rPr sz="1100" b="1">
+                        <a:rPr sz="1050" b="1">
                           <a:solidFill>
                             <a:srgbClr val="222730"/>
                           </a:solidFill>
                           <a:latin typeface="맑은 고딕"/>
                         </a:rPr>
-                        <a:t>“테스트 통과”</a:t>
+                        <a:t>ui-typecheck-baseline-evidence.yaml</a:t>
                       </a:r>
                     </a:p>
                   </a:txBody>
-                  <a:tcPr marL="76200">
+                  <a:tcPr anchor="ctr" marT="25400" marB="25400" marL="76200">
                     <a:solidFill>
                       <a:srgbClr val="FFFFFF"/>
                     </a:solidFill>
@@ -6095,17 +6329,17 @@
                     <a:lstStyle/>
                     <a:p>
                       <a:r>
-                        <a:rPr sz="1100" b="0">
+                        <a:rPr sz="1050" b="0">
                           <a:solidFill>
-                            <a:srgbClr val="B03A2E"/>
+                            <a:srgbClr val="222730"/>
                           </a:solidFill>
                           <a:latin typeface="맑은 고딕"/>
                         </a:rPr>
-                        <a:t>적으면 끝</a:t>
+                        <a:t>화면 타입오류 기준선</a:t>
                       </a:r>
                     </a:p>
                   </a:txBody>
-                  <a:tcPr marL="76200">
+                  <a:tcPr anchor="ctr" marT="25400" marB="25400" marL="76200">
                     <a:solidFill>
                       <a:srgbClr val="FFFFFF"/>
                     </a:solidFill>
@@ -6117,41 +6351,63 @@
                     <a:lstStyle/>
                     <a:p>
                       <a:r>
-                        <a:rPr sz="1100" b="0">
+                        <a:rPr sz="1050" b="0">
                           <a:solidFill>
-                            <a:srgbClr val="2E8B57"/>
+                            <a:srgbClr val="B8791F"/>
                           </a:solidFill>
                           <a:latin typeface="맑은 고딕"/>
                         </a:rPr>
-                        <a:t>실제 서버에서 재실행, 미실행=통과 아님</a:t>
+                        <a:t>보류</a:t>
                       </a:r>
                     </a:p>
                   </a:txBody>
-                  <a:tcPr marL="76200">
+                  <a:tcPr anchor="ctr" marT="25400" marB="25400" marL="76200">
+                    <a:solidFill>
+                      <a:srgbClr val="FFFFFF"/>
+                    </a:solidFill>
+                  </a:tcPr>
+                </a:tc>
+                <a:tc>
+                  <a:txBody>
+                    <a:bodyPr/>
+                    <a:lstStyle/>
+                    <a:p>
+                      <a:r>
+                        <a:rPr sz="1050" b="0">
+                          <a:solidFill>
+                            <a:srgbClr val="222730"/>
+                          </a:solidFill>
+                          <a:latin typeface="맑은 고딕"/>
+                        </a:rPr>
+                        <a:t>LLM이 옮겨 붙인 결과를 값싸게 검증</a:t>
+                      </a:r>
+                    </a:p>
+                  </a:txBody>
+                  <a:tcPr anchor="ctr" marT="25400" marB="25400" marL="76200">
                     <a:solidFill>
                       <a:srgbClr val="FFFFFF"/>
                     </a:solidFill>
                   </a:tcPr>
                 </a:tc>
               </a:tr>
-              <a:tr h="548640">
+              <a:tr h="365760">
                 <a:tc>
                   <a:txBody>
                     <a:bodyPr/>
                     <a:lstStyle/>
                     <a:p>
                       <a:r>
-                        <a:rPr sz="1100" b="1">
+                        <a:rPr sz="1050" b="1">
                           <a:solidFill>
                             <a:srgbClr val="222730"/>
                           </a:solidFill>
                           <a:latin typeface="맑은 고딕"/>
                         </a:rPr>
-                        <a:t>“승인함”</a:t>
+                        <a:t>previous-run-test-review-evidence.yaml</a:t>
                       </a:r>
                     </a:p>
                   </a:txBody>
-                  <a:tcPr marL="76200">
+                  <a:tcPr anchor="ctr" marT="25400" marB="25400" marL="76200">
                     <a:solidFill>
                       <a:srgbClr val="EEF2F7"/>
                     </a:solidFill>
@@ -6163,17 +6419,17 @@
                     <a:lstStyle/>
                     <a:p>
                       <a:r>
-                        <a:rPr sz="1100" b="0">
+                        <a:rPr sz="1050" b="0">
                           <a:solidFill>
-                            <a:srgbClr val="B03A2E"/>
+                            <a:srgbClr val="222730"/>
                           </a:solidFill>
                           <a:latin typeface="맑은 고딕"/>
                         </a:rPr>
-                        <a:t>아무 이름이나</a:t>
+                        <a:t>직전 기록 확인 결과</a:t>
                       </a:r>
                     </a:p>
                   </a:txBody>
-                  <a:tcPr marL="76200">
+                  <a:tcPr anchor="ctr" marT="25400" marB="25400" marL="76200">
                     <a:solidFill>
                       <a:srgbClr val="EEF2F7"/>
                     </a:solidFill>
@@ -6185,17 +6441,39 @@
                     <a:lstStyle/>
                     <a:p>
                       <a:r>
-                        <a:rPr sz="1100" b="0">
+                        <a:rPr sz="1050" b="0">
                           <a:solidFill>
-                            <a:srgbClr val="2E8B57"/>
+                            <a:srgbClr val="2E6CB1"/>
                           </a:solidFill>
                           <a:latin typeface="맑은 고딕"/>
                         </a:rPr>
-                        <a:t>승인을 결과에 묶어 입력 바뀌면 무효</a:t>
+                        <a:t>신규</a:t>
                       </a:r>
                     </a:p>
                   </a:txBody>
-                  <a:tcPr marL="76200">
+                  <a:tcPr anchor="ctr" marT="25400" marB="25400" marL="76200">
+                    <a:solidFill>
+                      <a:srgbClr val="EEF2F7"/>
+                    </a:solidFill>
+                  </a:tcPr>
+                </a:tc>
+                <a:tc>
+                  <a:txBody>
+                    <a:bodyPr/>
+                    <a:lstStyle/>
+                    <a:p>
+                      <a:r>
+                        <a:rPr sz="1050" b="0">
+                          <a:solidFill>
+                            <a:srgbClr val="222730"/>
+                          </a:solidFill>
+                          <a:latin typeface="맑은 고딕"/>
+                        </a:rPr>
+                        <a:t>LLM이 정리한 회고를 기록으로 고정</a:t>
+                      </a:r>
+                    </a:p>
+                  </a:txBody>
+                  <a:tcPr anchor="ctr" marT="25400" marB="25400" marL="76200">
                     <a:solidFill>
                       <a:srgbClr val="EEF2F7"/>
                     </a:solidFill>
@@ -6208,14 +6486,14 @@
       </p:graphicFrame>
       <p:sp>
         <p:nvSpPr>
-          <p:cNvPr id="8" name="TextBox 7"/>
+          <p:cNvPr id="7" name="TextBox 6"/>
           <p:cNvSpPr txBox="1"/>
           <p:nvPr/>
         </p:nvSpPr>
         <p:spPr>
           <a:xfrm>
-            <a:off x="548640" y="5394960"/>
-            <a:ext cx="11064240" cy="731520"/>
+            <a:off x="548640" y="6126480"/>
+            <a:ext cx="11064240" cy="457200"/>
           </a:xfrm>
           <a:prstGeom prst="rect">
             <a:avLst/>
@@ -6229,20 +6507,20 @@
           <a:lstStyle/>
           <a:p>
             <a:r>
-              <a:rPr sz="1300" b="1">
-                <a:solidFill>
-                  <a:srgbClr val="2E8B57"/>
-                </a:solidFill>
-                <a:latin typeface="맑은 고딕"/>
-              </a:rPr>
-              <a:t>한 줄: 검사기는 ‘LLM이 실제로 일했다는 증거’를 만든다 — 보호된 CI에서 만들고 보관하면 임의 변경이 탐지된다.</a:t>
-            </a:r>
-          </a:p>
-        </p:txBody>
-      </p:sp>
-      <p:sp>
-        <p:nvSpPr>
-          <p:cNvPr id="9" name="TextBox 8"/>
+              <a:rPr sz="1000" b="0">
+                <a:solidFill>
+                  <a:srgbClr val="555B66"/>
+                </a:solidFill>
+                <a:latin typeface="맑은 고딕"/>
+              </a:rPr>
+              <a:t>LLM은 “테스트 통과했습니다”라고 적는 데 비용이 0이다 → 검사기가 독립적으로 만든 이 기록만이 LLM 주장의 근거가 된다. 관리 부담은 원래 0인 영역</a:t>
+            </a:r>
+          </a:p>
+        </p:txBody>
+      </p:sp>
+      <p:sp>
+        <p:nvSpPr>
+          <p:cNvPr id="8" name="TextBox 7"/>
           <p:cNvSpPr txBox="1"/>
           <p:nvPr/>
         </p:nvSpPr>
@@ -6276,7 +6554,7 @@
       </p:sp>
       <p:sp>
         <p:nvSpPr>
-          <p:cNvPr id="10" name="TextBox 9"/>
+          <p:cNvPr id="9" name="TextBox 8"/>
           <p:cNvSpPr txBox="1"/>
           <p:nvPr/>
         </p:nvSpPr>
@@ -6386,7 +6664,7 @@
             <a:avLst/>
           </a:prstGeom>
           <a:solidFill>
-            <a:srgbClr val="1F2A44"/>
+            <a:srgbClr val="2E6CB1"/>
           </a:solidFill>
           <a:ln>
             <a:noFill/>
@@ -6440,11 +6718,11 @@
             <a:r>
               <a:rPr sz="1200" b="1">
                 <a:solidFill>
-                  <a:srgbClr val="1F2A44"/>
-                </a:solidFill>
-                <a:latin typeface="맑은 고딕"/>
-              </a:rPr>
-              <a:t>오해 방지</a:t>
+                  <a:srgbClr val="2E6CB1"/>
+                </a:solidFill>
+                <a:latin typeface="맑은 고딕"/>
+              </a:rPr>
+              <a:t>도입 제안 마무리</a:t>
             </a:r>
           </a:p>
         </p:txBody>
@@ -6478,21 +6756,589 @@
                 </a:solidFill>
                 <a:latin typeface="맑은 고딕"/>
               </a:rPr>
-              <a:t>지켜야 할 조건 &amp; 검사기의 정확한 위치</a:t>
-            </a:r>
-          </a:p>
-        </p:txBody>
-      </p:sp>
-      <p:sp>
-        <p:nvSpPr>
-          <p:cNvPr id="6" name="TextBox 5"/>
+              <a:t>그래서 빨라지나 — 시간이 어디서 늘고 줄나</a:t>
+            </a:r>
+          </a:p>
+        </p:txBody>
+      </p:sp>
+      <p:graphicFrame>
+        <p:nvGraphicFramePr>
+          <p:cNvPr id="6" name="Table 5"/>
+          <p:cNvGraphicFramePr>
+            <a:graphicFrameLocks noGrp="1"/>
+          </p:cNvGraphicFramePr>
+          <p:nvPr/>
+        </p:nvGraphicFramePr>
+        <p:xfrm>
+          <a:off x="548640" y="1371600"/>
+          <a:ext cx="11064240" cy="2194560"/>
+        </p:xfrm>
+        <a:graphic>
+          <a:graphicData uri="http://schemas.openxmlformats.org/drawingml/2006/table">
+            <a:tbl>
+              <a:tblPr>
+                <a:tableStyleId>{5C22544A-7EE6-4342-B048-85BDC9FD1C3A}</a:tableStyleId>
+              </a:tblPr>
+              <a:tblGrid>
+                <a:gridCol w="4206240"/>
+                <a:gridCol w="1280160"/>
+                <a:gridCol w="1097280"/>
+                <a:gridCol w="4480560"/>
+              </a:tblGrid>
+              <a:tr h="365760">
+                <a:tc>
+                  <a:txBody>
+                    <a:bodyPr/>
+                    <a:lstStyle/>
+                    <a:p>
+                      <a:r>
+                        <a:rPr sz="1100" b="1">
+                          <a:solidFill>
+                            <a:srgbClr val="FFFFFF"/>
+                          </a:solidFill>
+                          <a:latin typeface="맑은 고딕"/>
+                        </a:rPr>
+                        <a:t>버전업에서 시간이 드는 일</a:t>
+                      </a:r>
+                    </a:p>
+                  </a:txBody>
+                  <a:tcPr anchor="ctr" marT="38100" marB="38100">
+                    <a:solidFill>
+                      <a:srgbClr val="1F2A44"/>
+                    </a:solidFill>
+                  </a:tcPr>
+                </a:tc>
+                <a:tc>
+                  <a:txBody>
+                    <a:bodyPr/>
+                    <a:lstStyle/>
+                    <a:p>
+                      <a:r>
+                        <a:rPr sz="1100" b="1">
+                          <a:solidFill>
+                            <a:srgbClr val="FFFFFF"/>
+                          </a:solidFill>
+                          <a:latin typeface="맑은 고딕"/>
+                        </a:rPr>
+                        <a:t>지금 누가</a:t>
+                      </a:r>
+                    </a:p>
+                  </a:txBody>
+                  <a:tcPr anchor="ctr" marT="38100" marB="38100">
+                    <a:solidFill>
+                      <a:srgbClr val="1F2A44"/>
+                    </a:solidFill>
+                  </a:tcPr>
+                </a:tc>
+                <a:tc>
+                  <a:txBody>
+                    <a:bodyPr/>
+                    <a:lstStyle/>
+                    <a:p>
+                      <a:r>
+                        <a:rPr sz="1100" b="1">
+                          <a:solidFill>
+                            <a:srgbClr val="FFFFFF"/>
+                          </a:solidFill>
+                          <a:latin typeface="맑은 고딕"/>
+                        </a:rPr>
+                        <a:t>크기</a:t>
+                      </a:r>
+                    </a:p>
+                  </a:txBody>
+                  <a:tcPr anchor="ctr" marT="38100" marB="38100">
+                    <a:solidFill>
+                      <a:srgbClr val="1F2A44"/>
+                    </a:solidFill>
+                  </a:tcPr>
+                </a:tc>
+                <a:tc>
+                  <a:txBody>
+                    <a:bodyPr/>
+                    <a:lstStyle/>
+                    <a:p>
+                      <a:r>
+                        <a:rPr sz="1100" b="1">
+                          <a:solidFill>
+                            <a:srgbClr val="FFFFFF"/>
+                          </a:solidFill>
+                          <a:latin typeface="맑은 고딕"/>
+                        </a:rPr>
+                        <a:t>바뀌면</a:t>
+                      </a:r>
+                    </a:p>
+                  </a:txBody>
+                  <a:tcPr anchor="ctr" marT="38100" marB="38100">
+                    <a:solidFill>
+                      <a:srgbClr val="1F2A44"/>
+                    </a:solidFill>
+                  </a:tcPr>
+                </a:tc>
+              </a:tr>
+              <a:tr h="365760">
+                <a:tc>
+                  <a:txBody>
+                    <a:bodyPr/>
+                    <a:lstStyle/>
+                    <a:p>
+                      <a:r>
+                        <a:rPr sz="1050" b="1">
+                          <a:solidFill>
+                            <a:srgbClr val="222730"/>
+                          </a:solidFill>
+                          <a:latin typeface="맑은 고딕"/>
+                        </a:rPr>
+                        <a:t>병합·충돌 해결 + 리로케이션 재적용</a:t>
+                      </a:r>
+                    </a:p>
+                  </a:txBody>
+                  <a:tcPr anchor="ctr" marT="25400" marB="25400" marL="76200">
+                    <a:solidFill>
+                      <a:srgbClr val="FFFFFF"/>
+                    </a:solidFill>
+                  </a:tcPr>
+                </a:tc>
+                <a:tc>
+                  <a:txBody>
+                    <a:bodyPr/>
+                    <a:lstStyle/>
+                    <a:p>
+                      <a:r>
+                        <a:rPr sz="1050" b="0">
+                          <a:solidFill>
+                            <a:srgbClr val="222730"/>
+                          </a:solidFill>
+                          <a:latin typeface="맑은 고딕"/>
+                        </a:rPr>
+                        <a:t>사람</a:t>
+                      </a:r>
+                    </a:p>
+                  </a:txBody>
+                  <a:tcPr anchor="ctr" marT="25400" marB="25400" marL="76200">
+                    <a:solidFill>
+                      <a:srgbClr val="FFFFFF"/>
+                    </a:solidFill>
+                  </a:tcPr>
+                </a:tc>
+                <a:tc>
+                  <a:txBody>
+                    <a:bodyPr/>
+                    <a:lstStyle/>
+                    <a:p>
+                      <a:r>
+                        <a:rPr sz="1050" b="0">
+                          <a:solidFill>
+                            <a:srgbClr val="222730"/>
+                          </a:solidFill>
+                          <a:latin typeface="맑은 고딕"/>
+                        </a:rPr>
+                        <a:t>가장 큼</a:t>
+                      </a:r>
+                    </a:p>
+                  </a:txBody>
+                  <a:tcPr anchor="ctr" marT="25400" marB="25400" marL="76200">
+                    <a:solidFill>
+                      <a:srgbClr val="FFFFFF"/>
+                    </a:solidFill>
+                  </a:tcPr>
+                </a:tc>
+                <a:tc>
+                  <a:txBody>
+                    <a:bodyPr/>
+                    <a:lstStyle/>
+                    <a:p>
+                      <a:r>
+                        <a:rPr sz="1050" b="0">
+                          <a:solidFill>
+                            <a:srgbClr val="2E8B57"/>
+                          </a:solidFill>
+                          <a:latin typeface="맑은 고딕"/>
+                        </a:rPr>
+                        <a:t>LLM이 대신 → 줄어듦</a:t>
+                      </a:r>
+                    </a:p>
+                  </a:txBody>
+                  <a:tcPr anchor="ctr" marT="25400" marB="25400" marL="76200">
+                    <a:solidFill>
+                      <a:srgbClr val="FFFFFF"/>
+                    </a:solidFill>
+                  </a:tcPr>
+                </a:tc>
+              </a:tr>
+              <a:tr h="365760">
+                <a:tc>
+                  <a:txBody>
+                    <a:bodyPr/>
+                    <a:lstStyle/>
+                    <a:p>
+                      <a:r>
+                        <a:rPr sz="1050" b="1">
+                          <a:solidFill>
+                            <a:srgbClr val="222730"/>
+                          </a:solidFill>
+                          <a:latin typeface="맑은 고딕"/>
+                        </a:rPr>
+                        <a:t>관리 파일 ~25개 · 커밋 이력 갱신</a:t>
+                      </a:r>
+                    </a:p>
+                  </a:txBody>
+                  <a:tcPr anchor="ctr" marT="25400" marB="25400" marL="76200">
+                    <a:solidFill>
+                      <a:srgbClr val="EEF2F7"/>
+                    </a:solidFill>
+                  </a:tcPr>
+                </a:tc>
+                <a:tc>
+                  <a:txBody>
+                    <a:bodyPr/>
+                    <a:lstStyle/>
+                    <a:p>
+                      <a:r>
+                        <a:rPr sz="1050" b="0">
+                          <a:solidFill>
+                            <a:srgbClr val="222730"/>
+                          </a:solidFill>
+                          <a:latin typeface="맑은 고딕"/>
+                        </a:rPr>
+                        <a:t>사람</a:t>
+                      </a:r>
+                    </a:p>
+                  </a:txBody>
+                  <a:tcPr anchor="ctr" marT="25400" marB="25400" marL="76200">
+                    <a:solidFill>
+                      <a:srgbClr val="EEF2F7"/>
+                    </a:solidFill>
+                  </a:tcPr>
+                </a:tc>
+                <a:tc>
+                  <a:txBody>
+                    <a:bodyPr/>
+                    <a:lstStyle/>
+                    <a:p>
+                      <a:r>
+                        <a:rPr sz="1050" b="0">
+                          <a:solidFill>
+                            <a:srgbClr val="222730"/>
+                          </a:solidFill>
+                          <a:latin typeface="맑은 고딕"/>
+                        </a:rPr>
+                        <a:t>큼</a:t>
+                      </a:r>
+                    </a:p>
+                  </a:txBody>
+                  <a:tcPr anchor="ctr" marT="25400" marB="25400" marL="76200">
+                    <a:solidFill>
+                      <a:srgbClr val="EEF2F7"/>
+                    </a:solidFill>
+                  </a:tcPr>
+                </a:tc>
+                <a:tc>
+                  <a:txBody>
+                    <a:bodyPr/>
+                    <a:lstStyle/>
+                    <a:p>
+                      <a:r>
+                        <a:rPr sz="1050" b="0">
+                          <a:solidFill>
+                            <a:srgbClr val="2E8B57"/>
+                          </a:solidFill>
+                          <a:latin typeface="맑은 고딕"/>
+                        </a:rPr>
+                        <a:t>LLM이 초안 → 줄어듦</a:t>
+                      </a:r>
+                    </a:p>
+                  </a:txBody>
+                  <a:tcPr anchor="ctr" marT="25400" marB="25400" marL="76200">
+                    <a:solidFill>
+                      <a:srgbClr val="EEF2F7"/>
+                    </a:solidFill>
+                  </a:tcPr>
+                </a:tc>
+              </a:tr>
+              <a:tr h="365760">
+                <a:tc>
+                  <a:txBody>
+                    <a:bodyPr/>
+                    <a:lstStyle/>
+                    <a:p>
+                      <a:r>
+                        <a:rPr sz="1050" b="1">
+                          <a:solidFill>
+                            <a:srgbClr val="222730"/>
+                          </a:solidFill>
+                          <a:latin typeface="맑은 고딕"/>
+                        </a:rPr>
+                        <a:t>검사·테스트 실행</a:t>
+                      </a:r>
+                    </a:p>
+                  </a:txBody>
+                  <a:tcPr anchor="ctr" marT="25400" marB="25400" marL="76200">
+                    <a:solidFill>
+                      <a:srgbClr val="FFFFFF"/>
+                    </a:solidFill>
+                  </a:tcPr>
+                </a:tc>
+                <a:tc>
+                  <a:txBody>
+                    <a:bodyPr/>
+                    <a:lstStyle/>
+                    <a:p>
+                      <a:r>
+                        <a:rPr sz="1050" b="0">
+                          <a:solidFill>
+                            <a:srgbClr val="222730"/>
+                          </a:solidFill>
+                          <a:latin typeface="맑은 고딕"/>
+                        </a:rPr>
+                        <a:t>기계</a:t>
+                      </a:r>
+                    </a:p>
+                  </a:txBody>
+                  <a:tcPr anchor="ctr" marT="25400" marB="25400" marL="76200">
+                    <a:solidFill>
+                      <a:srgbClr val="FFFFFF"/>
+                    </a:solidFill>
+                  </a:tcPr>
+                </a:tc>
+                <a:tc>
+                  <a:txBody>
+                    <a:bodyPr/>
+                    <a:lstStyle/>
+                    <a:p>
+                      <a:r>
+                        <a:rPr sz="1050" b="0">
+                          <a:solidFill>
+                            <a:srgbClr val="222730"/>
+                          </a:solidFill>
+                          <a:latin typeface="맑은 고딕"/>
+                        </a:rPr>
+                        <a:t>—</a:t>
+                      </a:r>
+                    </a:p>
+                  </a:txBody>
+                  <a:tcPr anchor="ctr" marT="25400" marB="25400" marL="76200">
+                    <a:solidFill>
+                      <a:srgbClr val="FFFFFF"/>
+                    </a:solidFill>
+                  </a:tcPr>
+                </a:tc>
+                <a:tc>
+                  <a:txBody>
+                    <a:bodyPr/>
+                    <a:lstStyle/>
+                    <a:p>
+                      <a:r>
+                        <a:rPr sz="1050" b="0">
+                          <a:solidFill>
+                            <a:srgbClr val="555B66"/>
+                          </a:solidFill>
+                          <a:latin typeface="맑은 고딕"/>
+                        </a:rPr>
+                        <a:t>늘어도 사람 시간은 아님</a:t>
+                      </a:r>
+                    </a:p>
+                  </a:txBody>
+                  <a:tcPr anchor="ctr" marT="25400" marB="25400" marL="76200">
+                    <a:solidFill>
+                      <a:srgbClr val="FFFFFF"/>
+                    </a:solidFill>
+                  </a:tcPr>
+                </a:tc>
+              </a:tr>
+              <a:tr h="365760">
+                <a:tc>
+                  <a:txBody>
+                    <a:bodyPr/>
+                    <a:lstStyle/>
+                    <a:p>
+                      <a:r>
+                        <a:rPr sz="1050" b="1">
+                          <a:solidFill>
+                            <a:srgbClr val="222730"/>
+                          </a:solidFill>
+                          <a:latin typeface="맑은 고딕"/>
+                        </a:rPr>
+                        <a:t>확인(화면 열어보기·API 찔러보기)</a:t>
+                      </a:r>
+                    </a:p>
+                  </a:txBody>
+                  <a:tcPr anchor="ctr" marT="25400" marB="25400" marL="76200">
+                    <a:solidFill>
+                      <a:srgbClr val="EEF2F7"/>
+                    </a:solidFill>
+                  </a:tcPr>
+                </a:tc>
+                <a:tc>
+                  <a:txBody>
+                    <a:bodyPr/>
+                    <a:lstStyle/>
+                    <a:p>
+                      <a:r>
+                        <a:rPr sz="1050" b="0">
+                          <a:solidFill>
+                            <a:srgbClr val="222730"/>
+                          </a:solidFill>
+                          <a:latin typeface="맑은 고딕"/>
+                        </a:rPr>
+                        <a:t>사람</a:t>
+                      </a:r>
+                    </a:p>
+                  </a:txBody>
+                  <a:tcPr anchor="ctr" marT="25400" marB="25400" marL="76200">
+                    <a:solidFill>
+                      <a:srgbClr val="EEF2F7"/>
+                    </a:solidFill>
+                  </a:tcPr>
+                </a:tc>
+                <a:tc>
+                  <a:txBody>
+                    <a:bodyPr/>
+                    <a:lstStyle/>
+                    <a:p>
+                      <a:r>
+                        <a:rPr sz="1050" b="0">
+                          <a:solidFill>
+                            <a:srgbClr val="222730"/>
+                          </a:solidFill>
+                          <a:latin typeface="맑은 고딕"/>
+                        </a:rPr>
+                        <a:t>중간</a:t>
+                      </a:r>
+                    </a:p>
+                  </a:txBody>
+                  <a:tcPr anchor="ctr" marT="25400" marB="25400" marL="76200">
+                    <a:solidFill>
+                      <a:srgbClr val="EEF2F7"/>
+                    </a:solidFill>
+                  </a:tcPr>
+                </a:tc>
+                <a:tc>
+                  <a:txBody>
+                    <a:bodyPr/>
+                    <a:lstStyle/>
+                    <a:p>
+                      <a:r>
+                        <a:rPr sz="1050" b="0">
+                          <a:solidFill>
+                            <a:srgbClr val="2E8B57"/>
+                          </a:solidFill>
+                          <a:latin typeface="맑은 고딕"/>
+                        </a:rPr>
+                        <a:t>자동 검사가 대신 → 줄어듦</a:t>
+                      </a:r>
+                    </a:p>
+                  </a:txBody>
+                  <a:tcPr anchor="ctr" marT="25400" marB="25400" marL="76200">
+                    <a:solidFill>
+                      <a:srgbClr val="EEF2F7"/>
+                    </a:solidFill>
+                  </a:tcPr>
+                </a:tc>
+              </a:tr>
+              <a:tr h="365760">
+                <a:tc>
+                  <a:txBody>
+                    <a:bodyPr/>
+                    <a:lstStyle/>
+                    <a:p>
+                      <a:r>
+                        <a:rPr sz="1050" b="1">
+                          <a:solidFill>
+                            <a:srgbClr val="222730"/>
+                          </a:solidFill>
+                          <a:latin typeface="맑은 고딕"/>
+                        </a:rPr>
+                        <a:t>승인·판단</a:t>
+                      </a:r>
+                    </a:p>
+                  </a:txBody>
+                  <a:tcPr anchor="ctr" marT="25400" marB="25400" marL="76200">
+                    <a:solidFill>
+                      <a:srgbClr val="FFFFFF"/>
+                    </a:solidFill>
+                  </a:tcPr>
+                </a:tc>
+                <a:tc>
+                  <a:txBody>
+                    <a:bodyPr/>
+                    <a:lstStyle/>
+                    <a:p>
+                      <a:r>
+                        <a:rPr sz="1050" b="0">
+                          <a:solidFill>
+                            <a:srgbClr val="222730"/>
+                          </a:solidFill>
+                          <a:latin typeface="맑은 고딕"/>
+                        </a:rPr>
+                        <a:t>사람</a:t>
+                      </a:r>
+                    </a:p>
+                  </a:txBody>
+                  <a:tcPr anchor="ctr" marT="25400" marB="25400" marL="76200">
+                    <a:solidFill>
+                      <a:srgbClr val="FFFFFF"/>
+                    </a:solidFill>
+                  </a:tcPr>
+                </a:tc>
+                <a:tc>
+                  <a:txBody>
+                    <a:bodyPr/>
+                    <a:lstStyle/>
+                    <a:p>
+                      <a:r>
+                        <a:rPr sz="1050" b="0">
+                          <a:solidFill>
+                            <a:srgbClr val="222730"/>
+                          </a:solidFill>
+                          <a:latin typeface="맑은 고딕"/>
+                        </a:rPr>
+                        <a:t>작음</a:t>
+                      </a:r>
+                    </a:p>
+                  </a:txBody>
+                  <a:tcPr anchor="ctr" marT="25400" marB="25400" marL="76200">
+                    <a:solidFill>
+                      <a:srgbClr val="FFFFFF"/>
+                    </a:solidFill>
+                  </a:tcPr>
+                </a:tc>
+                <a:tc>
+                  <a:txBody>
+                    <a:bodyPr/>
+                    <a:lstStyle/>
+                    <a:p>
+                      <a:r>
+                        <a:rPr sz="1050" b="0">
+                          <a:solidFill>
+                            <a:srgbClr val="555B66"/>
+                          </a:solidFill>
+                          <a:latin typeface="맑은 고딕"/>
+                        </a:rPr>
+                        <a:t>그대로</a:t>
+                      </a:r>
+                    </a:p>
+                  </a:txBody>
+                  <a:tcPr anchor="ctr" marT="25400" marB="25400" marL="76200">
+                    <a:solidFill>
+                      <a:srgbClr val="FFFFFF"/>
+                    </a:solidFill>
+                  </a:tcPr>
+                </a:tc>
+              </a:tr>
+            </a:tbl>
+          </a:graphicData>
+        </a:graphic>
+      </p:graphicFrame>
+      <p:sp>
+        <p:nvSpPr>
+          <p:cNvPr id="7" name="TextBox 6"/>
           <p:cNvSpPr txBox="1"/>
           <p:nvPr/>
         </p:nvSpPr>
         <p:spPr>
           <a:xfrm>
-            <a:off x="548640" y="1325880"/>
-            <a:ext cx="11064240" cy="4937760"/>
+            <a:off x="548640" y="6126480"/>
+            <a:ext cx="11064240" cy="457200"/>
           </a:xfrm>
           <a:prstGeom prst="rect">
             <a:avLst/>
@@ -6505,150 +7351,21 @@
           </a:bodyPr>
           <a:lstStyle/>
           <a:p>
-            <a:pPr>
-              <a:spcBef>
-                <a:spcPts val="200"/>
-              </a:spcBef>
-              <a:spcAft>
-                <a:spcPts val="600"/>
-              </a:spcAft>
-            </a:pPr>
-            <a:r>
-              <a:rPr sz="1500" b="1">
-                <a:solidFill>
-                  <a:srgbClr val="1F2A44"/>
-                </a:solidFill>
-                <a:latin typeface="맑은 고딕"/>
-              </a:rPr>
-              <a:t>■ </a:t>
-            </a:r>
-            <a:r>
-              <a:rPr sz="1500" b="1">
-                <a:solidFill>
-                  <a:srgbClr val="B03A2E"/>
-                </a:solidFill>
-                <a:latin typeface="맑은 고딕"/>
-              </a:rPr>
-              <a:t>LLM이 실행·기록·증거·승인을 다 하면 그건 ‘독립 검증’이 아니다</a:t>
-            </a:r>
-          </a:p>
-          <a:p>
-            <a:pPr lvl="1">
-              <a:spcBef>
-                <a:spcPts val="200"/>
-              </a:spcBef>
-              <a:spcAft>
-                <a:spcPts val="600"/>
-              </a:spcAft>
-            </a:pPr>
-            <a:r>
-              <a:rPr sz="1300" b="0">
+            <a:r>
+              <a:rPr sz="1000" b="0">
                 <a:solidFill>
                   <a:srgbClr val="555B66"/>
                 </a:solidFill>
                 <a:latin typeface="맑은 고딕"/>
               </a:rPr>
-              <a:t>– </a:t>
-            </a:r>
-            <a:r>
-              <a:rPr sz="1300" b="0">
-                <a:solidFill>
-                  <a:srgbClr val="222730"/>
-                </a:solidFill>
-                <a:latin typeface="맑은 고딕"/>
-              </a:rPr>
-              <a:t>별도의 보호된 자동화(CI)가 실제 코드를 받아 검사를 돌려야 한다 — LLM은 요약만, 판정은 못 바꾼다</a:t>
-            </a:r>
-          </a:p>
-          <a:p>
-            <a:pPr>
-              <a:spcBef>
-                <a:spcPts val="200"/>
-              </a:spcBef>
-              <a:spcAft>
-                <a:spcPts val="600"/>
-              </a:spcAft>
-            </a:pPr>
-            <a:r>
-              <a:rPr sz="1500" b="1">
-                <a:solidFill>
-                  <a:srgbClr val="1F2A44"/>
-                </a:solidFill>
-                <a:latin typeface="맑은 고딕"/>
-              </a:rPr>
-              <a:t>■ </a:t>
-            </a:r>
-            <a:r>
-              <a:rPr sz="1500" b="1">
-                <a:solidFill>
-                  <a:srgbClr val="222730"/>
-                </a:solidFill>
-                <a:latin typeface="맑은 고딕"/>
-              </a:rPr>
-              <a:t>검사기 초록불 = “코드·기록·증거가 앞뒤 맞다” — “모든 기능 정상·배포 안전”까지는 아니다</a:t>
-            </a:r>
-          </a:p>
-          <a:p>
-            <a:pPr>
-              <a:spcBef>
-                <a:spcPts val="200"/>
-              </a:spcBef>
-              <a:spcAft>
-                <a:spcPts val="600"/>
-              </a:spcAft>
-            </a:pPr>
-            <a:r>
-              <a:rPr sz="1500" b="1">
-                <a:solidFill>
-                  <a:srgbClr val="1F2A44"/>
-                </a:solidFill>
-                <a:latin typeface="맑은 고딕"/>
-              </a:rPr>
-              <a:t>■ </a:t>
-            </a:r>
-            <a:r>
-              <a:rPr sz="1500" b="1">
-                <a:solidFill>
-                  <a:srgbClr val="2E8B57"/>
-                </a:solidFill>
-                <a:latin typeface="맑은 고딕"/>
-              </a:rPr>
-              <a:t>최종 배포에 필요한 4가지</a:t>
-            </a:r>
-          </a:p>
-          <a:p>
-            <a:pPr lvl="1">
-              <a:spcBef>
-                <a:spcPts val="200"/>
-              </a:spcBef>
-              <a:spcAft>
-                <a:spcPts val="600"/>
-              </a:spcAft>
-            </a:pPr>
-            <a:r>
-              <a:rPr sz="1300" b="0">
-                <a:solidFill>
-                  <a:srgbClr val="555B66"/>
-                </a:solidFill>
-                <a:latin typeface="맑은 고딕"/>
-              </a:rPr>
-              <a:t>– </a:t>
-            </a:r>
-            <a:r>
-              <a:rPr sz="1300" b="0">
-                <a:solidFill>
-                  <a:srgbClr val="222730"/>
-                </a:solidFill>
-                <a:latin typeface="맑은 고딕"/>
-              </a:rPr>
-              <a:t>①변경 범위 정합성 ②검사한 코드=배포할 코드 ③실제 서버 동작 검사 ④권한 있는 사람 승인</a:t>
-            </a:r>
-          </a:p>
-        </p:txBody>
-      </p:sp>
-      <p:sp>
-        <p:nvSpPr>
-          <p:cNvPr id="7" name="TextBox 6"/>
+              <a:t>첫 도입은 오히려 느리다(등록·기준선 세팅) / 두 번째 버전업부터 빨라진다.  보류 5종이 이 답을 좌우한다 — 사람 손이 붙는 것을 남기면 느려지고, 자동으로 도는 것만 남기면 빨라진다.</a:t>
+            </a:r>
+          </a:p>
+        </p:txBody>
+      </p:sp>
+      <p:sp>
+        <p:nvSpPr>
+          <p:cNvPr id="8" name="TextBox 7"/>
           <p:cNvSpPr txBox="1"/>
           <p:nvPr/>
         </p:nvSpPr>
@@ -6682,7 +7399,7 @@
       </p:sp>
       <p:sp>
         <p:nvSpPr>
-          <p:cNvPr id="8" name="TextBox 7"/>
+          <p:cNvPr id="9" name="TextBox 8"/>
           <p:cNvSpPr txBox="1"/>
           <p:nvPr/>
         </p:nvSpPr>
@@ -6792,7 +7509,7 @@
             <a:avLst/>
           </a:prstGeom>
           <a:solidFill>
-            <a:srgbClr val="2E8B57"/>
+            <a:srgbClr val="0E8F8F"/>
           </a:solidFill>
           <a:ln>
             <a:noFill/>
@@ -6846,11 +7563,11 @@
             <a:r>
               <a:rPr sz="1200" b="1">
                 <a:solidFill>
-                  <a:srgbClr val="2E8B57"/>
-                </a:solidFill>
-                <a:latin typeface="맑은 고딕"/>
-              </a:rPr>
-              <a:t>한 장 요약</a:t>
+                  <a:srgbClr val="0E8F8F"/>
+                </a:solidFill>
+                <a:latin typeface="맑은 고딕"/>
+              </a:rPr>
+              <a:t>오해 방지</a:t>
             </a:r>
           </a:p>
         </p:txBody>
@@ -6884,7 +7601,7 @@
                 </a:solidFill>
                 <a:latin typeface="맑은 고딕"/>
               </a:rPr>
-              <a:t>결론</a:t>
+              <a:t>검사기의 정확한 위치 — LLM 위에 얹는 안전장치</a:t>
             </a:r>
           </a:p>
         </p:txBody>
@@ -6922,7 +7639,7 @@
             <a:r>
               <a:rPr sz="1500" b="1">
                 <a:solidFill>
-                  <a:srgbClr val="2E8B57"/>
+                  <a:srgbClr val="0E8F8F"/>
                 </a:solidFill>
                 <a:latin typeface="맑은 고딕"/>
               </a:rPr>
@@ -6931,11 +7648,11 @@
             <a:r>
               <a:rPr sz="1500" b="1">
                 <a:solidFill>
-                  <a:srgbClr val="222730"/>
-                </a:solidFill>
-                <a:latin typeface="맑은 고딕"/>
-              </a:rPr>
-              <a:t>규칙 검사: 강력한 ‘근거·통제 장치’지만 혼자선 운영 부담 + 못 보는 맹점</a:t>
+                  <a:srgbClr val="0E8F8F"/>
+                </a:solidFill>
+                <a:latin typeface="맑은 고딕"/>
+              </a:rPr>
+              <a:t>검사기는 LLM을 대신하지 않는다. 검사도 판단도 LLM이 먼저 한다 — 검사기는 그 결과를 한 번 더 확인할 뿐이다</a:t>
             </a:r>
           </a:p>
           <a:p>
@@ -6950,7 +7667,7 @@
             <a:r>
               <a:rPr sz="1500" b="1">
                 <a:solidFill>
-                  <a:srgbClr val="2E8B57"/>
+                  <a:srgbClr val="0E8F8F"/>
                 </a:solidFill>
                 <a:latin typeface="맑은 고딕"/>
               </a:rPr>
@@ -6959,11 +7676,11 @@
             <a:r>
               <a:rPr sz="1500" b="1">
                 <a:solidFill>
-                  <a:srgbClr val="222730"/>
-                </a:solidFill>
-                <a:latin typeface="맑은 고딕"/>
-              </a:rPr>
-              <a:t>LLM 운영: 빠르지만 스스로 적은 기록이라 근거가 약하다</a:t>
+                  <a:srgbClr val="2E6CB1"/>
+                </a:solidFill>
+                <a:latin typeface="맑은 고딕"/>
+              </a:rPr>
+              <a:t>1차 — LLM: 무엇을 바꿀지 정하고, 옮겨간 코드를 찾고, 충돌을 풀고, 검사까지 직접 돌린다. 속도는 전부 여기서 나온다</a:t>
             </a:r>
           </a:p>
           <a:p>
@@ -6978,7 +7695,7 @@
             <a:r>
               <a:rPr sz="1500" b="1">
                 <a:solidFill>
-                  <a:srgbClr val="2E8B57"/>
+                  <a:srgbClr val="0E8F8F"/>
                 </a:solidFill>
                 <a:latin typeface="맑은 고딕"/>
               </a:rPr>
@@ -6987,11 +7704,39 @@
             <a:r>
               <a:rPr sz="1500" b="1">
                 <a:solidFill>
-                  <a:srgbClr val="2E8B57"/>
-                </a:solidFill>
-                <a:latin typeface="맑은 고딕"/>
-              </a:rPr>
-              <a:t>답 = LLM이 빠르게 일하고, 검사기가 그 근거를 (보호된 CI에서) 뒷받침하는 결합</a:t>
+                  <a:srgbClr val="0E8F8F"/>
+                </a:solidFill>
+                <a:latin typeface="맑은 고딕"/>
+              </a:rPr>
+              <a:t>2차 — 검사기: 같은 일을 다시 하지 않는다. LLM이 자기 자신에 대해 답할 수 없는 것만 확인한다</a:t>
+            </a:r>
+          </a:p>
+          <a:p>
+            <a:pPr lvl="1">
+              <a:spcBef>
+                <a:spcPts val="200"/>
+              </a:spcBef>
+              <a:spcAft>
+                <a:spcPts val="600"/>
+              </a:spcAft>
+            </a:pPr>
+            <a:r>
+              <a:rPr sz="1300" b="0">
+                <a:solidFill>
+                  <a:srgbClr val="555B66"/>
+                </a:solidFill>
+                <a:latin typeface="맑은 고딕"/>
+              </a:rPr>
+              <a:t>– </a:t>
+            </a:r>
+            <a:r>
+              <a:rPr sz="1300" b="0">
+                <a:solidFill>
+                  <a:srgbClr val="222730"/>
+                </a:solidFill>
+                <a:latin typeface="맑은 고딕"/>
+              </a:rPr>
+              <a:t>① 정말 돌렸는가  ② 검사한 코드가 배포할 코드와 같은가  ③ 그 결과가 나중에 바뀌지 않았는가</a:t>
             </a:r>
           </a:p>
           <a:p>
@@ -7006,7 +7751,7 @@
             <a:r>
               <a:rPr sz="1500" b="1">
                 <a:solidFill>
-                  <a:srgbClr val="2E8B57"/>
+                  <a:srgbClr val="0E8F8F"/>
                 </a:solidFill>
                 <a:latin typeface="맑은 고딕"/>
               </a:rPr>
@@ -7015,11 +7760,11 @@
             <a:r>
               <a:rPr sz="1500" b="1">
                 <a:solidFill>
-                  <a:srgbClr val="0E8F8F"/>
-                </a:solidFill>
-                <a:latin typeface="맑은 고딕"/>
-              </a:rPr>
-              <a:t>커스텀 하나하나가 등록→범위검사→ID별 코드검사→전용 Contract→결속→승인·증거로 흐른다</a:t>
+                  <a:srgbClr val="B03A2E"/>
+                </a:solidFill>
+                <a:latin typeface="맑은 고딕"/>
+              </a:rPr>
+              <a:t>그래서 독립성 — LLM이 실행·기록·증거·승인을 다 하면 ‘한 번 더’가 성립하지 않는다. 별도의 보호된 자동화(CI)가 실제 코드를 받아 검사를 돌려야 한다</a:t>
             </a:r>
           </a:p>
           <a:p>
@@ -7034,20 +7779,20 @@
             <a:r>
               <a:rPr sz="1500" b="1">
                 <a:solidFill>
+                  <a:srgbClr val="0E8F8F"/>
+                </a:solidFill>
+                <a:latin typeface="맑은 고딕"/>
+              </a:rPr>
+              <a:t>■ </a:t>
+            </a:r>
+            <a:r>
+              <a:rPr sz="1500" b="1">
+                <a:solidFill>
                   <a:srgbClr val="2E8B57"/>
                 </a:solidFill>
                 <a:latin typeface="맑은 고딕"/>
               </a:rPr>
-              <a:t>■ </a:t>
-            </a:r>
-            <a:r>
-              <a:rPr sz="1500" b="1">
-                <a:solidFill>
-                  <a:srgbClr val="222730"/>
-                </a:solidFill>
-                <a:latin typeface="맑은 고딕"/>
-              </a:rPr>
-              <a:t>현재: 1.13.1 필수 Contract 9/9 · 1.13.2 부분 검증 / 다음: 주장–증거 자동 대조기 설계</a:t>
+              <a:t>검사기를 ‘LLM보다 똑똑한 판정자’로 쓰면 실패한다 — 그건 이미 해봤다. ‘LLM이 한 일을 한 번 더 확인하는 안전장치’로 쓰면 부담은 작고 얻는 건 크다</a:t>
             </a:r>
           </a:p>
         </p:txBody>
@@ -7117,6 +7862,459 @@
                 <a:latin typeface="맑은 고딕"/>
               </a:rPr>
               <a:t>15</a:t>
+            </a:r>
+          </a:p>
+        </p:txBody>
+      </p:sp>
+    </p:spTree>
+  </p:cSld>
+  <p:clrMapOvr>
+    <a:masterClrMapping/>
+  </p:clrMapOvr>
+</p:sld>
+</file>
+
+<file path=ppt/slides/slide16.xml><?xml version="1.0" encoding="utf-8"?>
+<p:sld xmlns:a="http://schemas.openxmlformats.org/drawingml/2006/main" xmlns:p="http://schemas.openxmlformats.org/presentationml/2006/main" xmlns:r="http://schemas.openxmlformats.org/officeDocument/2006/relationships">
+  <p:cSld>
+    <p:spTree>
+      <p:nvGrpSpPr>
+        <p:cNvPr id="1" name=""/>
+        <p:cNvGrpSpPr/>
+        <p:nvPr/>
+      </p:nvGrpSpPr>
+      <p:grpSpPr/>
+      <p:sp>
+        <p:nvSpPr>
+          <p:cNvPr id="2" name="Rectangle 1"/>
+          <p:cNvSpPr/>
+          <p:nvPr/>
+        </p:nvSpPr>
+        <p:spPr>
+          <a:xfrm>
+            <a:off x="0" y="0"/>
+            <a:ext cx="12191695" cy="1051560"/>
+          </a:xfrm>
+          <a:prstGeom prst="rect">
+            <a:avLst/>
+          </a:prstGeom>
+          <a:solidFill>
+            <a:srgbClr val="1F2A44"/>
+          </a:solidFill>
+          <a:ln>
+            <a:noFill/>
+          </a:ln>
+          <a:effectLst/>
+        </p:spPr>
+        <p:style>
+          <a:lnRef idx="1">
+            <a:schemeClr val="accent1"/>
+          </a:lnRef>
+          <a:fillRef idx="3">
+            <a:schemeClr val="accent1"/>
+          </a:fillRef>
+          <a:effectRef idx="2">
+            <a:schemeClr val="accent1"/>
+          </a:effectRef>
+          <a:fontRef idx="minor">
+            <a:schemeClr val="lt1"/>
+          </a:fontRef>
+        </p:style>
+        <p:txBody>
+          <a:bodyPr rtlCol="0" anchor="ctr"/>
+          <a:lstStyle/>
+          <a:p>
+            <a:pPr algn="ctr"/>
+          </a:p>
+        </p:txBody>
+      </p:sp>
+      <p:sp>
+        <p:nvSpPr>
+          <p:cNvPr id="3" name="Rectangle 2"/>
+          <p:cNvSpPr/>
+          <p:nvPr/>
+        </p:nvSpPr>
+        <p:spPr>
+          <a:xfrm>
+            <a:off x="0" y="1051560"/>
+            <a:ext cx="12191695" cy="54864"/>
+          </a:xfrm>
+          <a:prstGeom prst="rect">
+            <a:avLst/>
+          </a:prstGeom>
+          <a:solidFill>
+            <a:srgbClr val="0E8F8F"/>
+          </a:solidFill>
+          <a:ln>
+            <a:noFill/>
+          </a:ln>
+          <a:effectLst/>
+        </p:spPr>
+        <p:style>
+          <a:lnRef idx="1">
+            <a:schemeClr val="accent1"/>
+          </a:lnRef>
+          <a:fillRef idx="3">
+            <a:schemeClr val="accent1"/>
+          </a:fillRef>
+          <a:effectRef idx="2">
+            <a:schemeClr val="accent1"/>
+          </a:effectRef>
+          <a:fontRef idx="minor">
+            <a:schemeClr val="lt1"/>
+          </a:fontRef>
+        </p:style>
+        <p:txBody>
+          <a:bodyPr rtlCol="0" anchor="ctr"/>
+          <a:lstStyle/>
+          <a:p>
+            <a:pPr algn="ctr"/>
+          </a:p>
+        </p:txBody>
+      </p:sp>
+      <p:sp>
+        <p:nvSpPr>
+          <p:cNvPr id="4" name="TextBox 3"/>
+          <p:cNvSpPr txBox="1"/>
+          <p:nvPr/>
+        </p:nvSpPr>
+        <p:spPr>
+          <a:xfrm>
+            <a:off x="457200" y="164592"/>
+            <a:ext cx="11155680" cy="320040"/>
+          </a:xfrm>
+          <a:prstGeom prst="rect">
+            <a:avLst/>
+          </a:prstGeom>
+          <a:noFill/>
+        </p:spPr>
+        <p:txBody>
+          <a:bodyPr wrap="square">
+            <a:spAutoFit/>
+          </a:bodyPr>
+          <a:lstStyle/>
+          <a:p>
+            <a:r>
+              <a:rPr sz="1200" b="1">
+                <a:solidFill>
+                  <a:srgbClr val="0E8F8F"/>
+                </a:solidFill>
+                <a:latin typeface="맑은 고딕"/>
+              </a:rPr>
+              <a:t>한 장 요약</a:t>
+            </a:r>
+          </a:p>
+        </p:txBody>
+      </p:sp>
+      <p:sp>
+        <p:nvSpPr>
+          <p:cNvPr id="5" name="TextBox 4"/>
+          <p:cNvSpPr txBox="1"/>
+          <p:nvPr/>
+        </p:nvSpPr>
+        <p:spPr>
+          <a:xfrm>
+            <a:off x="457200" y="457200"/>
+            <a:ext cx="11247120" cy="566928"/>
+          </a:xfrm>
+          <a:prstGeom prst="rect">
+            <a:avLst/>
+          </a:prstGeom>
+          <a:noFill/>
+        </p:spPr>
+        <p:txBody>
+          <a:bodyPr wrap="square">
+            <a:spAutoFit/>
+          </a:bodyPr>
+          <a:lstStyle/>
+          <a:p>
+            <a:r>
+              <a:rPr sz="2500" b="1">
+                <a:solidFill>
+                  <a:srgbClr val="FFFFFF"/>
+                </a:solidFill>
+                <a:latin typeface="맑은 고딕"/>
+              </a:rPr>
+              <a:t>결론</a:t>
+            </a:r>
+          </a:p>
+        </p:txBody>
+      </p:sp>
+      <p:sp>
+        <p:nvSpPr>
+          <p:cNvPr id="6" name="TextBox 5"/>
+          <p:cNvSpPr txBox="1"/>
+          <p:nvPr/>
+        </p:nvSpPr>
+        <p:spPr>
+          <a:xfrm>
+            <a:off x="548640" y="1325880"/>
+            <a:ext cx="11064240" cy="4937760"/>
+          </a:xfrm>
+          <a:prstGeom prst="rect">
+            <a:avLst/>
+          </a:prstGeom>
+          <a:noFill/>
+        </p:spPr>
+        <p:txBody>
+          <a:bodyPr wrap="square">
+            <a:spAutoFit/>
+          </a:bodyPr>
+          <a:lstStyle/>
+          <a:p>
+            <a:pPr>
+              <a:spcBef>
+                <a:spcPts val="200"/>
+              </a:spcBef>
+              <a:spcAft>
+                <a:spcPts val="600"/>
+              </a:spcAft>
+            </a:pPr>
+            <a:r>
+              <a:rPr sz="1500" b="1">
+                <a:solidFill>
+                  <a:srgbClr val="0E8F8F"/>
+                </a:solidFill>
+                <a:latin typeface="맑은 고딕"/>
+              </a:rPr>
+              <a:t>■ </a:t>
+            </a:r>
+            <a:r>
+              <a:rPr sz="1500" b="1">
+                <a:solidFill>
+                  <a:srgbClr val="2E8B57"/>
+                </a:solidFill>
+                <a:latin typeface="맑은 고딕"/>
+              </a:rPr>
+              <a:t>작은 변화 — 하위 패치엔 규칙 기반이 그대로 유효. 충돌 0·자동 병합 (4·5p)</a:t>
+            </a:r>
+          </a:p>
+          <a:p>
+            <a:pPr>
+              <a:spcBef>
+                <a:spcPts val="200"/>
+              </a:spcBef>
+              <a:spcAft>
+                <a:spcPts val="600"/>
+              </a:spcAft>
+            </a:pPr>
+            <a:r>
+              <a:rPr sz="1500" b="1">
+                <a:solidFill>
+                  <a:srgbClr val="0E8F8F"/>
+                </a:solidFill>
+                <a:latin typeface="맑은 고딕"/>
+              </a:rPr>
+              <a:t>■ </a:t>
+            </a:r>
+            <a:r>
+              <a:rPr sz="1500" b="1">
+                <a:solidFill>
+                  <a:srgbClr val="B03A2E"/>
+                </a:solidFill>
+                <a:latin typeface="맑은 고딕"/>
+              </a:rPr>
+              <a:t>큰 변화 — 1.13.2처럼 구조가 바뀌면 오판(리로케이션) + 관리 파일 ~25개 운영 부담(6p) → 한계</a:t>
+            </a:r>
+          </a:p>
+          <a:p>
+            <a:pPr>
+              <a:spcBef>
+                <a:spcPts val="200"/>
+              </a:spcBef>
+              <a:spcAft>
+                <a:spcPts val="600"/>
+              </a:spcAft>
+            </a:pPr>
+            <a:r>
+              <a:rPr sz="1500" b="1">
+                <a:solidFill>
+                  <a:srgbClr val="0E8F8F"/>
+                </a:solidFill>
+                <a:latin typeface="맑은 고딕"/>
+              </a:rPr>
+              <a:t>■ </a:t>
+            </a:r>
+            <a:r>
+              <a:rPr sz="1500" b="1">
+                <a:solidFill>
+                  <a:srgbClr val="2E6CB1"/>
+                </a:solidFill>
+                <a:latin typeface="맑은 고딕"/>
+              </a:rPr>
+              <a:t>그래서 — 규칙 기반은 버리지 않는다. 예측 가능 범위엔 그대로, 불확실할 때만 하이브리드. 그 관리 산출물은 LLM이 만들고 검사기는 검증만 (9·10p)</a:t>
+            </a:r>
+          </a:p>
+          <a:p>
+            <a:pPr>
+              <a:spcBef>
+                <a:spcPts val="200"/>
+              </a:spcBef>
+              <a:spcAft>
+                <a:spcPts val="600"/>
+              </a:spcAft>
+            </a:pPr>
+            <a:r>
+              <a:rPr sz="1500" b="1">
+                <a:solidFill>
+                  <a:srgbClr val="0E8F8F"/>
+                </a:solidFill>
+                <a:latin typeface="맑은 고딕"/>
+              </a:rPr>
+              <a:t>■ </a:t>
+            </a:r>
+            <a:r>
+              <a:rPr sz="1500" b="1">
+                <a:solidFill>
+                  <a:srgbClr val="0E8F8F"/>
+                </a:solidFill>
+                <a:latin typeface="맑은 고딕"/>
+              </a:rPr>
+              <a:t>① 방식 통제 — 규칙으로 못 박던 것을 지시(프롬프트·MD)로 옮겨 AI가 일하는 방식을 통제 (브랜치·커밋·범위)</a:t>
+            </a:r>
+          </a:p>
+          <a:p>
+            <a:pPr>
+              <a:spcBef>
+                <a:spcPts val="200"/>
+              </a:spcBef>
+              <a:spcAft>
+                <a:spcPts val="600"/>
+              </a:spcAft>
+            </a:pPr>
+            <a:r>
+              <a:rPr sz="1500" b="1">
+                <a:solidFill>
+                  <a:srgbClr val="0E8F8F"/>
+                </a:solidFill>
+                <a:latin typeface="맑은 고딕"/>
+              </a:rPr>
+              <a:t>■ </a:t>
+            </a:r>
+            <a:r>
+              <a:rPr sz="1500" b="1">
+                <a:solidFill>
+                  <a:srgbClr val="2E8B57"/>
+                </a:solidFill>
+                <a:latin typeface="맑은 고딕"/>
+              </a:rPr>
+              <a:t>② 결과 통제 — 과정마다 정해진 형식으로 결과를 뱉게 강제 → 검사기가 판정</a:t>
+            </a:r>
+          </a:p>
+          <a:p>
+            <a:pPr>
+              <a:spcBef>
+                <a:spcPts val="200"/>
+              </a:spcBef>
+              <a:spcAft>
+                <a:spcPts val="600"/>
+              </a:spcAft>
+            </a:pPr>
+            <a:r>
+              <a:rPr sz="1500" b="1">
+                <a:solidFill>
+                  <a:srgbClr val="0E8F8F"/>
+                </a:solidFill>
+                <a:latin typeface="맑은 고딕"/>
+              </a:rPr>
+              <a:t>■ </a:t>
+            </a:r>
+            <a:r>
+              <a:rPr sz="1500" b="1">
+                <a:solidFill>
+                  <a:srgbClr val="0E8F8F"/>
+                </a:solidFill>
+                <a:latin typeface="맑은 고딕"/>
+              </a:rPr>
+              <a:t>한 줄 (harness = 고삐) — 업그레이드가 불확실해도 산출물을 예측 가능하게 만들어 통제한다. AI를 덜 쓰는(minimize) 게 아니라 고삐를 채우는(harness) 것</a:t>
+            </a:r>
+          </a:p>
+          <a:p>
+            <a:pPr lvl="2">
+              <a:spcBef>
+                <a:spcPts val="200"/>
+              </a:spcBef>
+              <a:spcAft>
+                <a:spcPts val="600"/>
+              </a:spcAft>
+            </a:pPr>
+            <a:r>
+              <a:rPr sz="1200" b="0">
+                <a:solidFill>
+                  <a:srgbClr val="555B66"/>
+                </a:solidFill>
+                <a:latin typeface="맑은 고딕"/>
+              </a:rPr>
+              <a:t>· 현재: 1.13.1 9/9 · 1.13.2 부분 / 다음: 주장–증거 자동 대조기</a:t>
+            </a:r>
+          </a:p>
+        </p:txBody>
+      </p:sp>
+      <p:sp>
+        <p:nvSpPr>
+          <p:cNvPr id="7" name="TextBox 6"/>
+          <p:cNvSpPr txBox="1"/>
+          <p:nvPr/>
+        </p:nvSpPr>
+        <p:spPr>
+          <a:xfrm>
+            <a:off x="365760" y="6455664"/>
+            <a:ext cx="9144000" cy="301752"/>
+          </a:xfrm>
+          <a:prstGeom prst="rect">
+            <a:avLst/>
+          </a:prstGeom>
+          <a:noFill/>
+        </p:spPr>
+        <p:txBody>
+          <a:bodyPr wrap="square">
+            <a:spAutoFit/>
+          </a:bodyPr>
+          <a:lstStyle/>
+          <a:p>
+            <a:r>
+              <a:rPr sz="900" b="0">
+                <a:solidFill>
+                  <a:srgbClr val="555B66"/>
+                </a:solidFill>
+                <a:latin typeface="맑은 고딕"/>
+              </a:rPr>
+              <a:t>OpenMetadata 커스텀 버전업 검증 전략 · CODEX-05(정본) 기반</a:t>
+            </a:r>
+          </a:p>
+        </p:txBody>
+      </p:sp>
+      <p:sp>
+        <p:nvSpPr>
+          <p:cNvPr id="8" name="TextBox 7"/>
+          <p:cNvSpPr txBox="1"/>
+          <p:nvPr/>
+        </p:nvSpPr>
+        <p:spPr>
+          <a:xfrm>
+            <a:off x="11338560" y="6455664"/>
+            <a:ext cx="640080" cy="301752"/>
+          </a:xfrm>
+          <a:prstGeom prst="rect">
+            <a:avLst/>
+          </a:prstGeom>
+          <a:noFill/>
+        </p:spPr>
+        <p:txBody>
+          <a:bodyPr wrap="square">
+            <a:spAutoFit/>
+          </a:bodyPr>
+          <a:lstStyle/>
+          <a:p>
+            <a:pPr algn="r"/>
+            <a:r>
+              <a:rPr sz="900" b="0">
+                <a:solidFill>
+                  <a:srgbClr val="555B66"/>
+                </a:solidFill>
+                <a:latin typeface="맑은 고딕"/>
+              </a:rPr>
+              <a:t>16</a:t>
             </a:r>
           </a:p>
         </p:txBody>
@@ -7256,7 +8454,7 @@
                 </a:solidFill>
                 <a:latin typeface="맑은 고딕"/>
               </a:rPr>
-              <a:t>왜 이 일을 시작했나</a:t>
+              <a:t>왜 시작했나</a:t>
             </a:r>
           </a:p>
         </p:txBody>
@@ -7341,7 +8539,7 @@
                 </a:solidFill>
                 <a:latin typeface="맑은 고딕"/>
               </a:rPr>
-              <a:t>목표: 우리가 손댄 부분(DB 커넥터·자체 화면·한글 입력 등)이 공식 버전업 뒤에도 안 깨지고 살아 있는지 확인</a:t>
+              <a:t>목표 — 우리가 손댄 부분(DB 커넥터·자체 화면·한글 입력 등)이 공식 버전업 뒤에도 안 깨지고 살아 있는지 확인한다</a:t>
             </a:r>
           </a:p>
           <a:p>
@@ -7369,7 +8567,7 @@
                 </a:solidFill>
                 <a:latin typeface="맑은 고딕"/>
               </a:rPr>
-              <a:t>처음의 전제</a:t>
+              <a:t>전제 — AI를 쓰는 것 자체는 옳다. 다만 행내에서 운영하는 서비스라 최대한 보수적으로 가야 한다고 봤다</a:t>
             </a:r>
           </a:p>
           <a:p>
@@ -7393,39 +8591,11 @@
             <a:r>
               <a:rPr sz="1300" b="0">
                 <a:solidFill>
-                  <a:srgbClr val="B03A2E"/>
-                </a:solidFill>
-                <a:latin typeface="맑은 고딕"/>
-              </a:rPr>
-              <a:t>“AI(LLM)의 판단은 그때그때 달라, 배포 기준으로 삼기엔 믿기 어렵다”</a:t>
-            </a:r>
-          </a:p>
-          <a:p>
-            <a:pPr lvl="1">
-              <a:spcBef>
-                <a:spcPts val="200"/>
-              </a:spcBef>
-              <a:spcAft>
-                <a:spcPts val="600"/>
-              </a:spcAft>
-            </a:pPr>
-            <a:r>
-              <a:rPr sz="1300" b="0">
-                <a:solidFill>
-                  <a:srgbClr val="555B66"/>
-                </a:solidFill>
-                <a:latin typeface="맑은 고딕"/>
-              </a:rPr>
-              <a:t>– </a:t>
-            </a:r>
-            <a:r>
-              <a:rPr sz="1300" b="0">
-                <a:solidFill>
                   <a:srgbClr val="222730"/>
                 </a:solidFill>
                 <a:latin typeface="맑은 고딕"/>
               </a:rPr>
-              <a:t>→ 사람·AI 주관을 빼고, 정해진 규칙(파일 위치·커밋 이력)만 보는 자동 검사로 전부 걸러내자</a:t>
+              <a:t>그래서 AI 개입을 최소화하고, 사람·AI 주관을 뺀 채 정해진 규칙(파일 위치·커밋 이력)만 보는 자동 검사로 전부 걸러내는 전략을 먼저 검토했다</a:t>
             </a:r>
           </a:p>
           <a:p>
@@ -7449,11 +8619,11 @@
             <a:r>
               <a:rPr sz="1500" b="1">
                 <a:solidFill>
-                  <a:srgbClr val="222730"/>
-                </a:solidFill>
-                <a:latin typeface="맑은 고딕"/>
-              </a:rPr>
-              <a:t>효과: 같은 코드면 항상 같은 결과가 나오는 ‘재현 가능한 자동 판정’</a:t>
+                  <a:srgbClr val="2E8B57"/>
+                </a:solidFill>
+                <a:latin typeface="맑은 고딕"/>
+              </a:rPr>
+              <a:t>효과 — 같은 코드면 항상 같은 결과가 나오는 ‘재현 가능한 자동 판정’</a:t>
             </a:r>
           </a:p>
         </p:txBody>
@@ -7747,7 +8917,7 @@
                 </a:solidFill>
                 <a:latin typeface="맑은 고딕"/>
               </a:rPr>
-              <a:t>파일 위치로 검사: ‘이 기능은 이 파일들에 있어야 한다’를 관리 목록에 적고 대조</a:t>
+              <a:t>파일 위치 — ‘이 기능은 이 파일들에’를 목록에 적고 대조</a:t>
             </a:r>
           </a:p>
           <a:p>
@@ -7775,7 +8945,7 @@
                 </a:solidFill>
                 <a:latin typeface="맑은 고딕"/>
               </a:rPr>
-              <a:t>커밋 이력으로 검사: 커밋마다 ‘무엇을 커스터마이징했는지’ 꼬리표를 달고, 선언 범위 밖을 건드렸는지 확인</a:t>
+              <a:t>커밋 이력 — 커밋마다 꼬리표(Customization-ID) + 선언 범위 밖 변경 확인</a:t>
             </a:r>
           </a:p>
           <a:p>
@@ -7803,7 +8973,7 @@
                 </a:solidFill>
                 <a:latin typeface="맑은 고딕"/>
               </a:rPr>
-              <a:t>안전장치: 검사를 못 돌리거나 애매하면 ‘통과’가 아니라 ‘막음’ (= 함부로 초록불이 안 뜬다)</a:t>
+              <a:t>안전장치 — 애매하면 통과가 아닌 ‘막음’(fail-closed)</a:t>
             </a:r>
           </a:p>
           <a:p>
@@ -7831,7 +9001,110 @@
                 </a:solidFill>
                 <a:latin typeface="맑은 고딕"/>
               </a:rPr>
-              <a:t>못박기: 검사한 코드 상태를 특정 커밋에 못박아, 나중에 슬쩍 바꿔치기 못 하게 한다</a:t>
+              <a:t>못박기 — 검사한 코드를 특정 커밋·tree에 고정</a:t>
+            </a:r>
+          </a:p>
+          <a:p>
+            <a:pPr>
+              <a:spcBef>
+                <a:spcPts val="200"/>
+              </a:spcBef>
+              <a:spcAft>
+                <a:spcPts val="600"/>
+              </a:spcAft>
+            </a:pPr>
+            <a:r>
+              <a:rPr sz="1500" b="1">
+                <a:solidFill>
+                  <a:srgbClr val="2E6CB1"/>
+                </a:solidFill>
+                <a:latin typeface="맑은 고딕"/>
+              </a:rPr>
+              <a:t>■ </a:t>
+            </a:r>
+            <a:r>
+              <a:rPr sz="1500" b="1">
+                <a:solidFill>
+                  <a:srgbClr val="0E8F8F"/>
+                </a:solidFill>
+                <a:latin typeface="맑은 고딕"/>
+              </a:rPr>
+              <a:t>예시) BANK-OM-001(InstanceCode) 하나가 만드는 관리 문서 2종</a:t>
+            </a:r>
+          </a:p>
+          <a:p>
+            <a:pPr lvl="1">
+              <a:spcBef>
+                <a:spcPts val="200"/>
+              </a:spcBef>
+              <a:spcAft>
+                <a:spcPts val="600"/>
+              </a:spcAft>
+            </a:pPr>
+            <a:r>
+              <a:rPr sz="1300" b="0">
+                <a:solidFill>
+                  <a:srgbClr val="555B66"/>
+                </a:solidFill>
+                <a:latin typeface="맑은 고딕"/>
+              </a:rPr>
+              <a:t>– </a:t>
+            </a:r>
+            <a:r>
+              <a:rPr sz="1300" b="0">
+                <a:solidFill>
+                  <a:srgbClr val="222730"/>
+                </a:solidFill>
+                <a:latin typeface="맑은 고딕"/>
+              </a:rPr>
+              <a:t>manifests/BANK-OM-001.yaml — 경로 목록(‘경로 기반’의 실체). allowed 약 50개 / required는 핵심 앵커</a:t>
+            </a:r>
+          </a:p>
+          <a:p>
+            <a:pPr lvl="1">
+              <a:spcBef>
+                <a:spcPts val="200"/>
+              </a:spcBef>
+              <a:spcAft>
+                <a:spcPts val="600"/>
+              </a:spcAft>
+            </a:pPr>
+            <a:r>
+              <a:rPr sz="1300" b="0">
+                <a:solidFill>
+                  <a:srgbClr val="555B66"/>
+                </a:solidFill>
+                <a:latin typeface="맑은 고딕"/>
+              </a:rPr>
+              <a:t>– </a:t>
+            </a:r>
+            <a:r>
+              <a:rPr sz="1300" b="0">
+                <a:solidFill>
+                  <a:srgbClr val="222730"/>
+                </a:solidFill>
+                <a:latin typeface="맑은 고딕"/>
+              </a:rPr>
+              <a:t>contracts.yaml — 불변식(codeGroup/codeValue가 CRUD·재색인 뒤에도 동일 조회) + 그걸 지키는 테스트</a:t>
+            </a:r>
+          </a:p>
+          <a:p>
+            <a:pPr lvl="2">
+              <a:spcBef>
+                <a:spcPts val="200"/>
+              </a:spcBef>
+              <a:spcAft>
+                <a:spcPts val="600"/>
+              </a:spcAft>
+            </a:pPr>
+            <a:r>
+              <a:rPr sz="1200" b="0">
+                <a:solidFill>
+                  <a:srgbClr val="555B66"/>
+                </a:solidFill>
+                <a:latin typeface="맑은 고딕"/>
+              </a:rPr>
+              <a:t>· 여기 보인 건 2종일 뿐 — registry·shared-path-owners·정책 3종·계획 3종·못박기·증거 3종까지 합쳐 커스텀 11개 기준 약 25개의 관리 파일이 함께 돈다 (→ 6페이지)</a:t>
             </a:r>
           </a:p>
         </p:txBody>
@@ -7982,7 +9255,7 @@
             <a:avLst/>
           </a:prstGeom>
           <a:solidFill>
-            <a:srgbClr val="0E8F8F"/>
+            <a:srgbClr val="B03A2E"/>
           </a:solidFill>
           <a:ln>
             <a:noFill/>
@@ -8036,11 +9309,11 @@
             <a:r>
               <a:rPr sz="1200" b="1">
                 <a:solidFill>
-                  <a:srgbClr val="0E8F8F"/>
-                </a:solidFill>
-                <a:latin typeface="맑은 고딕"/>
-              </a:rPr>
-              <a:t>1.13.1 → 1.13.2를 직접</a:t>
+                  <a:srgbClr val="B03A2E"/>
+                </a:solidFill>
+                <a:latin typeface="맑은 고딕"/>
+              </a:rPr>
+              <a:t>직접 돌려봄</a:t>
             </a:r>
           </a:p>
         </p:txBody>
@@ -8074,7 +9347,7 @@
                 </a:solidFill>
                 <a:latin typeface="맑은 고딕"/>
               </a:rPr>
-              <a:t>예행연습 — 문서가 아니라 실제로</a:t>
+              <a:t>업그레이드 테스트</a:t>
             </a:r>
           </a:p>
         </p:txBody>
@@ -8112,7 +9385,7 @@
             <a:r>
               <a:rPr sz="1500" b="1">
                 <a:solidFill>
-                  <a:srgbClr val="0E8F8F"/>
+                  <a:srgbClr val="B03A2E"/>
                 </a:solidFill>
                 <a:latin typeface="맑은 고딕"/>
               </a:rPr>
@@ -8121,11 +9394,11 @@
             <a:r>
               <a:rPr sz="1500" b="1">
                 <a:solidFill>
-                  <a:srgbClr val="222730"/>
-                </a:solidFill>
-                <a:latin typeface="맑은 고딕"/>
-              </a:rPr>
-              <a:t>새 버전(1.13.2) 이미지 빌드 → 기존 데이터 이관 → 서버 기동 → 우리가 만든 API 확인까지 실제로 수행</a:t>
+                  <a:srgbClr val="2E8B57"/>
+                </a:solidFill>
+                <a:latin typeface="맑은 고딕"/>
+              </a:rPr>
+              <a:t>1.13.0 → 1.13.1  성공 — 변화가 작아 충돌 0·자동 병합. 규칙 기반으로 깔끔히 통과</a:t>
             </a:r>
           </a:p>
           <a:p>
@@ -8140,7 +9413,7 @@
             <a:r>
               <a:rPr sz="1500" b="1">
                 <a:solidFill>
-                  <a:srgbClr val="0E8F8F"/>
+                  <a:srgbClr val="B03A2E"/>
                 </a:solidFill>
                 <a:latin typeface="맑은 고딕"/>
               </a:rPr>
@@ -8149,11 +9422,67 @@
             <a:r>
               <a:rPr sz="1500" b="1">
                 <a:solidFill>
-                  <a:srgbClr val="2E8B57"/>
-                </a:solidFill>
-                <a:latin typeface="맑은 고딕"/>
-              </a:rPr>
-              <a:t>커스텀 기능(InstanceCode)은 실제 서버에서 생성·조회·수정·검색·삭제까지 동작 확인</a:t>
+                  <a:srgbClr val="B03A2E"/>
+                </a:solidFill>
+                <a:latin typeface="맑은 고딕"/>
+              </a:rPr>
+              <a:t>1.13.1 → 1.13.2  여기서 막힘 — 아래 ①→② 순서</a:t>
+            </a:r>
+          </a:p>
+          <a:p>
+            <a:pPr lvl="1">
+              <a:spcBef>
+                <a:spcPts val="200"/>
+              </a:spcBef>
+              <a:spcAft>
+                <a:spcPts val="600"/>
+              </a:spcAft>
+            </a:pPr>
+            <a:r>
+              <a:rPr sz="1300" b="0">
+                <a:solidFill>
+                  <a:srgbClr val="555B66"/>
+                </a:solidFill>
+                <a:latin typeface="맑은 고딕"/>
+              </a:rPr>
+              <a:t>– </a:t>
+            </a:r>
+            <a:r>
+              <a:rPr sz="1300" b="0">
+                <a:solidFill>
+                  <a:srgbClr val="222730"/>
+                </a:solidFill>
+                <a:latin typeface="맑은 고딕"/>
+              </a:rPr>
+              <a:t>① 병합(먼저) — 충돌 다수 + Sybase 코드가 다른 파일로 이사(리로케이션). 커스텀을 새 위치에 수작업 재적용하고 관리 파일 ~25개·커밋 이력도 함께 손봐야 했다</a:t>
+            </a:r>
+          </a:p>
+          <a:p>
+            <a:pPr lvl="1">
+              <a:spcBef>
+                <a:spcPts val="200"/>
+              </a:spcBef>
+              <a:spcAft>
+                <a:spcPts val="600"/>
+              </a:spcAft>
+            </a:pPr>
+            <a:r>
+              <a:rPr sz="1300" b="0">
+                <a:solidFill>
+                  <a:srgbClr val="555B66"/>
+                </a:solidFill>
+                <a:latin typeface="맑은 고딕"/>
+              </a:rPr>
+              <a:t>– </a:t>
+            </a:r>
+            <a:r>
+              <a:rPr sz="1300" b="0">
+                <a:solidFill>
+                  <a:srgbClr val="222730"/>
+                </a:solidFill>
+                <a:latin typeface="맑은 고딕"/>
+              </a:rPr>
+              <a:t>② 실행·검증(그 뒤) — 병합을 수작업 해결한 뒤 이미지 빌드 → 데이터 이관 → 서버 기동 → API 확인. InstanceCode는 실제 서버에서 CRUD·검색까지 동작 (PASS)</a:t>
             </a:r>
           </a:p>
           <a:p>
@@ -8168,7 +9497,7 @@
             <a:r>
               <a:rPr sz="1500" b="1">
                 <a:solidFill>
-                  <a:srgbClr val="0E8F8F"/>
+                  <a:srgbClr val="B03A2E"/>
                 </a:solidFill>
                 <a:latin typeface="맑은 고딕"/>
               </a:rPr>
@@ -8177,15 +9506,15 @@
             <a:r>
               <a:rPr sz="1500" b="1">
                 <a:solidFill>
-                  <a:srgbClr val="B8791F"/>
-                </a:solidFill>
-                <a:latin typeface="맑은 고딕"/>
-              </a:rPr>
-              <a:t>현재 1.13.2는 ‘부분 확인’ — 일부 화면·데이터 검사가 남아 최종 합격 아님</a:t>
-            </a:r>
-          </a:p>
-          <a:p>
-            <a:pPr>
+                  <a:srgbClr val="B03A2E"/>
+                </a:solidFill>
+                <a:latin typeface="맑은 고딕"/>
+              </a:rPr>
+              <a:t>업그레이드 테스트를 하며 겪은 어려움 — 리로케이션은 드러난 계기 중 하나일 뿐이었다</a:t>
+            </a:r>
+          </a:p>
+          <a:p>
+            <a:pPr lvl="1">
               <a:spcBef>
                 <a:spcPts val="200"/>
               </a:spcBef>
@@ -8194,22 +9523,106 @@
               </a:spcAft>
             </a:pPr>
             <a:r>
-              <a:rPr sz="1500" b="1">
-                <a:solidFill>
-                  <a:srgbClr val="0E8F8F"/>
-                </a:solidFill>
-                <a:latin typeface="맑은 고딕"/>
-              </a:rPr>
-              <a:t>■ </a:t>
-            </a:r>
-            <a:r>
-              <a:rPr sz="1500" b="1">
+              <a:rPr sz="1300" b="0">
+                <a:solidFill>
+                  <a:srgbClr val="555B66"/>
+                </a:solidFill>
+                <a:latin typeface="맑은 고딕"/>
+              </a:rPr>
+              <a:t>– </a:t>
+            </a:r>
+            <a:r>
+              <a:rPr sz="1300" b="0">
                 <a:solidFill>
                   <a:srgbClr val="222730"/>
                 </a:solidFill>
                 <a:latin typeface="맑은 고딕"/>
               </a:rPr>
-              <a:t>핵심: 이 예행연습을 하며 ‘무엇이 잘 되고 무엇이 안 되는지’를 몸으로 알게 됐다</a:t>
+              <a:t>① 코드 이동 — 코드가 어디로 옮겨갔는지 규칙으론 못 따라간다 (옛 경로만 보고 “사라졌다”고 오판)</a:t>
+            </a:r>
+          </a:p>
+          <a:p>
+            <a:pPr lvl="1">
+              <a:spcBef>
+                <a:spcPts val="200"/>
+              </a:spcBef>
+              <a:spcAft>
+                <a:spcPts val="600"/>
+              </a:spcAft>
+            </a:pPr>
+            <a:r>
+              <a:rPr sz="1300" b="0">
+                <a:solidFill>
+                  <a:srgbClr val="555B66"/>
+                </a:solidFill>
+                <a:latin typeface="맑은 고딕"/>
+              </a:rPr>
+              <a:t>– </a:t>
+            </a:r>
+            <a:r>
+              <a:rPr sz="1300" b="0">
+                <a:solidFill>
+                  <a:srgbClr val="222730"/>
+                </a:solidFill>
+                <a:latin typeface="맑은 고딕"/>
+              </a:rPr>
+              <a:t>② 반쪽 병합 — 검사기는 ‘그 파일이 공식과 다른가’로만 판정한다. 어떻게 다른지는 안 본다 → 절반만 들어가도 통과된다</a:t>
+            </a:r>
+          </a:p>
+          <a:p>
+            <a:pPr lvl="1">
+              <a:spcBef>
+                <a:spcPts val="200"/>
+              </a:spcBef>
+              <a:spcAft>
+                <a:spcPts val="600"/>
+              </a:spcAft>
+            </a:pPr>
+            <a:r>
+              <a:rPr sz="1300" b="0">
+                <a:solidFill>
+                  <a:srgbClr val="555B66"/>
+                </a:solidFill>
+                <a:latin typeface="맑은 고딕"/>
+              </a:rPr>
+              <a:t>– </a:t>
+            </a:r>
+            <a:r>
+              <a:rPr sz="1300" b="0">
+                <a:solidFill>
+                  <a:srgbClr val="222730"/>
+                </a:solidFill>
+                <a:latin typeface="맑은 고딕"/>
+              </a:rPr>
+              <a:t>③ 등록할 경로가 많다 — Sybase 하나에 18개, 그중 11개가 자동 생성 파일이라 다시 만들 때마다 통째로 바뀐다</a:t>
+            </a:r>
+          </a:p>
+          <a:p>
+            <a:pPr lvl="1">
+              <a:spcBef>
+                <a:spcPts val="200"/>
+              </a:spcBef>
+              <a:spcAft>
+                <a:spcPts val="600"/>
+              </a:spcAft>
+            </a:pPr>
+            <a:r>
+              <a:rPr sz="1300" b="0">
+                <a:solidFill>
+                  <a:srgbClr val="555B66"/>
+                </a:solidFill>
+                <a:latin typeface="맑은 고딕"/>
+              </a:rPr>
+              <a:t>– </a:t>
+            </a:r>
+            <a:r>
+              <a:rPr sz="1300" b="0">
+                <a:solidFill>
+                  <a:srgbClr val="222730"/>
+                </a:solidFill>
+                <a:latin typeface="맑은 고딕"/>
+              </a:rPr>
+              <a:t>④ 관리 부담 — 그때마다 관리 파일 ~25개와 커밋 이력을 사람이 갱신해야 한다</a:t>
             </a:r>
           </a:p>
         </p:txBody>
@@ -8360,7 +9773,7 @@
             <a:avLst/>
           </a:prstGeom>
           <a:solidFill>
-            <a:srgbClr val="2E8B57"/>
+            <a:srgbClr val="B03A2E"/>
           </a:solidFill>
           <a:ln>
             <a:noFill/>
@@ -8414,11 +9827,11 @@
             <a:r>
               <a:rPr sz="1200" b="1">
                 <a:solidFill>
-                  <a:srgbClr val="2E8B57"/>
-                </a:solidFill>
-                <a:latin typeface="맑은 고딕"/>
-              </a:rPr>
-              <a:t>해보니 이건 확실히 잘 된다</a:t>
+                  <a:srgbClr val="B03A2E"/>
+                </a:solidFill>
+                <a:latin typeface="맑은 고딕"/>
+              </a:rPr>
+              <a:t>드러난 한계 ① — 규칙 검사의 사각</a:t>
             </a:r>
           </a:p>
         </p:txBody>
@@ -8452,7 +9865,7 @@
                 </a:solidFill>
                 <a:latin typeface="맑은 고딕"/>
               </a:rPr>
-              <a:t>예행연습에서 확인한 강점</a:t>
+              <a:t>규칙 검사만으로는 못 보는 것들</a:t>
             </a:r>
           </a:p>
         </p:txBody>
@@ -8490,7 +9903,7 @@
             <a:r>
               <a:rPr sz="1500" b="1">
                 <a:solidFill>
-                  <a:srgbClr val="2E8B57"/>
+                  <a:srgbClr val="B03A2E"/>
                 </a:solidFill>
                 <a:latin typeface="맑은 고딕"/>
               </a:rPr>
@@ -8499,11 +9912,11 @@
             <a:r>
               <a:rPr sz="1500" b="1">
                 <a:solidFill>
-                  <a:srgbClr val="2E8B57"/>
-                </a:solidFill>
-                <a:latin typeface="맑은 고딕"/>
-              </a:rPr>
-              <a:t>애매하면 막는다: 검사가 빠지거나 실패하면 자동으로 통과되지 않는다</a:t>
+                  <a:srgbClr val="B03A2E"/>
+                </a:solidFill>
+                <a:latin typeface="맑은 고딕"/>
+              </a:rPr>
+              <a:t>리로케이션 — 코드가 다른 파일로 이사 가면 옛 경로만 보고 ‘사라졌다’고 오판한다</a:t>
             </a:r>
           </a:p>
           <a:p>
@@ -8518,7 +9931,7 @@
             <a:r>
               <a:rPr sz="1500" b="1">
                 <a:solidFill>
-                  <a:srgbClr val="2E8B57"/>
+                  <a:srgbClr val="B03A2E"/>
                 </a:solidFill>
                 <a:latin typeface="맑은 고딕"/>
               </a:rPr>
@@ -8527,95 +9940,11 @@
             <a:r>
               <a:rPr sz="1500" b="1">
                 <a:solidFill>
-                  <a:srgbClr val="2E8B57"/>
-                </a:solidFill>
-                <a:latin typeface="맑은 고딕"/>
-              </a:rPr>
-              <a:t>사람이 판정을 못 뒤집는다: ‘그냥 통과시켜’를 눌러도 위험 판정은 사라지지 않는다</a:t>
-            </a:r>
-          </a:p>
-          <a:p>
-            <a:pPr>
-              <a:spcBef>
-                <a:spcPts val="200"/>
-              </a:spcBef>
-              <a:spcAft>
-                <a:spcPts val="600"/>
-              </a:spcAft>
-            </a:pPr>
-            <a:r>
-              <a:rPr sz="1500" b="1">
-                <a:solidFill>
-                  <a:srgbClr val="2E8B57"/>
-                </a:solidFill>
-                <a:latin typeface="맑은 고딕"/>
-              </a:rPr>
-              <a:t>■ </a:t>
-            </a:r>
-            <a:r>
-              <a:rPr sz="1500" b="1">
-                <a:solidFill>
-                  <a:srgbClr val="2E8B57"/>
-                </a:solidFill>
-                <a:latin typeface="맑은 고딕"/>
-              </a:rPr>
-              <a:t>결과 변경 감지: 저장된 판정이 바뀌면 ‘내용 지문’이 어긋나 티가 난다 (전자서명·외부공증은 아님)</a:t>
-            </a:r>
-          </a:p>
-          <a:p>
-            <a:pPr>
-              <a:spcBef>
-                <a:spcPts val="200"/>
-              </a:spcBef>
-              <a:spcAft>
-                <a:spcPts val="600"/>
-              </a:spcAft>
-            </a:pPr>
-            <a:r>
-              <a:rPr sz="1500" b="1">
-                <a:solidFill>
-                  <a:srgbClr val="2E8B57"/>
-                </a:solidFill>
-                <a:latin typeface="맑은 고딕"/>
-              </a:rPr>
-              <a:t>■ </a:t>
-            </a:r>
-            <a:r>
-              <a:rPr sz="1500" b="1">
-                <a:solidFill>
-                  <a:srgbClr val="2E8B57"/>
-                </a:solidFill>
-                <a:latin typeface="맑은 고딕"/>
-              </a:rPr>
-              <a:t>‘속 빈 테스트’ 색출: 기능을 일부러 빼봤을 때 그 테스트가 실패해야 진짜로 인정</a:t>
-            </a:r>
-          </a:p>
-          <a:p>
-            <a:pPr>
-              <a:spcBef>
-                <a:spcPts val="200"/>
-              </a:spcBef>
-              <a:spcAft>
-                <a:spcPts val="600"/>
-              </a:spcAft>
-            </a:pPr>
-            <a:r>
-              <a:rPr sz="1500" b="1">
-                <a:solidFill>
-                  <a:srgbClr val="2E8B57"/>
-                </a:solidFill>
-                <a:latin typeface="맑은 고딕"/>
-              </a:rPr>
-              <a:t>■ </a:t>
-            </a:r>
-            <a:r>
-              <a:rPr sz="1500" b="1">
-                <a:solidFill>
-                  <a:srgbClr val="2E8B57"/>
-                </a:solidFill>
-                <a:latin typeface="맑은 고딕"/>
-              </a:rPr>
-              <a:t>1.13.1은 필수 Contract 9개를 전부 통과</a:t>
+                  <a:srgbClr val="B03A2E"/>
+                </a:solidFill>
+                <a:latin typeface="맑은 고딕"/>
+              </a:rPr>
+              <a:t>의미(반쪽 병합) — 검사기의 ‘생존’ 판정 기준은 “커스텀 파일이 공식과 다른가”다. 그런데 ‘다르다’ ≠ ‘기능이 온전하다’</a:t>
             </a:r>
           </a:p>
           <a:p>
@@ -8643,7 +9972,35 @@
                 </a:solidFill>
                 <a:latin typeface="맑은 고딕"/>
               </a:rPr>
-              <a:t>정확히는 API 4 · 브라우저(화면) 3 · 소스 정합성 2 = 9 — 9개 전부가 ‘서버 동작’ 검사는 아니다</a:t>
+              <a:t>병합이 어긋나 커스텀 로직이 반쪽만 들어가도 ‘공식과 다름’은 성립 → survived(통과)로 새어나간다</a:t>
+            </a:r>
+          </a:p>
+          <a:p>
+            <a:pPr lvl="1">
+              <a:spcBef>
+                <a:spcPts val="200"/>
+              </a:spcBef>
+              <a:spcAft>
+                <a:spcPts val="600"/>
+              </a:spcAft>
+            </a:pPr>
+            <a:r>
+              <a:rPr sz="1300" b="0">
+                <a:solidFill>
+                  <a:srgbClr val="555B66"/>
+                </a:solidFill>
+                <a:latin typeface="맑은 고딕"/>
+              </a:rPr>
+              <a:t>– </a:t>
+            </a:r>
+            <a:r>
+              <a:rPr sz="1300" b="0">
+                <a:solidFill>
+                  <a:srgbClr val="222730"/>
+                </a:solidFill>
+                <a:latin typeface="맑은 고딕"/>
+              </a:rPr>
+              <a:t>DB 마이그레이션이 어긋나 서버가 아예 안 뜬 적도 있다 — 파일은 멀쩡한데 런타임이 깨진 경우. 경로만 보는 검사론 못 잡는다</a:t>
             </a:r>
           </a:p>
         </p:txBody>
@@ -8852,7 +10209,7 @@
                 </a:solidFill>
                 <a:latin typeface="맑은 고딕"/>
               </a:rPr>
-              <a:t>해보니 드러난 한계</a:t>
+              <a:t>드러난 한계 ② — 지속 가능 운영</a:t>
             </a:r>
           </a:p>
         </p:txBody>
@@ -8886,7 +10243,7 @@
                 </a:solidFill>
                 <a:latin typeface="맑은 고딕"/>
               </a:rPr>
-              <a:t>그런데 ① 운영이 힘들다 — 관리 파일이 너무 많다</a:t>
+              <a:t>지속 가능 운영의 한계 — 관리할 파일이 너무 많다</a:t>
             </a:r>
           </a:p>
         </p:txBody>
@@ -8937,7 +10294,35 @@
                 </a:solidFill>
                 <a:latin typeface="맑은 고딕"/>
               </a:rPr>
-              <a:t>무엇을 바꿨는지·어디까지 허용인지·누가 승인했는지를 전부 사람이 파일로 관리</a:t>
+              <a:t>부담 — 무엇을 바꿨는지·어디까지 허용인지·누가 승인했는지를 전부 사람이 파일로 관리한다. 반복 버전업 때마다 이 목록들을 일일이 갱신해야 한다</a:t>
+            </a:r>
+          </a:p>
+          <a:p>
+            <a:pPr>
+              <a:spcBef>
+                <a:spcPts val="200"/>
+              </a:spcBef>
+              <a:spcAft>
+                <a:spcPts val="600"/>
+              </a:spcAft>
+            </a:pPr>
+            <a:r>
+              <a:rPr sz="1500" b="1">
+                <a:solidFill>
+                  <a:srgbClr val="B03A2E"/>
+                </a:solidFill>
+                <a:latin typeface="맑은 고딕"/>
+              </a:rPr>
+              <a:t>■ </a:t>
+            </a:r>
+            <a:r>
+              <a:rPr sz="1500" b="1">
+                <a:solidFill>
+                  <a:srgbClr val="B03A2E"/>
+                </a:solidFill>
+                <a:latin typeface="맑은 고딕"/>
+              </a:rPr>
+              <a:t>본질 — ‘검사 자체’보다 ‘검사를 유지하는 비용’이 더 크다. 지속 운영의 벽</a:t>
             </a:r>
           </a:p>
           <a:p>
@@ -8965,63 +10350,7 @@
                 </a:solidFill>
                 <a:latin typeface="맑은 고딕"/>
               </a:rPr>
-              <a:t>버전업 때마다 이 목록들을 일일이 갱신해야 한다</a:t>
-            </a:r>
-          </a:p>
-          <a:p>
-            <a:pPr lvl="1">
-              <a:spcBef>
-                <a:spcPts val="200"/>
-              </a:spcBef>
-              <a:spcAft>
-                <a:spcPts val="600"/>
-              </a:spcAft>
-            </a:pPr>
-            <a:r>
-              <a:rPr sz="1300" b="0">
-                <a:solidFill>
-                  <a:srgbClr val="555B66"/>
-                </a:solidFill>
-                <a:latin typeface="맑은 고딕"/>
-              </a:rPr>
-              <a:t>– </a:t>
-            </a:r>
-            <a:r>
-              <a:rPr sz="1300" b="0">
-                <a:solidFill>
-                  <a:srgbClr val="222730"/>
-                </a:solidFill>
-                <a:latin typeface="맑은 고딕"/>
-              </a:rPr>
-              <a:t>→ ‘검사 자체’보다 ‘검사를 유지하는 비용’이 더 크다 (지속 운영의 벽)</a:t>
-            </a:r>
-          </a:p>
-          <a:p>
-            <a:pPr lvl="1">
-              <a:spcBef>
-                <a:spcPts val="200"/>
-              </a:spcBef>
-              <a:spcAft>
-                <a:spcPts val="600"/>
-              </a:spcAft>
-            </a:pPr>
-            <a:r>
-              <a:rPr sz="1300" b="0">
-                <a:solidFill>
-                  <a:srgbClr val="555B66"/>
-                </a:solidFill>
-                <a:latin typeface="맑은 고딕"/>
-              </a:rPr>
-              <a:t>– </a:t>
-            </a:r>
-            <a:r>
-              <a:rPr sz="1300" b="0">
-                <a:solidFill>
-                  <a:srgbClr val="222730"/>
-                </a:solidFill>
-                <a:latin typeface="맑은 고딕"/>
-              </a:rPr>
-              <a:t>목록이 늘수록 갱신 누락·중복 검사·피로로 인한 형식적 승인 위험이 커진다</a:t>
+              <a:t>위험 — 목록이 늘수록 갱신 누락·중복 검사·피로로 인한 형식적 승인 위험이 커진다</a:t>
             </a:r>
           </a:p>
         </p:txBody>
@@ -9172,7 +10501,7 @@
             <a:avLst/>
           </a:prstGeom>
           <a:solidFill>
-            <a:srgbClr val="B03A2E"/>
+            <a:srgbClr val="2E8B57"/>
           </a:solidFill>
           <a:ln>
             <a:noFill/>
@@ -9226,11 +10555,11 @@
             <a:r>
               <a:rPr sz="1200" b="1">
                 <a:solidFill>
-                  <a:srgbClr val="B03A2E"/>
-                </a:solidFill>
-                <a:latin typeface="맑은 고딕"/>
-              </a:rPr>
-              <a:t>해보니 드러난 한계</a:t>
+                  <a:srgbClr val="2E8B57"/>
+                </a:solidFill>
+                <a:latin typeface="맑은 고딕"/>
+              </a:rPr>
+              <a:t>왜 ‘룰베이스 검사기’인가</a:t>
             </a:r>
           </a:p>
         </p:txBody>
@@ -9264,7 +10593,7 @@
                 </a:solidFill>
                 <a:latin typeface="맑은 고딕"/>
               </a:rPr>
-              <a:t>그리고 ② 규칙 검사만으로는 못 보는 것들</a:t>
+              <a:t>강점 — LLM 혼자선 보장 못 하는 것들</a:t>
             </a:r>
           </a:p>
         </p:txBody>
@@ -9302,7 +10631,7 @@
             <a:r>
               <a:rPr sz="1500" b="1">
                 <a:solidFill>
-                  <a:srgbClr val="B03A2E"/>
+                  <a:srgbClr val="2E8B57"/>
                 </a:solidFill>
                 <a:latin typeface="맑은 고딕"/>
               </a:rPr>
@@ -9311,11 +10640,39 @@
             <a:r>
               <a:rPr sz="1500" b="1">
                 <a:solidFill>
-                  <a:srgbClr val="B03A2E"/>
-                </a:solidFill>
-                <a:latin typeface="맑은 고딕"/>
-              </a:rPr>
-              <a:t>공식이 코드를 다른 파일로 옮기면 못 따라간다 (가장 큰 약점)</a:t>
+                  <a:srgbClr val="0E8F8F"/>
+                </a:solidFill>
+                <a:latin typeface="맑은 고딕"/>
+              </a:rPr>
+              <a:t>아래는 전부 LLM도 할 수 있는 일이다. 차이는 능력이 아니라 누가 증언하느냐에 있다 — LLM이 하면 LLM의 말이 되고, 검사기가 하면 증거가 된다</a:t>
+            </a:r>
+          </a:p>
+          <a:p>
+            <a:pPr>
+              <a:spcBef>
+                <a:spcPts val="200"/>
+              </a:spcBef>
+              <a:spcAft>
+                <a:spcPts val="600"/>
+              </a:spcAft>
+            </a:pPr>
+            <a:r>
+              <a:rPr sz="1500" b="1">
+                <a:solidFill>
+                  <a:srgbClr val="2E8B57"/>
+                </a:solidFill>
+                <a:latin typeface="맑은 고딕"/>
+              </a:rPr>
+              <a:t>■ </a:t>
+            </a:r>
+            <a:r>
+              <a:rPr sz="1500" b="1">
+                <a:solidFill>
+                  <a:srgbClr val="2E8B57"/>
+                </a:solidFill>
+                <a:latin typeface="맑은 고딕"/>
+              </a:rPr>
+              <a:t>빼보기(patch-kill) — 기능이 되는지가 아니라 그 테스트가 진짜인지를 검사한다</a:t>
             </a:r>
           </a:p>
           <a:p>
@@ -9339,11 +10696,58 @@
             <a:r>
               <a:rPr sz="1300" b="0">
                 <a:solidFill>
-                  <a:srgbClr val="B8791F"/>
-                </a:solidFill>
-                <a:latin typeface="맑은 고딕"/>
-              </a:rPr>
-              <a:t>옛 위치만 보고 “사라졌다”고 오판 — 실제로 Sybase·Tibero 커넥터에서 오탐 발생</a:t>
+                  <a:srgbClr val="222730"/>
+                </a:solidFill>
+                <a:latin typeface="맑은 고딕"/>
+              </a:rPr>
+              <a:t>① 테스트 사전 정의 → ② 공식 버전에서 FAIL 이어야 정상 → ③ 커스텀 버전에서 PASS 여야 정상. ②가 PASS면 속 빈 테스트</a:t>
+            </a:r>
+          </a:p>
+          <a:p>
+            <a:pPr lvl="1">
+              <a:spcBef>
+                <a:spcPts val="200"/>
+              </a:spcBef>
+              <a:spcAft>
+                <a:spcPts val="600"/>
+              </a:spcAft>
+            </a:pPr>
+            <a:r>
+              <a:rPr sz="1300" b="0">
+                <a:solidFill>
+                  <a:srgbClr val="555B66"/>
+                </a:solidFill>
+                <a:latin typeface="맑은 고딕"/>
+              </a:rPr>
+              <a:t>– </a:t>
+            </a:r>
+            <a:r>
+              <a:rPr sz="1300" b="0">
+                <a:solidFill>
+                  <a:srgbClr val="555B66"/>
+                </a:solidFill>
+                <a:latin typeface="맑은 고딕"/>
+              </a:rPr>
+              <a:t>LLM이 하면: “돌려봤고 실패했습니다”—사실인지 알 방법이 없다 / 검사기가 하면: 어느 커밋에서 어떻게 실패했는지 파일로 남는다</a:t>
+            </a:r>
+          </a:p>
+          <a:p>
+            <a:pPr lvl="2">
+              <a:spcBef>
+                <a:spcPts val="200"/>
+              </a:spcBef>
+              <a:spcAft>
+                <a:spcPts val="600"/>
+              </a:spcAft>
+            </a:pPr>
+            <a:r>
+              <a:rPr sz="1200" b="0">
+                <a:solidFill>
+                  <a:srgbClr val="555B66"/>
+                </a:solidFill>
+                <a:latin typeface="맑은 고딕"/>
+              </a:rPr>
+              <a:t>· 한계 — 아무것도 안 보는 테스트는 걸러내지만, 덜 보는 테스트는 못 걸러낸다 (status_code==200만 봐도 통과). 그래서 사람이 읽을 것은 불변식 한 줄</a:t>
             </a:r>
           </a:p>
           <a:p>
@@ -9358,7 +10762,7 @@
             <a:r>
               <a:rPr sz="1500" b="1">
                 <a:solidFill>
-                  <a:srgbClr val="B03A2E"/>
+                  <a:srgbClr val="2E8B57"/>
                 </a:solidFill>
                 <a:latin typeface="맑은 고딕"/>
               </a:rPr>
@@ -9367,11 +10771,39 @@
             <a:r>
               <a:rPr sz="1500" b="1">
                 <a:solidFill>
-                  <a:srgbClr val="B03A2E"/>
-                </a:solidFill>
-                <a:latin typeface="맑은 고딕"/>
-              </a:rPr>
-              <a:t>“파일이 공식과 다르다” ≠ “기능이 온전하다” — 반쯤 깨져도 ‘다르기만’ 하면 통과 가능</a:t>
+                  <a:srgbClr val="2E8B57"/>
+                </a:solidFill>
+                <a:latin typeface="맑은 고딕"/>
+              </a:rPr>
+              <a:t>막고 보기(fail-closed) — 검사 하나라도 못 돌면 통과가 아니라 막음</a:t>
+            </a:r>
+          </a:p>
+          <a:p>
+            <a:pPr lvl="1">
+              <a:spcBef>
+                <a:spcPts val="200"/>
+              </a:spcBef>
+              <a:spcAft>
+                <a:spcPts val="600"/>
+              </a:spcAft>
+            </a:pPr>
+            <a:r>
+              <a:rPr sz="1300" b="0">
+                <a:solidFill>
+                  <a:srgbClr val="555B66"/>
+                </a:solidFill>
+                <a:latin typeface="맑은 고딕"/>
+              </a:rPr>
+              <a:t>– </a:t>
+            </a:r>
+            <a:r>
+              <a:rPr sz="1300" b="0">
+                <a:solidFill>
+                  <a:srgbClr val="222730"/>
+                </a:solidFill>
+                <a:latin typeface="맑은 고딕"/>
+              </a:rPr>
+              <a:t>실제: runtime contracts 2 pass · 7 skipped → verdict: block  (실패가 0인데도 통과가 아니다)</a:t>
             </a:r>
           </a:p>
           <a:p>
@@ -9386,7 +10818,7 @@
             <a:r>
               <a:rPr sz="1500" b="1">
                 <a:solidFill>
-                  <a:srgbClr val="B03A2E"/>
+                  <a:srgbClr val="2E8B57"/>
                 </a:solidFill>
                 <a:latin typeface="맑은 고딕"/>
               </a:rPr>
@@ -9395,11 +10827,11 @@
             <a:r>
               <a:rPr sz="1500" b="1">
                 <a:solidFill>
-                  <a:srgbClr val="B03A2E"/>
-                </a:solidFill>
-                <a:latin typeface="맑은 고딕"/>
-              </a:rPr>
-              <a:t>승인자가 진짜 권한자인지, 충돌이 실제로 얼마나 났는지는 사람이 적어넣는 값이라 검증 못 함</a:t>
+                  <a:srgbClr val="2E8B57"/>
+                </a:solidFill>
+                <a:latin typeface="맑은 고딕"/>
+              </a:rPr>
+              <a:t>못박기(candidate-lock) — 검사한 코드를 커밋에 고정해 이후 바뀌면 드러난다</a:t>
             </a:r>
           </a:p>
           <a:p>
@@ -9414,7 +10846,7 @@
             <a:r>
               <a:rPr sz="1500" b="1">
                 <a:solidFill>
-                  <a:srgbClr val="B03A2E"/>
+                  <a:srgbClr val="2E8B57"/>
                 </a:solidFill>
                 <a:latin typeface="맑은 고딕"/>
               </a:rPr>
@@ -9423,11 +10855,39 @@
             <a:r>
               <a:rPr sz="1500" b="1">
                 <a:solidFill>
-                  <a:srgbClr val="222730"/>
-                </a:solidFill>
-                <a:latin typeface="맑은 고딕"/>
-              </a:rPr>
-              <a:t>→ 규칙(파일·글자 기준)을 더 붙여도 이 약점은 반복된다 (구조적 한계)</a:t>
+                  <a:srgbClr val="2E8B57"/>
+                </a:solidFill>
+                <a:latin typeface="맑은 고딕"/>
+              </a:rPr>
+              <a:t>기계 대조(data-check) — 고정된 건 값이 아니라 판정 규칙. 값이 매번 달라지면 ‘넣은 값이 그대로 나오는지’(round-trip)로 대조</a:t>
+            </a:r>
+          </a:p>
+          <a:p>
+            <a:pPr>
+              <a:spcBef>
+                <a:spcPts val="200"/>
+              </a:spcBef>
+              <a:spcAft>
+                <a:spcPts val="600"/>
+              </a:spcAft>
+            </a:pPr>
+            <a:r>
+              <a:rPr sz="1500" b="1">
+                <a:solidFill>
+                  <a:srgbClr val="2E8B57"/>
+                </a:solidFill>
+                <a:latin typeface="맑은 고딕"/>
+              </a:rPr>
+              <a:t>■ </a:t>
+            </a:r>
+            <a:r>
+              <a:rPr sz="1500" b="1">
+                <a:solidFill>
+                  <a:srgbClr val="2E6CB1"/>
+                </a:solidFill>
+                <a:latin typeface="맑은 고딕"/>
+              </a:rPr>
+              <a:t>결정론(재현성) — 이 항목만은 LLM이 구조적으로 못 한다. 같은 입력에도 답이 흔들려 배포 기준이 될 수 없다</a:t>
             </a:r>
           </a:p>
         </p:txBody>
@@ -9636,7 +11096,7 @@
                 </a:solidFill>
                 <a:latin typeface="맑은 고딕"/>
               </a:rPr>
-              <a:t>다른 접근에서 얻은 힌트</a:t>
+              <a:t>참고한 다른 접근</a:t>
             </a:r>
           </a:p>
         </p:txBody>
@@ -9670,7 +11130,7 @@
                 </a:solidFill>
                 <a:latin typeface="맑은 고딕"/>
               </a:rPr>
-              <a:t>8/5 공유된 ‘LLM 기반 운영 방식’을 함께 검토</a:t>
+              <a:t>8/5 공유된 ‘LLM 기반 운영 방식’ (참고)</a:t>
             </a:r>
           </a:p>
         </p:txBody>
@@ -9717,11 +11177,39 @@
             <a:r>
               <a:rPr sz="1500" b="1">
                 <a:solidFill>
-                  <a:srgbClr val="2E8B57"/>
-                </a:solidFill>
-                <a:latin typeface="맑은 고딕"/>
-              </a:rPr>
-              <a:t>강점: 규칙·지식 문서·자동화로 버전 포팅 시간을 크게 줄였다 (빠르고 체계적)</a:t>
+                  <a:srgbClr val="2E6CB1"/>
+                </a:solidFill>
+                <a:latin typeface="맑은 고딕"/>
+              </a:rPr>
+              <a:t>개념 — 규칙·지식 문서·자동화로 LLM이 버전 포팅을 빠르게 수행하는 방식</a:t>
+            </a:r>
+          </a:p>
+          <a:p>
+            <a:pPr lvl="1">
+              <a:spcBef>
+                <a:spcPts val="200"/>
+              </a:spcBef>
+              <a:spcAft>
+                <a:spcPts val="600"/>
+              </a:spcAft>
+            </a:pPr>
+            <a:r>
+              <a:rPr sz="1300" b="0">
+                <a:solidFill>
+                  <a:srgbClr val="555B66"/>
+                </a:solidFill>
+                <a:latin typeface="맑은 고딕"/>
+              </a:rPr>
+              <a:t>– </a:t>
+            </a:r>
+            <a:r>
+              <a:rPr sz="1300" b="0">
+                <a:solidFill>
+                  <a:srgbClr val="555B66"/>
+                </a:solidFill>
+                <a:latin typeface="맑은 고딕"/>
+              </a:rPr>
+              <a:t>“포팅 시간 크게 단축”은 그 방식의 자체 보고 수치 — 우리가 실행·검증한 건 아니다</a:t>
             </a:r>
           </a:p>
           <a:p>
@@ -9749,7 +11237,7 @@
                 </a:solidFill>
                 <a:latin typeface="맑은 고딕"/>
               </a:rPr>
-              <a:t>구조: 변경·수정·테스트·결과 기록을 대부분 LLM이 스스로 수행하고 결과도 스스로 문서에 적는다</a:t>
+              <a:t>구조 — 변경·수정·테스트·결과 기록을 대부분 LLM이 스스로 수행하고, 그 결과도 스스로 문서에 적는다</a:t>
             </a:r>
           </a:p>
           <a:p>
@@ -9773,67 +11261,11 @@
             <a:r>
               <a:rPr sz="1500" b="1">
                 <a:solidFill>
-                  <a:srgbClr val="2E6CB1"/>
-                </a:solidFill>
-                <a:latin typeface="맑은 고딕"/>
-              </a:rPr>
-              <a:t>검토 소감 (까려는 게 아니라 보완 제안)</a:t>
-            </a:r>
-          </a:p>
-          <a:p>
-            <a:pPr lvl="1">
-              <a:spcBef>
-                <a:spcPts val="200"/>
-              </a:spcBef>
-              <a:spcAft>
-                <a:spcPts val="600"/>
-              </a:spcAft>
-            </a:pPr>
-            <a:r>
-              <a:rPr sz="1300" b="0">
-                <a:solidFill>
-                  <a:srgbClr val="555B66"/>
-                </a:solidFill>
-                <a:latin typeface="맑은 고딕"/>
-              </a:rPr>
-              <a:t>– </a:t>
-            </a:r>
-            <a:r>
-              <a:rPr sz="1300" b="0">
-                <a:solidFill>
-                  <a:srgbClr val="2E6CB1"/>
-                </a:solidFill>
-                <a:latin typeface="맑은 고딕"/>
-              </a:rPr>
-              <a:t>여기에 검사기로 ‘각 판단의 근거를 자동으로 뒷받침’하는 층을 더하면, 속도는 살리고 신뢰는 올릴 수 있겠더라</a:t>
-            </a:r>
-          </a:p>
-          <a:p>
-            <a:pPr lvl="1">
-              <a:spcBef>
-                <a:spcPts val="200"/>
-              </a:spcBef>
-              <a:spcAft>
-                <a:spcPts val="600"/>
-              </a:spcAft>
-            </a:pPr>
-            <a:r>
-              <a:rPr sz="1300" b="0">
-                <a:solidFill>
-                  <a:srgbClr val="555B66"/>
-                </a:solidFill>
-                <a:latin typeface="맑은 고딕"/>
-              </a:rPr>
-              <a:t>– </a:t>
-            </a:r>
-            <a:r>
-              <a:rPr sz="1300" b="0">
-                <a:solidFill>
-                  <a:srgbClr val="222730"/>
-                </a:solidFill>
-                <a:latin typeface="맑은 고딕"/>
-              </a:rPr>
-              <a:t>두 방식은 경쟁이 아니라 ‘빠른 실행 + 단단한 근거’로 합쳐진다</a:t>
+                  <a:srgbClr val="0E8F8F"/>
+                </a:solidFill>
+                <a:latin typeface="맑은 고딕"/>
+              </a:rPr>
+              <a:t>우리 생각 — 검증이 아니라 방향 제안: 이 접근에 검사기로 ‘각 판단의 근거를 자동으로 뒷받침’하는 층을 더하면 속도(LLM)는 살리고 신뢰(근거)는 끌어올릴 수 있겠다. 경쟁이 아니라 보완</a:t>
             </a:r>
           </a:p>
         </p:txBody>
@@ -9984,7 +11416,7 @@
             <a:avLst/>
           </a:prstGeom>
           <a:solidFill>
-            <a:srgbClr val="2E6CB1"/>
+            <a:srgbClr val="0E8F8F"/>
           </a:solidFill>
           <a:ln>
             <a:noFill/>
@@ -10038,7 +11470,7 @@
             <a:r>
               <a:rPr sz="1200" b="1">
                 <a:solidFill>
-                  <a:srgbClr val="2E6CB1"/>
+                  <a:srgbClr val="0E8F8F"/>
                 </a:solidFill>
                 <a:latin typeface="맑은 고딕"/>
               </a:rPr>
@@ -10076,7 +11508,7 @@
                 </a:solidFill>
                 <a:latin typeface="맑은 고딕"/>
               </a:rPr>
-              <a:t>그래서 방향 — LLM이 일하고, 검사기가 근거를 붙인다</a:t>
+              <a:t>LLM이 일하고, 검사기가 근거를 붙인다</a:t>
             </a:r>
           </a:p>
         </p:txBody>
@@ -10114,20 +11546,20 @@
             <a:r>
               <a:rPr sz="1500" b="1">
                 <a:solidFill>
+                  <a:srgbClr val="0E8F8F"/>
+                </a:solidFill>
+                <a:latin typeface="맑은 고딕"/>
+              </a:rPr>
+              <a:t>■ </a:t>
+            </a:r>
+            <a:r>
+              <a:rPr sz="1500" b="1">
+                <a:solidFill>
                   <a:srgbClr val="2E6CB1"/>
                 </a:solidFill>
                 <a:latin typeface="맑은 고딕"/>
               </a:rPr>
-              <a:t>■ </a:t>
-            </a:r>
-            <a:r>
-              <a:rPr sz="1500" b="1">
-                <a:solidFill>
-                  <a:srgbClr val="2E6CB1"/>
-                </a:solidFill>
-                <a:latin typeface="맑은 고딕"/>
-              </a:rPr>
-              <a:t>LLM = 판단·제안: 무엇을 바꿀지, 코드가 어디로 옮겨졌을지, 충돌 해결, 필요한 테스트</a:t>
+              <a:t>LLM — 판단·제안: 무엇을 바꿀지, 코드가 어디로 옮겨졌을지, 충돌 해결, 필요한 테스트</a:t>
             </a:r>
           </a:p>
           <a:p>
@@ -10142,7 +11574,7 @@
             <a:r>
               <a:rPr sz="1500" b="1">
                 <a:solidFill>
-                  <a:srgbClr val="2E6CB1"/>
+                  <a:srgbClr val="0E8F8F"/>
                 </a:solidFill>
                 <a:latin typeface="맑은 고딕"/>
               </a:rPr>
@@ -10155,7 +11587,7 @@
                 </a:solidFill>
                 <a:latin typeface="맑은 고딕"/>
               </a:rPr>
-              <a:t>검사기 = 뒷받침: 그 판단을 실제 코드·실행 증거로 확인하고, 위험하면 막는다</a:t>
+              <a:t>검사기 — 뒷받침: 그 판단을 실제 코드·실행 증거로 확인하고, 위험하면 막는다</a:t>
             </a:r>
           </a:p>
           <a:p>
@@ -10170,7 +11602,7 @@
             <a:r>
               <a:rPr sz="1500" b="1">
                 <a:solidFill>
-                  <a:srgbClr val="2E6CB1"/>
+                  <a:srgbClr val="0E8F8F"/>
                 </a:solidFill>
                 <a:latin typeface="맑은 고딕"/>
               </a:rPr>
@@ -10183,7 +11615,7 @@
                 </a:solidFill>
                 <a:latin typeface="맑은 고딕"/>
               </a:rPr>
-              <a:t>핵심 규칙</a:t>
+              <a:t>구체적으로 — LLM의 주장을 검사기가 이렇게 확인한다</a:t>
             </a:r>
           </a:p>
           <a:p>
@@ -10207,11 +11639,11 @@
             <a:r>
               <a:rPr sz="1300" b="0">
                 <a:solidFill>
-                  <a:srgbClr val="B03A2E"/>
-                </a:solidFill>
-                <a:latin typeface="맑은 고딕"/>
-              </a:rPr>
-              <a:t>LLM이 ‘됐다(✅)’고 적어도, 실제 코드·실행 증거가 없으면 ‘미확인’으로 표시한다</a:t>
+                  <a:srgbClr val="222730"/>
+                </a:solidFill>
+                <a:latin typeface="맑은 고딕"/>
+              </a:rPr>
+              <a:t>“이 파일 바꿨다” → 실제 커밋의 변경 내역을 직접 대조</a:t>
             </a:r>
           </a:p>
           <a:p>
@@ -10239,7 +11671,91 @@
                 </a:solidFill>
                 <a:latin typeface="맑은 고딕"/>
               </a:rPr>
-              <a:t>증거 없다고 곧장 ‘거짓’으로 몰지 않는다 → 확인 / 반박 / 미확인 / 사람검토 4단계</a:t>
+              <a:t>“충돌 0건” → 임시로 실제 병합해 충돌 수를 센다 (안 해보고 적어도 티가 안 나는 주장)</a:t>
+            </a:r>
+          </a:p>
+          <a:p>
+            <a:pPr lvl="1">
+              <a:spcBef>
+                <a:spcPts val="200"/>
+              </a:spcBef>
+              <a:spcAft>
+                <a:spcPts val="600"/>
+              </a:spcAft>
+            </a:pPr>
+            <a:r>
+              <a:rPr sz="1300" b="0">
+                <a:solidFill>
+                  <a:srgbClr val="555B66"/>
+                </a:solidFill>
+                <a:latin typeface="맑은 고딕"/>
+              </a:rPr>
+              <a:t>– </a:t>
+            </a:r>
+            <a:r>
+              <a:rPr sz="1300" b="0">
+                <a:solidFill>
+                  <a:srgbClr val="222730"/>
+                </a:solidFill>
+                <a:latin typeface="맑은 고딕"/>
+              </a:rPr>
+              <a:t>“테스트 통과” → 실제 서버에서 다시 실행 (미실행은 통과가 아니다)</a:t>
+            </a:r>
+          </a:p>
+          <a:p>
+            <a:pPr lvl="1">
+              <a:spcBef>
+                <a:spcPts val="200"/>
+              </a:spcBef>
+              <a:spcAft>
+                <a:spcPts val="600"/>
+              </a:spcAft>
+            </a:pPr>
+            <a:r>
+              <a:rPr sz="1300" b="0">
+                <a:solidFill>
+                  <a:srgbClr val="555B66"/>
+                </a:solidFill>
+                <a:latin typeface="맑은 고딕"/>
+              </a:rPr>
+              <a:t>– </a:t>
+            </a:r>
+            <a:r>
+              <a:rPr sz="1300" b="0">
+                <a:solidFill>
+                  <a:srgbClr val="222730"/>
+                </a:solidFill>
+                <a:latin typeface="맑은 고딕"/>
+              </a:rPr>
+              <a:t>“승인함” → 승인을 결과에 묶어 입력이 바뀌면 자동 무효</a:t>
+            </a:r>
+          </a:p>
+          <a:p>
+            <a:pPr>
+              <a:spcBef>
+                <a:spcPts val="200"/>
+              </a:spcBef>
+              <a:spcAft>
+                <a:spcPts val="600"/>
+              </a:spcAft>
+            </a:pPr>
+            <a:r>
+              <a:rPr sz="1500" b="1">
+                <a:solidFill>
+                  <a:srgbClr val="0E8F8F"/>
+                </a:solidFill>
+                <a:latin typeface="맑은 고딕"/>
+              </a:rPr>
+              <a:t>■ </a:t>
+            </a:r>
+            <a:r>
+              <a:rPr sz="1500" b="1">
+                <a:solidFill>
+                  <a:srgbClr val="0E8F8F"/>
+                </a:solidFill>
+                <a:latin typeface="맑은 고딕"/>
+              </a:rPr>
+              <a:t>핵심 규칙 — LLM이 ‘됐다’고 적어도 증거가 없으면 ‘미확인’으로 표시한다. 증거 없다고 곧장 ‘거짓’으로 몰지 않는다 → 확인·반박·미확인·사람검토 4단계</a:t>
             </a:r>
           </a:p>
         </p:txBody>

--- a/docs/CODEX-05-전략발표.pptx
+++ b/docs/CODEX-05-전략발표.pptx
@@ -21,6 +21,7 @@
     <p:sldId id="269" r:id="rId20"/>
     <p:sldId id="270" r:id="rId21"/>
     <p:sldId id="271" r:id="rId22"/>
+    <p:sldId id="272" r:id="rId23"/>
   </p:sldIdLst>
   <p:sldSz cx="12191695" cy="6858000" type="screen4x3"/>
   <p:notesSz cx="6858000" cy="9144000"/>
@@ -3427,7 +3428,7 @@
                 </a:solidFill>
                 <a:latin typeface="맑은 고딕"/>
               </a:rPr>
-              <a:t>도입 제안 ① — 검증되는 과정</a:t>
+              <a:t>방향 전환</a:t>
             </a:r>
           </a:p>
         </p:txBody>
@@ -3461,7 +3462,7 @@
                 </a:solidFill>
                 <a:latin typeface="맑은 고딕"/>
               </a:rPr>
-              <a:t>커스텀 하나(BANK-OM ID)가 검증되는 과정</a:t>
+              <a:t>LLM이 일하고, 검사기가 근거를 붙인다</a:t>
             </a:r>
           </a:p>
         </p:txBody>
@@ -3508,11 +3509,67 @@
             <a:r>
               <a:rPr sz="1500" b="1">
                 <a:solidFill>
+                  <a:srgbClr val="2E6CB1"/>
+                </a:solidFill>
+                <a:latin typeface="맑은 고딕"/>
+              </a:rPr>
+              <a:t>LLM — 판단·제안: 무엇을 바꿀지, 코드가 어디로 옮겨졌을지, 충돌 해결, 필요한 테스트</a:t>
+            </a:r>
+          </a:p>
+          <a:p>
+            <a:pPr>
+              <a:spcBef>
+                <a:spcPts val="200"/>
+              </a:spcBef>
+              <a:spcAft>
+                <a:spcPts val="600"/>
+              </a:spcAft>
+            </a:pPr>
+            <a:r>
+              <a:rPr sz="1500" b="1">
+                <a:solidFill>
                   <a:srgbClr val="0E8F8F"/>
                 </a:solidFill>
                 <a:latin typeface="맑은 고딕"/>
               </a:rPr>
-              <a:t>제안 — 하이브리드에서 LLM 작업의 ‘증거 층’으로 이 검사기를 도입한다 (자랑이 아니라 도입 대상)</a:t>
+              <a:t>■ </a:t>
+            </a:r>
+            <a:r>
+              <a:rPr sz="1500" b="1">
+                <a:solidFill>
+                  <a:srgbClr val="0E8F8F"/>
+                </a:solidFill>
+                <a:latin typeface="맑은 고딕"/>
+              </a:rPr>
+              <a:t>검사기 — 뒷받침: 그 판단을 실제 코드·실행 증거로 확인하고, 위험하면 막는다</a:t>
+            </a:r>
+          </a:p>
+          <a:p>
+            <a:pPr>
+              <a:spcBef>
+                <a:spcPts val="200"/>
+              </a:spcBef>
+              <a:spcAft>
+                <a:spcPts val="600"/>
+              </a:spcAft>
+            </a:pPr>
+            <a:r>
+              <a:rPr sz="1500" b="1">
+                <a:solidFill>
+                  <a:srgbClr val="0E8F8F"/>
+                </a:solidFill>
+                <a:latin typeface="맑은 고딕"/>
+              </a:rPr>
+              <a:t>■ </a:t>
+            </a:r>
+            <a:r>
+              <a:rPr sz="1500" b="1">
+                <a:solidFill>
+                  <a:srgbClr val="222730"/>
+                </a:solidFill>
+                <a:latin typeface="맑은 고딕"/>
+              </a:rPr>
+              <a:t>구체적으로 — LLM의 주장을 검사기가 이렇게 확인한다</a:t>
             </a:r>
           </a:p>
           <a:p>
@@ -3540,7 +3597,7 @@
                 </a:solidFill>
                 <a:latin typeface="맑은 고딕"/>
               </a:rPr>
-              <a:t>① 등록 — Manifest·Registry·Contract. 무엇을·어디를 바꿨고 어떤 검사로 지킬지 선언</a:t>
+              <a:t>“이 파일 바꿨다” → 실제 커밋의 변경 내역을 직접 대조</a:t>
             </a:r>
           </a:p>
           <a:p>
@@ -3568,7 +3625,7 @@
                 </a:solidFill>
                 <a:latin typeface="맑은 고딕"/>
               </a:rPr>
-              <a:t>② 커밋·변경범위 검사 — 선언한 범위만 건드렸는지, 공식 계보 위에 얹혔는지</a:t>
+              <a:t>“충돌 0건” → 임시로 실제 병합해 충돌 수를 센다 (안 해보고 적어도 티가 안 나는 주장)</a:t>
             </a:r>
           </a:p>
           <a:p>
@@ -3596,7 +3653,7 @@
                 </a:solidFill>
                 <a:latin typeface="맑은 고딕"/>
               </a:rPr>
-              <a:t>③ 공용 파일의 ID별 코드 검사 — 공유 파일에서 이 ID 몫의 코드가 살아있는지</a:t>
+              <a:t>“테스트 통과” → 실제 서버에서 다시 실행 (미실행은 통과가 아니다)</a:t>
             </a:r>
           </a:p>
           <a:p>
@@ -3624,63 +3681,7 @@
                 </a:solidFill>
                 <a:latin typeface="맑은 고딕"/>
               </a:rPr>
-              <a:t>④ 전용 검사 실행 — 이 기능만의 검사(API/화면/소스). 속 빈 테스트면 patch-kill로 걸러낸다</a:t>
-            </a:r>
-          </a:p>
-          <a:p>
-            <a:pPr lvl="1">
-              <a:spcBef>
-                <a:spcPts val="200"/>
-              </a:spcBef>
-              <a:spcAft>
-                <a:spcPts val="600"/>
-              </a:spcAft>
-            </a:pPr>
-            <a:r>
-              <a:rPr sz="1300" b="0">
-                <a:solidFill>
-                  <a:srgbClr val="555B66"/>
-                </a:solidFill>
-                <a:latin typeface="맑은 고딕"/>
-              </a:rPr>
-              <a:t>– </a:t>
-            </a:r>
-            <a:r>
-              <a:rPr sz="1300" b="0">
-                <a:solidFill>
-                  <a:srgbClr val="222730"/>
-                </a:solidFill>
-                <a:latin typeface="맑은 고딕"/>
-              </a:rPr>
-              <a:t>⑤ commit·이미지와 결과 결속 — 바꿔치기·사후수정을 감지</a:t>
-            </a:r>
-          </a:p>
-          <a:p>
-            <a:pPr lvl="1">
-              <a:spcBef>
-                <a:spcPts val="200"/>
-              </a:spcBef>
-              <a:spcAft>
-                <a:spcPts val="600"/>
-              </a:spcAft>
-            </a:pPr>
-            <a:r>
-              <a:rPr sz="1300" b="0">
-                <a:solidFill>
-                  <a:srgbClr val="555B66"/>
-                </a:solidFill>
-                <a:latin typeface="맑은 고딕"/>
-              </a:rPr>
-              <a:t>– </a:t>
-            </a:r>
-            <a:r>
-              <a:rPr sz="1300" b="0">
-                <a:solidFill>
-                  <a:srgbClr val="222730"/>
-                </a:solidFill>
-                <a:latin typeface="맑은 고딕"/>
-              </a:rPr>
-              <a:t>⑥ 승인·증거 보관 — 권한자 승인 + 증거 보관. 승인은 결과에 결속</a:t>
+              <a:t>“승인함” → 승인을 결과에 묶어 입력이 바뀌면 자동 무효</a:t>
             </a:r>
           </a:p>
           <a:p>
@@ -3708,7 +3709,7 @@
                 </a:solidFill>
                 <a:latin typeface="맑은 고딕"/>
               </a:rPr>
-              <a:t>6페이지 한계와의 연결 — “관리 파일이 많다”는 부담을 그대로 두지 않는다. 이 산출물을 사람이 아니라 LLM이 생성·갱신하고, 검사기는 검증만 한다</a:t>
+              <a:t>핵심 규칙 — LLM이 ‘됐다’고 적어도 증거가 없으면 ‘미확인’으로 표시한다. 증거 없다고 곧장 ‘거짓’으로 몰지 않는다 → 확인·반박·미확인·사람검토 4단계</a:t>
             </a:r>
           </a:p>
         </p:txBody>
@@ -3791,6 +3792,496 @@
 </file>
 
 <file path=ppt/slides/slide11.xml><?xml version="1.0" encoding="utf-8"?>
+<p:sld xmlns:a="http://schemas.openxmlformats.org/drawingml/2006/main" xmlns:p="http://schemas.openxmlformats.org/presentationml/2006/main" xmlns:r="http://schemas.openxmlformats.org/officeDocument/2006/relationships">
+  <p:cSld>
+    <p:spTree>
+      <p:nvGrpSpPr>
+        <p:cNvPr id="1" name=""/>
+        <p:cNvGrpSpPr/>
+        <p:nvPr/>
+      </p:nvGrpSpPr>
+      <p:grpSpPr/>
+      <p:sp>
+        <p:nvSpPr>
+          <p:cNvPr id="2" name="Rectangle 1"/>
+          <p:cNvSpPr/>
+          <p:nvPr/>
+        </p:nvSpPr>
+        <p:spPr>
+          <a:xfrm>
+            <a:off x="0" y="0"/>
+            <a:ext cx="12191695" cy="1051560"/>
+          </a:xfrm>
+          <a:prstGeom prst="rect">
+            <a:avLst/>
+          </a:prstGeom>
+          <a:solidFill>
+            <a:srgbClr val="1F2A44"/>
+          </a:solidFill>
+          <a:ln>
+            <a:noFill/>
+          </a:ln>
+          <a:effectLst/>
+        </p:spPr>
+        <p:style>
+          <a:lnRef idx="1">
+            <a:schemeClr val="accent1"/>
+          </a:lnRef>
+          <a:fillRef idx="3">
+            <a:schemeClr val="accent1"/>
+          </a:fillRef>
+          <a:effectRef idx="2">
+            <a:schemeClr val="accent1"/>
+          </a:effectRef>
+          <a:fontRef idx="minor">
+            <a:schemeClr val="lt1"/>
+          </a:fontRef>
+        </p:style>
+        <p:txBody>
+          <a:bodyPr rtlCol="0" anchor="ctr"/>
+          <a:lstStyle/>
+          <a:p>
+            <a:pPr algn="ctr"/>
+          </a:p>
+        </p:txBody>
+      </p:sp>
+      <p:sp>
+        <p:nvSpPr>
+          <p:cNvPr id="3" name="Rectangle 2"/>
+          <p:cNvSpPr/>
+          <p:nvPr/>
+        </p:nvSpPr>
+        <p:spPr>
+          <a:xfrm>
+            <a:off x="0" y="1051560"/>
+            <a:ext cx="12191695" cy="54864"/>
+          </a:xfrm>
+          <a:prstGeom prst="rect">
+            <a:avLst/>
+          </a:prstGeom>
+          <a:solidFill>
+            <a:srgbClr val="0E8F8F"/>
+          </a:solidFill>
+          <a:ln>
+            <a:noFill/>
+          </a:ln>
+          <a:effectLst/>
+        </p:spPr>
+        <p:style>
+          <a:lnRef idx="1">
+            <a:schemeClr val="accent1"/>
+          </a:lnRef>
+          <a:fillRef idx="3">
+            <a:schemeClr val="accent1"/>
+          </a:fillRef>
+          <a:effectRef idx="2">
+            <a:schemeClr val="accent1"/>
+          </a:effectRef>
+          <a:fontRef idx="minor">
+            <a:schemeClr val="lt1"/>
+          </a:fontRef>
+        </p:style>
+        <p:txBody>
+          <a:bodyPr rtlCol="0" anchor="ctr"/>
+          <a:lstStyle/>
+          <a:p>
+            <a:pPr algn="ctr"/>
+          </a:p>
+        </p:txBody>
+      </p:sp>
+      <p:sp>
+        <p:nvSpPr>
+          <p:cNvPr id="4" name="TextBox 3"/>
+          <p:cNvSpPr txBox="1"/>
+          <p:nvPr/>
+        </p:nvSpPr>
+        <p:spPr>
+          <a:xfrm>
+            <a:off x="457200" y="164592"/>
+            <a:ext cx="11155680" cy="320040"/>
+          </a:xfrm>
+          <a:prstGeom prst="rect">
+            <a:avLst/>
+          </a:prstGeom>
+          <a:noFill/>
+        </p:spPr>
+        <p:txBody>
+          <a:bodyPr wrap="square">
+            <a:spAutoFit/>
+          </a:bodyPr>
+          <a:lstStyle/>
+          <a:p>
+            <a:r>
+              <a:rPr sz="1200" b="1">
+                <a:solidFill>
+                  <a:srgbClr val="0E8F8F"/>
+                </a:solidFill>
+                <a:latin typeface="맑은 고딕"/>
+              </a:rPr>
+              <a:t>도입 제안 ① — 검증되는 과정</a:t>
+            </a:r>
+          </a:p>
+        </p:txBody>
+      </p:sp>
+      <p:sp>
+        <p:nvSpPr>
+          <p:cNvPr id="5" name="TextBox 4"/>
+          <p:cNvSpPr txBox="1"/>
+          <p:nvPr/>
+        </p:nvSpPr>
+        <p:spPr>
+          <a:xfrm>
+            <a:off x="457200" y="457200"/>
+            <a:ext cx="11247120" cy="566928"/>
+          </a:xfrm>
+          <a:prstGeom prst="rect">
+            <a:avLst/>
+          </a:prstGeom>
+          <a:noFill/>
+        </p:spPr>
+        <p:txBody>
+          <a:bodyPr wrap="square">
+            <a:spAutoFit/>
+          </a:bodyPr>
+          <a:lstStyle/>
+          <a:p>
+            <a:r>
+              <a:rPr sz="2500" b="1">
+                <a:solidFill>
+                  <a:srgbClr val="FFFFFF"/>
+                </a:solidFill>
+                <a:latin typeface="맑은 고딕"/>
+              </a:rPr>
+              <a:t>커스텀 하나(BANK-OM ID)가 검증되는 과정</a:t>
+            </a:r>
+          </a:p>
+        </p:txBody>
+      </p:sp>
+      <p:sp>
+        <p:nvSpPr>
+          <p:cNvPr id="6" name="TextBox 5"/>
+          <p:cNvSpPr txBox="1"/>
+          <p:nvPr/>
+        </p:nvSpPr>
+        <p:spPr>
+          <a:xfrm>
+            <a:off x="548640" y="1325880"/>
+            <a:ext cx="11064240" cy="4937760"/>
+          </a:xfrm>
+          <a:prstGeom prst="rect">
+            <a:avLst/>
+          </a:prstGeom>
+          <a:noFill/>
+        </p:spPr>
+        <p:txBody>
+          <a:bodyPr wrap="square">
+            <a:spAutoFit/>
+          </a:bodyPr>
+          <a:lstStyle/>
+          <a:p>
+            <a:pPr>
+              <a:spcBef>
+                <a:spcPts val="200"/>
+              </a:spcBef>
+              <a:spcAft>
+                <a:spcPts val="600"/>
+              </a:spcAft>
+            </a:pPr>
+            <a:r>
+              <a:rPr sz="1500" b="1">
+                <a:solidFill>
+                  <a:srgbClr val="0E8F8F"/>
+                </a:solidFill>
+                <a:latin typeface="맑은 고딕"/>
+              </a:rPr>
+              <a:t>■ </a:t>
+            </a:r>
+            <a:r>
+              <a:rPr sz="1500" b="1">
+                <a:solidFill>
+                  <a:srgbClr val="0E8F8F"/>
+                </a:solidFill>
+                <a:latin typeface="맑은 고딕"/>
+              </a:rPr>
+              <a:t>제안 — 하이브리드에서 LLM 작업의 ‘증거 층’으로 이 검사기를 도입한다 (자랑이 아니라 도입 대상)</a:t>
+            </a:r>
+          </a:p>
+          <a:p>
+            <a:pPr lvl="1">
+              <a:spcBef>
+                <a:spcPts val="200"/>
+              </a:spcBef>
+              <a:spcAft>
+                <a:spcPts val="600"/>
+              </a:spcAft>
+            </a:pPr>
+            <a:r>
+              <a:rPr sz="1300" b="0">
+                <a:solidFill>
+                  <a:srgbClr val="555B66"/>
+                </a:solidFill>
+                <a:latin typeface="맑은 고딕"/>
+              </a:rPr>
+              <a:t>– </a:t>
+            </a:r>
+            <a:r>
+              <a:rPr sz="1300" b="0">
+                <a:solidFill>
+                  <a:srgbClr val="222730"/>
+                </a:solidFill>
+                <a:latin typeface="맑은 고딕"/>
+              </a:rPr>
+              <a:t>① 등록 — Manifest·Registry·Contract. 무엇을·어디를 바꿨고 어떤 검사로 지킬지 선언</a:t>
+            </a:r>
+          </a:p>
+          <a:p>
+            <a:pPr lvl="1">
+              <a:spcBef>
+                <a:spcPts val="200"/>
+              </a:spcBef>
+              <a:spcAft>
+                <a:spcPts val="600"/>
+              </a:spcAft>
+            </a:pPr>
+            <a:r>
+              <a:rPr sz="1300" b="0">
+                <a:solidFill>
+                  <a:srgbClr val="555B66"/>
+                </a:solidFill>
+                <a:latin typeface="맑은 고딕"/>
+              </a:rPr>
+              <a:t>– </a:t>
+            </a:r>
+            <a:r>
+              <a:rPr sz="1300" b="0">
+                <a:solidFill>
+                  <a:srgbClr val="222730"/>
+                </a:solidFill>
+                <a:latin typeface="맑은 고딕"/>
+              </a:rPr>
+              <a:t>② 커밋·변경범위 검사 — 선언한 범위만 건드렸는지, 공식 계보 위에 얹혔는지</a:t>
+            </a:r>
+          </a:p>
+          <a:p>
+            <a:pPr lvl="1">
+              <a:spcBef>
+                <a:spcPts val="200"/>
+              </a:spcBef>
+              <a:spcAft>
+                <a:spcPts val="600"/>
+              </a:spcAft>
+            </a:pPr>
+            <a:r>
+              <a:rPr sz="1300" b="0">
+                <a:solidFill>
+                  <a:srgbClr val="555B66"/>
+                </a:solidFill>
+                <a:latin typeface="맑은 고딕"/>
+              </a:rPr>
+              <a:t>– </a:t>
+            </a:r>
+            <a:r>
+              <a:rPr sz="1300" b="0">
+                <a:solidFill>
+                  <a:srgbClr val="222730"/>
+                </a:solidFill>
+                <a:latin typeface="맑은 고딕"/>
+              </a:rPr>
+              <a:t>③ 공용 파일의 ID별 코드 검사 — 공유 파일에서 이 ID 몫의 코드가 살아있는지</a:t>
+            </a:r>
+          </a:p>
+          <a:p>
+            <a:pPr lvl="1">
+              <a:spcBef>
+                <a:spcPts val="200"/>
+              </a:spcBef>
+              <a:spcAft>
+                <a:spcPts val="600"/>
+              </a:spcAft>
+            </a:pPr>
+            <a:r>
+              <a:rPr sz="1300" b="0">
+                <a:solidFill>
+                  <a:srgbClr val="555B66"/>
+                </a:solidFill>
+                <a:latin typeface="맑은 고딕"/>
+              </a:rPr>
+              <a:t>– </a:t>
+            </a:r>
+            <a:r>
+              <a:rPr sz="1300" b="0">
+                <a:solidFill>
+                  <a:srgbClr val="222730"/>
+                </a:solidFill>
+                <a:latin typeface="맑은 고딕"/>
+              </a:rPr>
+              <a:t>④ 전용 검사 실행 — 이 기능만의 검사(API/화면/소스). 속 빈 테스트면 patch-kill로 걸러낸다</a:t>
+            </a:r>
+          </a:p>
+          <a:p>
+            <a:pPr lvl="1">
+              <a:spcBef>
+                <a:spcPts val="200"/>
+              </a:spcBef>
+              <a:spcAft>
+                <a:spcPts val="600"/>
+              </a:spcAft>
+            </a:pPr>
+            <a:r>
+              <a:rPr sz="1300" b="0">
+                <a:solidFill>
+                  <a:srgbClr val="555B66"/>
+                </a:solidFill>
+                <a:latin typeface="맑은 고딕"/>
+              </a:rPr>
+              <a:t>– </a:t>
+            </a:r>
+            <a:r>
+              <a:rPr sz="1300" b="0">
+                <a:solidFill>
+                  <a:srgbClr val="222730"/>
+                </a:solidFill>
+                <a:latin typeface="맑은 고딕"/>
+              </a:rPr>
+              <a:t>⑤ commit·이미지와 결과 결속 — 바꿔치기·사후수정을 감지</a:t>
+            </a:r>
+          </a:p>
+          <a:p>
+            <a:pPr lvl="1">
+              <a:spcBef>
+                <a:spcPts val="200"/>
+              </a:spcBef>
+              <a:spcAft>
+                <a:spcPts val="600"/>
+              </a:spcAft>
+            </a:pPr>
+            <a:r>
+              <a:rPr sz="1300" b="0">
+                <a:solidFill>
+                  <a:srgbClr val="555B66"/>
+                </a:solidFill>
+                <a:latin typeface="맑은 고딕"/>
+              </a:rPr>
+              <a:t>– </a:t>
+            </a:r>
+            <a:r>
+              <a:rPr sz="1300" b="0">
+                <a:solidFill>
+                  <a:srgbClr val="222730"/>
+                </a:solidFill>
+                <a:latin typeface="맑은 고딕"/>
+              </a:rPr>
+              <a:t>⑥ 승인·증거 보관 — 권한자 승인 + 증거 보관. 승인은 결과에 결속</a:t>
+            </a:r>
+          </a:p>
+          <a:p>
+            <a:pPr>
+              <a:spcBef>
+                <a:spcPts val="200"/>
+              </a:spcBef>
+              <a:spcAft>
+                <a:spcPts val="600"/>
+              </a:spcAft>
+            </a:pPr>
+            <a:r>
+              <a:rPr sz="1500" b="1">
+                <a:solidFill>
+                  <a:srgbClr val="0E8F8F"/>
+                </a:solidFill>
+                <a:latin typeface="맑은 고딕"/>
+              </a:rPr>
+              <a:t>■ </a:t>
+            </a:r>
+            <a:r>
+              <a:rPr sz="1500" b="1">
+                <a:solidFill>
+                  <a:srgbClr val="0E8F8F"/>
+                </a:solidFill>
+                <a:latin typeface="맑은 고딕"/>
+              </a:rPr>
+              <a:t>6페이지 한계와의 연결 — “관리 파일이 많다”는 부담을 그대로 두지 않는다. 이 산출물을 사람이 아니라 LLM이 생성·갱신하고, 검사기는 검증만 한다</a:t>
+            </a:r>
+          </a:p>
+        </p:txBody>
+      </p:sp>
+      <p:sp>
+        <p:nvSpPr>
+          <p:cNvPr id="7" name="TextBox 6"/>
+          <p:cNvSpPr txBox="1"/>
+          <p:nvPr/>
+        </p:nvSpPr>
+        <p:spPr>
+          <a:xfrm>
+            <a:off x="365760" y="6455664"/>
+            <a:ext cx="9144000" cy="301752"/>
+          </a:xfrm>
+          <a:prstGeom prst="rect">
+            <a:avLst/>
+          </a:prstGeom>
+          <a:noFill/>
+        </p:spPr>
+        <p:txBody>
+          <a:bodyPr wrap="square">
+            <a:spAutoFit/>
+          </a:bodyPr>
+          <a:lstStyle/>
+          <a:p>
+            <a:r>
+              <a:rPr sz="900" b="0">
+                <a:solidFill>
+                  <a:srgbClr val="555B66"/>
+                </a:solidFill>
+                <a:latin typeface="맑은 고딕"/>
+              </a:rPr>
+              <a:t>OpenMetadata 커스텀 버전업 검증 전략 · CODEX-05(정본) 기반</a:t>
+            </a:r>
+          </a:p>
+        </p:txBody>
+      </p:sp>
+      <p:sp>
+        <p:nvSpPr>
+          <p:cNvPr id="8" name="TextBox 7"/>
+          <p:cNvSpPr txBox="1"/>
+          <p:nvPr/>
+        </p:nvSpPr>
+        <p:spPr>
+          <a:xfrm>
+            <a:off x="11338560" y="6455664"/>
+            <a:ext cx="640080" cy="301752"/>
+          </a:xfrm>
+          <a:prstGeom prst="rect">
+            <a:avLst/>
+          </a:prstGeom>
+          <a:noFill/>
+        </p:spPr>
+        <p:txBody>
+          <a:bodyPr wrap="square">
+            <a:spAutoFit/>
+          </a:bodyPr>
+          <a:lstStyle/>
+          <a:p>
+            <a:pPr algn="r"/>
+            <a:r>
+              <a:rPr sz="900" b="0">
+                <a:solidFill>
+                  <a:srgbClr val="555B66"/>
+                </a:solidFill>
+                <a:latin typeface="맑은 고딕"/>
+              </a:rPr>
+              <a:t>11</a:t>
+            </a:r>
+          </a:p>
+        </p:txBody>
+      </p:sp>
+    </p:spTree>
+  </p:cSld>
+  <p:clrMapOvr>
+    <a:masterClrMapping/>
+  </p:clrMapOvr>
+</p:sld>
+</file>
+
+<file path=ppt/slides/slide12.xml><?xml version="1.0" encoding="utf-8"?>
 <p:sld xmlns:a="http://schemas.openxmlformats.org/drawingml/2006/main" xmlns:p="http://schemas.openxmlformats.org/presentationml/2006/main" xmlns:r="http://schemas.openxmlformats.org/officeDocument/2006/relationships">
   <p:cSld>
     <p:spTree>
@@ -4982,7 +5473,7 @@
                 </a:solidFill>
                 <a:latin typeface="맑은 고딕"/>
               </a:rPr>
-              <a:t>11</a:t>
+              <a:t>12</a:t>
             </a:r>
           </a:p>
         </p:txBody>
@@ -4995,7 +5486,7 @@
 </p:sld>
 </file>
 
-<file path=ppt/slides/slide12.xml><?xml version="1.0" encoding="utf-8"?>
+<file path=ppt/slides/slide13.xml><?xml version="1.0" encoding="utf-8"?>
 <p:sld xmlns:a="http://schemas.openxmlformats.org/drawingml/2006/main" xmlns:p="http://schemas.openxmlformats.org/presentationml/2006/main" xmlns:r="http://schemas.openxmlformats.org/officeDocument/2006/relationships">
   <p:cSld>
     <p:spTree>
@@ -5827,7 +6318,7 @@
                 </a:solidFill>
                 <a:latin typeface="맑은 고딕"/>
               </a:rPr>
-              <a:t>12</a:t>
+              <a:t>13</a:t>
             </a:r>
           </a:p>
         </p:txBody>
@@ -5840,7 +6331,7 @@
 </p:sld>
 </file>
 
-<file path=ppt/slides/slide13.xml><?xml version="1.0" encoding="utf-8"?>
+<file path=ppt/slides/slide14.xml><?xml version="1.0" encoding="utf-8"?>
 <p:sld xmlns:a="http://schemas.openxmlformats.org/drawingml/2006/main" xmlns:p="http://schemas.openxmlformats.org/presentationml/2006/main" xmlns:r="http://schemas.openxmlformats.org/officeDocument/2006/relationships">
   <p:cSld>
     <p:spTree>
@@ -6582,7 +7073,7 @@
                 </a:solidFill>
                 <a:latin typeface="맑은 고딕"/>
               </a:rPr>
-              <a:t>13</a:t>
+              <a:t>14</a:t>
             </a:r>
           </a:p>
         </p:txBody>
@@ -6595,7 +7086,7 @@
 </p:sld>
 </file>
 
-<file path=ppt/slides/slide14.xml><?xml version="1.0" encoding="utf-8"?>
+<file path=ppt/slides/slide15.xml><?xml version="1.0" encoding="utf-8"?>
 <p:sld xmlns:a="http://schemas.openxmlformats.org/drawingml/2006/main" xmlns:p="http://schemas.openxmlformats.org/presentationml/2006/main" xmlns:r="http://schemas.openxmlformats.org/officeDocument/2006/relationships">
   <p:cSld>
     <p:spTree>
@@ -7427,440 +7918,6 @@
                 </a:solidFill>
                 <a:latin typeface="맑은 고딕"/>
               </a:rPr>
-              <a:t>14</a:t>
-            </a:r>
-          </a:p>
-        </p:txBody>
-      </p:sp>
-    </p:spTree>
-  </p:cSld>
-  <p:clrMapOvr>
-    <a:masterClrMapping/>
-  </p:clrMapOvr>
-</p:sld>
-</file>
-
-<file path=ppt/slides/slide15.xml><?xml version="1.0" encoding="utf-8"?>
-<p:sld xmlns:a="http://schemas.openxmlformats.org/drawingml/2006/main" xmlns:p="http://schemas.openxmlformats.org/presentationml/2006/main" xmlns:r="http://schemas.openxmlformats.org/officeDocument/2006/relationships">
-  <p:cSld>
-    <p:spTree>
-      <p:nvGrpSpPr>
-        <p:cNvPr id="1" name=""/>
-        <p:cNvGrpSpPr/>
-        <p:nvPr/>
-      </p:nvGrpSpPr>
-      <p:grpSpPr/>
-      <p:sp>
-        <p:nvSpPr>
-          <p:cNvPr id="2" name="Rectangle 1"/>
-          <p:cNvSpPr/>
-          <p:nvPr/>
-        </p:nvSpPr>
-        <p:spPr>
-          <a:xfrm>
-            <a:off x="0" y="0"/>
-            <a:ext cx="12191695" cy="1051560"/>
-          </a:xfrm>
-          <a:prstGeom prst="rect">
-            <a:avLst/>
-          </a:prstGeom>
-          <a:solidFill>
-            <a:srgbClr val="1F2A44"/>
-          </a:solidFill>
-          <a:ln>
-            <a:noFill/>
-          </a:ln>
-          <a:effectLst/>
-        </p:spPr>
-        <p:style>
-          <a:lnRef idx="1">
-            <a:schemeClr val="accent1"/>
-          </a:lnRef>
-          <a:fillRef idx="3">
-            <a:schemeClr val="accent1"/>
-          </a:fillRef>
-          <a:effectRef idx="2">
-            <a:schemeClr val="accent1"/>
-          </a:effectRef>
-          <a:fontRef idx="minor">
-            <a:schemeClr val="lt1"/>
-          </a:fontRef>
-        </p:style>
-        <p:txBody>
-          <a:bodyPr rtlCol="0" anchor="ctr"/>
-          <a:lstStyle/>
-          <a:p>
-            <a:pPr algn="ctr"/>
-          </a:p>
-        </p:txBody>
-      </p:sp>
-      <p:sp>
-        <p:nvSpPr>
-          <p:cNvPr id="3" name="Rectangle 2"/>
-          <p:cNvSpPr/>
-          <p:nvPr/>
-        </p:nvSpPr>
-        <p:spPr>
-          <a:xfrm>
-            <a:off x="0" y="1051560"/>
-            <a:ext cx="12191695" cy="54864"/>
-          </a:xfrm>
-          <a:prstGeom prst="rect">
-            <a:avLst/>
-          </a:prstGeom>
-          <a:solidFill>
-            <a:srgbClr val="0E8F8F"/>
-          </a:solidFill>
-          <a:ln>
-            <a:noFill/>
-          </a:ln>
-          <a:effectLst/>
-        </p:spPr>
-        <p:style>
-          <a:lnRef idx="1">
-            <a:schemeClr val="accent1"/>
-          </a:lnRef>
-          <a:fillRef idx="3">
-            <a:schemeClr val="accent1"/>
-          </a:fillRef>
-          <a:effectRef idx="2">
-            <a:schemeClr val="accent1"/>
-          </a:effectRef>
-          <a:fontRef idx="minor">
-            <a:schemeClr val="lt1"/>
-          </a:fontRef>
-        </p:style>
-        <p:txBody>
-          <a:bodyPr rtlCol="0" anchor="ctr"/>
-          <a:lstStyle/>
-          <a:p>
-            <a:pPr algn="ctr"/>
-          </a:p>
-        </p:txBody>
-      </p:sp>
-      <p:sp>
-        <p:nvSpPr>
-          <p:cNvPr id="4" name="TextBox 3"/>
-          <p:cNvSpPr txBox="1"/>
-          <p:nvPr/>
-        </p:nvSpPr>
-        <p:spPr>
-          <a:xfrm>
-            <a:off x="457200" y="164592"/>
-            <a:ext cx="11155680" cy="320040"/>
-          </a:xfrm>
-          <a:prstGeom prst="rect">
-            <a:avLst/>
-          </a:prstGeom>
-          <a:noFill/>
-        </p:spPr>
-        <p:txBody>
-          <a:bodyPr wrap="square">
-            <a:spAutoFit/>
-          </a:bodyPr>
-          <a:lstStyle/>
-          <a:p>
-            <a:r>
-              <a:rPr sz="1200" b="1">
-                <a:solidFill>
-                  <a:srgbClr val="0E8F8F"/>
-                </a:solidFill>
-                <a:latin typeface="맑은 고딕"/>
-              </a:rPr>
-              <a:t>오해 방지</a:t>
-            </a:r>
-          </a:p>
-        </p:txBody>
-      </p:sp>
-      <p:sp>
-        <p:nvSpPr>
-          <p:cNvPr id="5" name="TextBox 4"/>
-          <p:cNvSpPr txBox="1"/>
-          <p:nvPr/>
-        </p:nvSpPr>
-        <p:spPr>
-          <a:xfrm>
-            <a:off x="457200" y="457200"/>
-            <a:ext cx="11247120" cy="566928"/>
-          </a:xfrm>
-          <a:prstGeom prst="rect">
-            <a:avLst/>
-          </a:prstGeom>
-          <a:noFill/>
-        </p:spPr>
-        <p:txBody>
-          <a:bodyPr wrap="square">
-            <a:spAutoFit/>
-          </a:bodyPr>
-          <a:lstStyle/>
-          <a:p>
-            <a:r>
-              <a:rPr sz="2500" b="1">
-                <a:solidFill>
-                  <a:srgbClr val="FFFFFF"/>
-                </a:solidFill>
-                <a:latin typeface="맑은 고딕"/>
-              </a:rPr>
-              <a:t>검사기의 정확한 위치 — LLM 위에 얹는 안전장치</a:t>
-            </a:r>
-          </a:p>
-        </p:txBody>
-      </p:sp>
-      <p:sp>
-        <p:nvSpPr>
-          <p:cNvPr id="6" name="TextBox 5"/>
-          <p:cNvSpPr txBox="1"/>
-          <p:nvPr/>
-        </p:nvSpPr>
-        <p:spPr>
-          <a:xfrm>
-            <a:off x="548640" y="1325880"/>
-            <a:ext cx="11064240" cy="4937760"/>
-          </a:xfrm>
-          <a:prstGeom prst="rect">
-            <a:avLst/>
-          </a:prstGeom>
-          <a:noFill/>
-        </p:spPr>
-        <p:txBody>
-          <a:bodyPr wrap="square">
-            <a:spAutoFit/>
-          </a:bodyPr>
-          <a:lstStyle/>
-          <a:p>
-            <a:pPr>
-              <a:spcBef>
-                <a:spcPts val="200"/>
-              </a:spcBef>
-              <a:spcAft>
-                <a:spcPts val="600"/>
-              </a:spcAft>
-            </a:pPr>
-            <a:r>
-              <a:rPr sz="1500" b="1">
-                <a:solidFill>
-                  <a:srgbClr val="0E8F8F"/>
-                </a:solidFill>
-                <a:latin typeface="맑은 고딕"/>
-              </a:rPr>
-              <a:t>■ </a:t>
-            </a:r>
-            <a:r>
-              <a:rPr sz="1500" b="1">
-                <a:solidFill>
-                  <a:srgbClr val="0E8F8F"/>
-                </a:solidFill>
-                <a:latin typeface="맑은 고딕"/>
-              </a:rPr>
-              <a:t>검사기는 LLM을 대신하지 않는다. 검사도 판단도 LLM이 먼저 한다 — 검사기는 그 결과를 한 번 더 확인할 뿐이다</a:t>
-            </a:r>
-          </a:p>
-          <a:p>
-            <a:pPr>
-              <a:spcBef>
-                <a:spcPts val="200"/>
-              </a:spcBef>
-              <a:spcAft>
-                <a:spcPts val="600"/>
-              </a:spcAft>
-            </a:pPr>
-            <a:r>
-              <a:rPr sz="1500" b="1">
-                <a:solidFill>
-                  <a:srgbClr val="0E8F8F"/>
-                </a:solidFill>
-                <a:latin typeface="맑은 고딕"/>
-              </a:rPr>
-              <a:t>■ </a:t>
-            </a:r>
-            <a:r>
-              <a:rPr sz="1500" b="1">
-                <a:solidFill>
-                  <a:srgbClr val="2E6CB1"/>
-                </a:solidFill>
-                <a:latin typeface="맑은 고딕"/>
-              </a:rPr>
-              <a:t>1차 — LLM: 무엇을 바꿀지 정하고, 옮겨간 코드를 찾고, 충돌을 풀고, 검사까지 직접 돌린다. 속도는 전부 여기서 나온다</a:t>
-            </a:r>
-          </a:p>
-          <a:p>
-            <a:pPr>
-              <a:spcBef>
-                <a:spcPts val="200"/>
-              </a:spcBef>
-              <a:spcAft>
-                <a:spcPts val="600"/>
-              </a:spcAft>
-            </a:pPr>
-            <a:r>
-              <a:rPr sz="1500" b="1">
-                <a:solidFill>
-                  <a:srgbClr val="0E8F8F"/>
-                </a:solidFill>
-                <a:latin typeface="맑은 고딕"/>
-              </a:rPr>
-              <a:t>■ </a:t>
-            </a:r>
-            <a:r>
-              <a:rPr sz="1500" b="1">
-                <a:solidFill>
-                  <a:srgbClr val="0E8F8F"/>
-                </a:solidFill>
-                <a:latin typeface="맑은 고딕"/>
-              </a:rPr>
-              <a:t>2차 — 검사기: 같은 일을 다시 하지 않는다. LLM이 자기 자신에 대해 답할 수 없는 것만 확인한다</a:t>
-            </a:r>
-          </a:p>
-          <a:p>
-            <a:pPr lvl="1">
-              <a:spcBef>
-                <a:spcPts val="200"/>
-              </a:spcBef>
-              <a:spcAft>
-                <a:spcPts val="600"/>
-              </a:spcAft>
-            </a:pPr>
-            <a:r>
-              <a:rPr sz="1300" b="0">
-                <a:solidFill>
-                  <a:srgbClr val="555B66"/>
-                </a:solidFill>
-                <a:latin typeface="맑은 고딕"/>
-              </a:rPr>
-              <a:t>– </a:t>
-            </a:r>
-            <a:r>
-              <a:rPr sz="1300" b="0">
-                <a:solidFill>
-                  <a:srgbClr val="222730"/>
-                </a:solidFill>
-                <a:latin typeface="맑은 고딕"/>
-              </a:rPr>
-              <a:t>① 정말 돌렸는가  ② 검사한 코드가 배포할 코드와 같은가  ③ 그 결과가 나중에 바뀌지 않았는가</a:t>
-            </a:r>
-          </a:p>
-          <a:p>
-            <a:pPr>
-              <a:spcBef>
-                <a:spcPts val="200"/>
-              </a:spcBef>
-              <a:spcAft>
-                <a:spcPts val="600"/>
-              </a:spcAft>
-            </a:pPr>
-            <a:r>
-              <a:rPr sz="1500" b="1">
-                <a:solidFill>
-                  <a:srgbClr val="0E8F8F"/>
-                </a:solidFill>
-                <a:latin typeface="맑은 고딕"/>
-              </a:rPr>
-              <a:t>■ </a:t>
-            </a:r>
-            <a:r>
-              <a:rPr sz="1500" b="1">
-                <a:solidFill>
-                  <a:srgbClr val="B03A2E"/>
-                </a:solidFill>
-                <a:latin typeface="맑은 고딕"/>
-              </a:rPr>
-              <a:t>그래서 독립성 — LLM이 실행·기록·증거·승인을 다 하면 ‘한 번 더’가 성립하지 않는다. 별도의 보호된 자동화(CI)가 실제 코드를 받아 검사를 돌려야 한다</a:t>
-            </a:r>
-          </a:p>
-          <a:p>
-            <a:pPr>
-              <a:spcBef>
-                <a:spcPts val="200"/>
-              </a:spcBef>
-              <a:spcAft>
-                <a:spcPts val="600"/>
-              </a:spcAft>
-            </a:pPr>
-            <a:r>
-              <a:rPr sz="1500" b="1">
-                <a:solidFill>
-                  <a:srgbClr val="0E8F8F"/>
-                </a:solidFill>
-                <a:latin typeface="맑은 고딕"/>
-              </a:rPr>
-              <a:t>■ </a:t>
-            </a:r>
-            <a:r>
-              <a:rPr sz="1500" b="1">
-                <a:solidFill>
-                  <a:srgbClr val="2E8B57"/>
-                </a:solidFill>
-                <a:latin typeface="맑은 고딕"/>
-              </a:rPr>
-              <a:t>검사기를 ‘LLM보다 똑똑한 판정자’로 쓰면 실패한다 — 그건 이미 해봤다. ‘LLM이 한 일을 한 번 더 확인하는 안전장치’로 쓰면 부담은 작고 얻는 건 크다</a:t>
-            </a:r>
-          </a:p>
-        </p:txBody>
-      </p:sp>
-      <p:sp>
-        <p:nvSpPr>
-          <p:cNvPr id="7" name="TextBox 6"/>
-          <p:cNvSpPr txBox="1"/>
-          <p:nvPr/>
-        </p:nvSpPr>
-        <p:spPr>
-          <a:xfrm>
-            <a:off x="365760" y="6455664"/>
-            <a:ext cx="9144000" cy="301752"/>
-          </a:xfrm>
-          <a:prstGeom prst="rect">
-            <a:avLst/>
-          </a:prstGeom>
-          <a:noFill/>
-        </p:spPr>
-        <p:txBody>
-          <a:bodyPr wrap="square">
-            <a:spAutoFit/>
-          </a:bodyPr>
-          <a:lstStyle/>
-          <a:p>
-            <a:r>
-              <a:rPr sz="900" b="0">
-                <a:solidFill>
-                  <a:srgbClr val="555B66"/>
-                </a:solidFill>
-                <a:latin typeface="맑은 고딕"/>
-              </a:rPr>
-              <a:t>OpenMetadata 커스텀 버전업 검증 전략 · CODEX-05(정본) 기반</a:t>
-            </a:r>
-          </a:p>
-        </p:txBody>
-      </p:sp>
-      <p:sp>
-        <p:nvSpPr>
-          <p:cNvPr id="8" name="TextBox 7"/>
-          <p:cNvSpPr txBox="1"/>
-          <p:nvPr/>
-        </p:nvSpPr>
-        <p:spPr>
-          <a:xfrm>
-            <a:off x="11338560" y="6455664"/>
-            <a:ext cx="640080" cy="301752"/>
-          </a:xfrm>
-          <a:prstGeom prst="rect">
-            <a:avLst/>
-          </a:prstGeom>
-          <a:noFill/>
-        </p:spPr>
-        <p:txBody>
-          <a:bodyPr wrap="square">
-            <a:spAutoFit/>
-          </a:bodyPr>
-          <a:lstStyle/>
-          <a:p>
-            <a:pPr algn="r"/>
-            <a:r>
-              <a:rPr sz="900" b="0">
-                <a:solidFill>
-                  <a:srgbClr val="555B66"/>
-                </a:solidFill>
-                <a:latin typeface="맑은 고딕"/>
-              </a:rPr>
               <a:t>15</a:t>
             </a:r>
           </a:p>
@@ -8001,7 +8058,7 @@
                 </a:solidFill>
                 <a:latin typeface="맑은 고딕"/>
               </a:rPr>
-              <a:t>한 장 요약</a:t>
+              <a:t>오해 방지</a:t>
             </a:r>
           </a:p>
         </p:txBody>
@@ -8035,7 +8092,7 @@
                 </a:solidFill>
                 <a:latin typeface="맑은 고딕"/>
               </a:rPr>
-              <a:t>결론</a:t>
+              <a:t>검사기의 정확한 위치 — LLM 위에 얹는 안전장치</a:t>
             </a:r>
           </a:p>
         </p:txBody>
@@ -8082,11 +8139,11 @@
             <a:r>
               <a:rPr sz="1500" b="1">
                 <a:solidFill>
-                  <a:srgbClr val="2E8B57"/>
-                </a:solidFill>
-                <a:latin typeface="맑은 고딕"/>
-              </a:rPr>
-              <a:t>작은 변화 — 하위 패치엔 규칙 기반이 그대로 유효. 충돌 0·자동 병합 (4·5p)</a:t>
+                  <a:srgbClr val="0E8F8F"/>
+                </a:solidFill>
+                <a:latin typeface="맑은 고딕"/>
+              </a:rPr>
+              <a:t>검사기는 LLM을 대신하지 않는다. 검사도 판단도 LLM이 먼저 한다 — 검사기는 그 결과를 한 번 더 확인할 뿐이다</a:t>
             </a:r>
           </a:p>
           <a:p>
@@ -8110,11 +8167,11 @@
             <a:r>
               <a:rPr sz="1500" b="1">
                 <a:solidFill>
-                  <a:srgbClr val="B03A2E"/>
-                </a:solidFill>
-                <a:latin typeface="맑은 고딕"/>
-              </a:rPr>
-              <a:t>큰 변화 — 1.13.2처럼 구조가 바뀌면 오판(리로케이션) + 관리 파일 ~25개 운영 부담(6p) → 한계</a:t>
+                  <a:srgbClr val="2E6CB1"/>
+                </a:solidFill>
+                <a:latin typeface="맑은 고딕"/>
+              </a:rPr>
+              <a:t>1차 — LLM: 무엇을 바꿀지 정하고, 옮겨간 코드를 찾고, 충돌을 풀고, 검사까지 직접 돌린다. 속도는 전부 여기서 나온다</a:t>
             </a:r>
           </a:p>
           <a:p>
@@ -8138,11 +8195,39 @@
             <a:r>
               <a:rPr sz="1500" b="1">
                 <a:solidFill>
-                  <a:srgbClr val="2E6CB1"/>
-                </a:solidFill>
-                <a:latin typeface="맑은 고딕"/>
-              </a:rPr>
-              <a:t>그래서 — 규칙 기반은 버리지 않는다. 예측 가능 범위엔 그대로, 불확실할 때만 하이브리드. 그 관리 산출물은 LLM이 만들고 검사기는 검증만 (9·10p)</a:t>
+                  <a:srgbClr val="0E8F8F"/>
+                </a:solidFill>
+                <a:latin typeface="맑은 고딕"/>
+              </a:rPr>
+              <a:t>2차 — 검사기: 같은 일을 다시 하지 않는다. LLM이 자기 자신에 대해 답할 수 없는 것만 확인한다</a:t>
+            </a:r>
+          </a:p>
+          <a:p>
+            <a:pPr lvl="1">
+              <a:spcBef>
+                <a:spcPts val="200"/>
+              </a:spcBef>
+              <a:spcAft>
+                <a:spcPts val="600"/>
+              </a:spcAft>
+            </a:pPr>
+            <a:r>
+              <a:rPr sz="1300" b="0">
+                <a:solidFill>
+                  <a:srgbClr val="555B66"/>
+                </a:solidFill>
+                <a:latin typeface="맑은 고딕"/>
+              </a:rPr>
+              <a:t>– </a:t>
+            </a:r>
+            <a:r>
+              <a:rPr sz="1300" b="0">
+                <a:solidFill>
+                  <a:srgbClr val="222730"/>
+                </a:solidFill>
+                <a:latin typeface="맑은 고딕"/>
+              </a:rPr>
+              <a:t>① 정말 돌렸는가  ② 검사한 코드가 배포할 코드와 같은가  ③ 그 결과가 나중에 바뀌지 않았는가</a:t>
             </a:r>
           </a:p>
           <a:p>
@@ -8166,11 +8251,11 @@
             <a:r>
               <a:rPr sz="1500" b="1">
                 <a:solidFill>
-                  <a:srgbClr val="0E8F8F"/>
-                </a:solidFill>
-                <a:latin typeface="맑은 고딕"/>
-              </a:rPr>
-              <a:t>① 방식 통제 — 규칙으로 못 박던 것을 지시(프롬프트·MD)로 옮겨 AI가 일하는 방식을 통제 (브랜치·커밋·범위)</a:t>
+                  <a:srgbClr val="B03A2E"/>
+                </a:solidFill>
+                <a:latin typeface="맑은 고딕"/>
+              </a:rPr>
+              <a:t>그래서 독립성 — LLM이 실행·기록·증거·승인을 다 하면 ‘한 번 더’가 성립하지 않는다. 별도의 보호된 자동화(CI)가 실제 코드를 받아 검사를 돌려야 한다</a:t>
             </a:r>
           </a:p>
           <a:p>
@@ -8198,9 +8283,275 @@
                 </a:solidFill>
                 <a:latin typeface="맑은 고딕"/>
               </a:rPr>
-              <a:t>② 결과 통제 — 과정마다 정해진 형식으로 결과를 뱉게 강제 → 검사기가 판정</a:t>
-            </a:r>
-          </a:p>
+              <a:t>검사기를 ‘LLM보다 똑똑한 판정자’로 쓰면 실패한다 — 그건 이미 해봤다. ‘LLM이 한 일을 한 번 더 확인하는 안전장치’로 쓰면 부담은 작고 얻는 건 크다</a:t>
+            </a:r>
+          </a:p>
+        </p:txBody>
+      </p:sp>
+      <p:sp>
+        <p:nvSpPr>
+          <p:cNvPr id="7" name="TextBox 6"/>
+          <p:cNvSpPr txBox="1"/>
+          <p:nvPr/>
+        </p:nvSpPr>
+        <p:spPr>
+          <a:xfrm>
+            <a:off x="365760" y="6455664"/>
+            <a:ext cx="9144000" cy="301752"/>
+          </a:xfrm>
+          <a:prstGeom prst="rect">
+            <a:avLst/>
+          </a:prstGeom>
+          <a:noFill/>
+        </p:spPr>
+        <p:txBody>
+          <a:bodyPr wrap="square">
+            <a:spAutoFit/>
+          </a:bodyPr>
+          <a:lstStyle/>
+          <a:p>
+            <a:r>
+              <a:rPr sz="900" b="0">
+                <a:solidFill>
+                  <a:srgbClr val="555B66"/>
+                </a:solidFill>
+                <a:latin typeface="맑은 고딕"/>
+              </a:rPr>
+              <a:t>OpenMetadata 커스텀 버전업 검증 전략 · CODEX-05(정본) 기반</a:t>
+            </a:r>
+          </a:p>
+        </p:txBody>
+      </p:sp>
+      <p:sp>
+        <p:nvSpPr>
+          <p:cNvPr id="8" name="TextBox 7"/>
+          <p:cNvSpPr txBox="1"/>
+          <p:nvPr/>
+        </p:nvSpPr>
+        <p:spPr>
+          <a:xfrm>
+            <a:off x="11338560" y="6455664"/>
+            <a:ext cx="640080" cy="301752"/>
+          </a:xfrm>
+          <a:prstGeom prst="rect">
+            <a:avLst/>
+          </a:prstGeom>
+          <a:noFill/>
+        </p:spPr>
+        <p:txBody>
+          <a:bodyPr wrap="square">
+            <a:spAutoFit/>
+          </a:bodyPr>
+          <a:lstStyle/>
+          <a:p>
+            <a:pPr algn="r"/>
+            <a:r>
+              <a:rPr sz="900" b="0">
+                <a:solidFill>
+                  <a:srgbClr val="555B66"/>
+                </a:solidFill>
+                <a:latin typeface="맑은 고딕"/>
+              </a:rPr>
+              <a:t>16</a:t>
+            </a:r>
+          </a:p>
+        </p:txBody>
+      </p:sp>
+    </p:spTree>
+  </p:cSld>
+  <p:clrMapOvr>
+    <a:masterClrMapping/>
+  </p:clrMapOvr>
+</p:sld>
+</file>
+
+<file path=ppt/slides/slide17.xml><?xml version="1.0" encoding="utf-8"?>
+<p:sld xmlns:a="http://schemas.openxmlformats.org/drawingml/2006/main" xmlns:p="http://schemas.openxmlformats.org/presentationml/2006/main" xmlns:r="http://schemas.openxmlformats.org/officeDocument/2006/relationships">
+  <p:cSld>
+    <p:spTree>
+      <p:nvGrpSpPr>
+        <p:cNvPr id="1" name=""/>
+        <p:cNvGrpSpPr/>
+        <p:nvPr/>
+      </p:nvGrpSpPr>
+      <p:grpSpPr/>
+      <p:sp>
+        <p:nvSpPr>
+          <p:cNvPr id="2" name="Rectangle 1"/>
+          <p:cNvSpPr/>
+          <p:nvPr/>
+        </p:nvSpPr>
+        <p:spPr>
+          <a:xfrm>
+            <a:off x="0" y="0"/>
+            <a:ext cx="12191695" cy="1051560"/>
+          </a:xfrm>
+          <a:prstGeom prst="rect">
+            <a:avLst/>
+          </a:prstGeom>
+          <a:solidFill>
+            <a:srgbClr val="1F2A44"/>
+          </a:solidFill>
+          <a:ln>
+            <a:noFill/>
+          </a:ln>
+          <a:effectLst/>
+        </p:spPr>
+        <p:style>
+          <a:lnRef idx="1">
+            <a:schemeClr val="accent1"/>
+          </a:lnRef>
+          <a:fillRef idx="3">
+            <a:schemeClr val="accent1"/>
+          </a:fillRef>
+          <a:effectRef idx="2">
+            <a:schemeClr val="accent1"/>
+          </a:effectRef>
+          <a:fontRef idx="minor">
+            <a:schemeClr val="lt1"/>
+          </a:fontRef>
+        </p:style>
+        <p:txBody>
+          <a:bodyPr rtlCol="0" anchor="ctr"/>
+          <a:lstStyle/>
+          <a:p>
+            <a:pPr algn="ctr"/>
+          </a:p>
+        </p:txBody>
+      </p:sp>
+      <p:sp>
+        <p:nvSpPr>
+          <p:cNvPr id="3" name="Rectangle 2"/>
+          <p:cNvSpPr/>
+          <p:nvPr/>
+        </p:nvSpPr>
+        <p:spPr>
+          <a:xfrm>
+            <a:off x="0" y="1051560"/>
+            <a:ext cx="12191695" cy="54864"/>
+          </a:xfrm>
+          <a:prstGeom prst="rect">
+            <a:avLst/>
+          </a:prstGeom>
+          <a:solidFill>
+            <a:srgbClr val="0E8F8F"/>
+          </a:solidFill>
+          <a:ln>
+            <a:noFill/>
+          </a:ln>
+          <a:effectLst/>
+        </p:spPr>
+        <p:style>
+          <a:lnRef idx="1">
+            <a:schemeClr val="accent1"/>
+          </a:lnRef>
+          <a:fillRef idx="3">
+            <a:schemeClr val="accent1"/>
+          </a:fillRef>
+          <a:effectRef idx="2">
+            <a:schemeClr val="accent1"/>
+          </a:effectRef>
+          <a:fontRef idx="minor">
+            <a:schemeClr val="lt1"/>
+          </a:fontRef>
+        </p:style>
+        <p:txBody>
+          <a:bodyPr rtlCol="0" anchor="ctr"/>
+          <a:lstStyle/>
+          <a:p>
+            <a:pPr algn="ctr"/>
+          </a:p>
+        </p:txBody>
+      </p:sp>
+      <p:sp>
+        <p:nvSpPr>
+          <p:cNvPr id="4" name="TextBox 3"/>
+          <p:cNvSpPr txBox="1"/>
+          <p:nvPr/>
+        </p:nvSpPr>
+        <p:spPr>
+          <a:xfrm>
+            <a:off x="457200" y="164592"/>
+            <a:ext cx="11155680" cy="320040"/>
+          </a:xfrm>
+          <a:prstGeom prst="rect">
+            <a:avLst/>
+          </a:prstGeom>
+          <a:noFill/>
+        </p:spPr>
+        <p:txBody>
+          <a:bodyPr wrap="square">
+            <a:spAutoFit/>
+          </a:bodyPr>
+          <a:lstStyle/>
+          <a:p>
+            <a:r>
+              <a:rPr sz="1200" b="1">
+                <a:solidFill>
+                  <a:srgbClr val="0E8F8F"/>
+                </a:solidFill>
+                <a:latin typeface="맑은 고딕"/>
+              </a:rPr>
+              <a:t>한 장 요약</a:t>
+            </a:r>
+          </a:p>
+        </p:txBody>
+      </p:sp>
+      <p:sp>
+        <p:nvSpPr>
+          <p:cNvPr id="5" name="TextBox 4"/>
+          <p:cNvSpPr txBox="1"/>
+          <p:nvPr/>
+        </p:nvSpPr>
+        <p:spPr>
+          <a:xfrm>
+            <a:off x="457200" y="457200"/>
+            <a:ext cx="11247120" cy="566928"/>
+          </a:xfrm>
+          <a:prstGeom prst="rect">
+            <a:avLst/>
+          </a:prstGeom>
+          <a:noFill/>
+        </p:spPr>
+        <p:txBody>
+          <a:bodyPr wrap="square">
+            <a:spAutoFit/>
+          </a:bodyPr>
+          <a:lstStyle/>
+          <a:p>
+            <a:r>
+              <a:rPr sz="2500" b="1">
+                <a:solidFill>
+                  <a:srgbClr val="FFFFFF"/>
+                </a:solidFill>
+                <a:latin typeface="맑은 고딕"/>
+              </a:rPr>
+              <a:t>결론</a:t>
+            </a:r>
+          </a:p>
+        </p:txBody>
+      </p:sp>
+      <p:sp>
+        <p:nvSpPr>
+          <p:cNvPr id="6" name="TextBox 5"/>
+          <p:cNvSpPr txBox="1"/>
+          <p:nvPr/>
+        </p:nvSpPr>
+        <p:spPr>
+          <a:xfrm>
+            <a:off x="548640" y="1325880"/>
+            <a:ext cx="11064240" cy="4937760"/>
+          </a:xfrm>
+          <a:prstGeom prst="rect">
+            <a:avLst/>
+          </a:prstGeom>
+          <a:noFill/>
+        </p:spPr>
+        <p:txBody>
+          <a:bodyPr wrap="square">
+            <a:spAutoFit/>
+          </a:bodyPr>
+          <a:lstStyle/>
           <a:p>
             <a:pPr>
               <a:spcBef>
@@ -8222,6 +8573,146 @@
             <a:r>
               <a:rPr sz="1500" b="1">
                 <a:solidFill>
+                  <a:srgbClr val="2E8B57"/>
+                </a:solidFill>
+                <a:latin typeface="맑은 고딕"/>
+              </a:rPr>
+              <a:t>작은 변화 — 하위 패치엔 규칙 기반이 그대로 유효. 충돌 0·자동 병합 (4·5p)</a:t>
+            </a:r>
+          </a:p>
+          <a:p>
+            <a:pPr>
+              <a:spcBef>
+                <a:spcPts val="200"/>
+              </a:spcBef>
+              <a:spcAft>
+                <a:spcPts val="600"/>
+              </a:spcAft>
+            </a:pPr>
+            <a:r>
+              <a:rPr sz="1500" b="1">
+                <a:solidFill>
+                  <a:srgbClr val="0E8F8F"/>
+                </a:solidFill>
+                <a:latin typeface="맑은 고딕"/>
+              </a:rPr>
+              <a:t>■ </a:t>
+            </a:r>
+            <a:r>
+              <a:rPr sz="1500" b="1">
+                <a:solidFill>
+                  <a:srgbClr val="B03A2E"/>
+                </a:solidFill>
+                <a:latin typeface="맑은 고딕"/>
+              </a:rPr>
+              <a:t>큰 변화 — 1.13.2처럼 구조가 바뀌면 오판(리로케이션) + 관리 파일 ~25개 운영 부담(6p) → 한계</a:t>
+            </a:r>
+          </a:p>
+          <a:p>
+            <a:pPr>
+              <a:spcBef>
+                <a:spcPts val="200"/>
+              </a:spcBef>
+              <a:spcAft>
+                <a:spcPts val="600"/>
+              </a:spcAft>
+            </a:pPr>
+            <a:r>
+              <a:rPr sz="1500" b="1">
+                <a:solidFill>
+                  <a:srgbClr val="0E8F8F"/>
+                </a:solidFill>
+                <a:latin typeface="맑은 고딕"/>
+              </a:rPr>
+              <a:t>■ </a:t>
+            </a:r>
+            <a:r>
+              <a:rPr sz="1500" b="1">
+                <a:solidFill>
+                  <a:srgbClr val="2E6CB1"/>
+                </a:solidFill>
+                <a:latin typeface="맑은 고딕"/>
+              </a:rPr>
+              <a:t>그래서 — 규칙 기반은 버리지 않는다. 예측 가능 범위엔 그대로, 불확실할 때만 하이브리드. 그 관리 산출물은 LLM이 만들고 검사기는 검증만 (10·11p)</a:t>
+            </a:r>
+          </a:p>
+          <a:p>
+            <a:pPr>
+              <a:spcBef>
+                <a:spcPts val="200"/>
+              </a:spcBef>
+              <a:spcAft>
+                <a:spcPts val="600"/>
+              </a:spcAft>
+            </a:pPr>
+            <a:r>
+              <a:rPr sz="1500" b="1">
+                <a:solidFill>
+                  <a:srgbClr val="0E8F8F"/>
+                </a:solidFill>
+                <a:latin typeface="맑은 고딕"/>
+              </a:rPr>
+              <a:t>■ </a:t>
+            </a:r>
+            <a:r>
+              <a:rPr sz="1500" b="1">
+                <a:solidFill>
+                  <a:srgbClr val="0E8F8F"/>
+                </a:solidFill>
+                <a:latin typeface="맑은 고딕"/>
+              </a:rPr>
+              <a:t>① 방식 통제 — 규칙으로 못 박던 것을 지시(프롬프트·MD)로 옮겨 AI가 일하는 방식을 통제 (브랜치·커밋·범위)</a:t>
+            </a:r>
+          </a:p>
+          <a:p>
+            <a:pPr>
+              <a:spcBef>
+                <a:spcPts val="200"/>
+              </a:spcBef>
+              <a:spcAft>
+                <a:spcPts val="600"/>
+              </a:spcAft>
+            </a:pPr>
+            <a:r>
+              <a:rPr sz="1500" b="1">
+                <a:solidFill>
+                  <a:srgbClr val="0E8F8F"/>
+                </a:solidFill>
+                <a:latin typeface="맑은 고딕"/>
+              </a:rPr>
+              <a:t>■ </a:t>
+            </a:r>
+            <a:r>
+              <a:rPr sz="1500" b="1">
+                <a:solidFill>
+                  <a:srgbClr val="2E8B57"/>
+                </a:solidFill>
+                <a:latin typeface="맑은 고딕"/>
+              </a:rPr>
+              <a:t>② 결과 통제 — 과정마다 정해진 형식으로 결과를 뱉게 강제 → 검사기가 판정</a:t>
+            </a:r>
+          </a:p>
+          <a:p>
+            <a:pPr>
+              <a:spcBef>
+                <a:spcPts val="200"/>
+              </a:spcBef>
+              <a:spcAft>
+                <a:spcPts val="600"/>
+              </a:spcAft>
+            </a:pPr>
+            <a:r>
+              <a:rPr sz="1500" b="1">
+                <a:solidFill>
+                  <a:srgbClr val="0E8F8F"/>
+                </a:solidFill>
+                <a:latin typeface="맑은 고딕"/>
+              </a:rPr>
+              <a:t>■ </a:t>
+            </a:r>
+            <a:r>
+              <a:rPr sz="1500" b="1">
+                <a:solidFill>
                   <a:srgbClr val="0E8F8F"/>
                 </a:solidFill>
                 <a:latin typeface="맑은 고딕"/>
@@ -8314,7 +8805,7 @@
                 </a:solidFill>
                 <a:latin typeface="맑은 고딕"/>
               </a:rPr>
-              <a:t>16</a:t>
+              <a:t>17</a:t>
             </a:r>
           </a:p>
         </p:txBody>
@@ -10672,7 +11163,7 @@
                 </a:solidFill>
                 <a:latin typeface="맑은 고딕"/>
               </a:rPr>
-              <a:t>빼보기(patch-kill) — 기능이 되는지가 아니라 그 테스트가 진짜인지를 검사한다</a:t>
+              <a:t>허위 테스트 방지 — 기능이 되는지가 아니라 그 테스트가 진짜인지를 검사한다</a:t>
             </a:r>
           </a:p>
           <a:p>
@@ -11038,7 +11529,7 @@
             <a:avLst/>
           </a:prstGeom>
           <a:solidFill>
-            <a:srgbClr val="2E6CB1"/>
+            <a:srgbClr val="0E8F8F"/>
           </a:solidFill>
           <a:ln>
             <a:noFill/>
@@ -11092,11 +11583,11 @@
             <a:r>
               <a:rPr sz="1200" b="1">
                 <a:solidFill>
-                  <a:srgbClr val="2E6CB1"/>
-                </a:solidFill>
-                <a:latin typeface="맑은 고딕"/>
-              </a:rPr>
-              <a:t>참고한 다른 접근</a:t>
+                  <a:srgbClr val="0E8F8F"/>
+                </a:solidFill>
+                <a:latin typeface="맑은 고딕"/>
+              </a:rPr>
+              <a:t>테스트 결론</a:t>
             </a:r>
           </a:p>
         </p:txBody>
@@ -11130,7 +11621,7 @@
                 </a:solidFill>
                 <a:latin typeface="맑은 고딕"/>
               </a:rPr>
-              <a:t>8/5 공유된 ‘LLM 기반 운영 방식’ (참고)</a:t>
+              <a:t>그래서 내린 판단</a:t>
             </a:r>
           </a:p>
         </p:txBody>
@@ -11168,7 +11659,7 @@
             <a:r>
               <a:rPr sz="1500" b="1">
                 <a:solidFill>
-                  <a:srgbClr val="2E6CB1"/>
+                  <a:srgbClr val="0E8F8F"/>
                 </a:solidFill>
                 <a:latin typeface="맑은 고딕"/>
               </a:rPr>
@@ -11177,11 +11668,123 @@
             <a:r>
               <a:rPr sz="1500" b="1">
                 <a:solidFill>
-                  <a:srgbClr val="2E6CB1"/>
-                </a:solidFill>
-                <a:latin typeface="맑은 고딕"/>
-              </a:rPr>
-              <a:t>개념 — 규칙·지식 문서·자동화로 LLM이 버전 포팅을 빠르게 수행하는 방식</a:t>
+                  <a:srgbClr val="222730"/>
+                </a:solidFill>
+                <a:latin typeface="맑은 고딕"/>
+              </a:rPr>
+              <a:t>처음의 규칙 기반 · AI 최소화 전략을 실제로 돌려본 결과 —</a:t>
+            </a:r>
+          </a:p>
+          <a:p>
+            <a:pPr>
+              <a:spcBef>
+                <a:spcPts val="200"/>
+              </a:spcBef>
+              <a:spcAft>
+                <a:spcPts val="600"/>
+              </a:spcAft>
+            </a:pPr>
+            <a:r>
+              <a:rPr sz="1500" b="1">
+                <a:solidFill>
+                  <a:srgbClr val="0E8F8F"/>
+                </a:solidFill>
+                <a:latin typeface="맑은 고딕"/>
+              </a:rPr>
+              <a:t>■ </a:t>
+            </a:r>
+            <a:r>
+              <a:rPr sz="1500" b="1">
+                <a:solidFill>
+                  <a:srgbClr val="2E8B57"/>
+                </a:solidFill>
+                <a:latin typeface="맑은 고딕"/>
+              </a:rPr>
+              <a:t>잘 통한 것 — 정해진 틀 안에서는 잘 통했다 (1.13.0→1.13.1은 충돌 0으로 깔끔히 통과)</a:t>
+            </a:r>
+          </a:p>
+          <a:p>
+            <a:pPr>
+              <a:spcBef>
+                <a:spcPts val="200"/>
+              </a:spcBef>
+              <a:spcAft>
+                <a:spcPts val="600"/>
+              </a:spcAft>
+            </a:pPr>
+            <a:r>
+              <a:rPr sz="1500" b="1">
+                <a:solidFill>
+                  <a:srgbClr val="0E8F8F"/>
+                </a:solidFill>
+                <a:latin typeface="맑은 고딕"/>
+              </a:rPr>
+              <a:t>■ </a:t>
+            </a:r>
+            <a:r>
+              <a:rPr sz="1500" b="1">
+                <a:solidFill>
+                  <a:srgbClr val="B03A2E"/>
+                </a:solidFill>
+                <a:latin typeface="맑은 고딕"/>
+              </a:rPr>
+              <a:t>안 된 것 ① — 돌발 상황에는 유연하지 못했다. 규칙은 미리 정해둔 것만 보므로, 예상 못 한 변경이 오면 사람이 손으로 따라가야 한다</a:t>
+            </a:r>
+          </a:p>
+          <a:p>
+            <a:pPr>
+              <a:spcBef>
+                <a:spcPts val="200"/>
+              </a:spcBef>
+              <a:spcAft>
+                <a:spcPts val="600"/>
+              </a:spcAft>
+            </a:pPr>
+            <a:r>
+              <a:rPr sz="1500" b="1">
+                <a:solidFill>
+                  <a:srgbClr val="0E8F8F"/>
+                </a:solidFill>
+                <a:latin typeface="맑은 고딕"/>
+              </a:rPr>
+              <a:t>■ </a:t>
+            </a:r>
+            <a:r>
+              <a:rPr sz="1500" b="1">
+                <a:solidFill>
+                  <a:srgbClr val="B03A2E"/>
+                </a:solidFill>
+                <a:latin typeface="맑은 고딕"/>
+              </a:rPr>
+              <a:t>안 된 것 ② — 유지 비용이 컸다. 그때마다 등록 경로와 관리 파일을 다시 맞춰야 한다</a:t>
+            </a:r>
+          </a:p>
+          <a:p>
+            <a:pPr>
+              <a:spcBef>
+                <a:spcPts val="200"/>
+              </a:spcBef>
+              <a:spcAft>
+                <a:spcPts val="600"/>
+              </a:spcAft>
+            </a:pPr>
+            <a:r>
+              <a:rPr sz="1500" b="1">
+                <a:solidFill>
+                  <a:srgbClr val="0E8F8F"/>
+                </a:solidFill>
+                <a:latin typeface="맑은 고딕"/>
+              </a:rPr>
+              <a:t>■ </a:t>
+            </a:r>
+            <a:r>
+              <a:rPr sz="1500" b="1">
+                <a:solidFill>
+                  <a:srgbClr val="0E8F8F"/>
+                </a:solidFill>
+                <a:latin typeface="맑은 고딕"/>
+              </a:rPr>
+              <a:t>판단 — 지속 가능한 운영이 어렵다. 그래서 기본 운영 구조를 LLM으로 옮기되, 통제는 놓지 않는다</a:t>
             </a:r>
           </a:p>
           <a:p>
@@ -11205,11 +11808,39 @@
             <a:r>
               <a:rPr sz="1300" b="0">
                 <a:solidFill>
+                  <a:srgbClr val="222730"/>
+                </a:solidFill>
+                <a:latin typeface="맑은 고딕"/>
+              </a:rPr>
+              <a:t>① 같은 효과를 내는 지시(프롬프트·MD)로 주고, ② 과정마다 정해진 형식으로 결과를 받는다</a:t>
+            </a:r>
+          </a:p>
+          <a:p>
+            <a:pPr lvl="1">
+              <a:spcBef>
+                <a:spcPts val="200"/>
+              </a:spcBef>
+              <a:spcAft>
+                <a:spcPts val="600"/>
+              </a:spcAft>
+            </a:pPr>
+            <a:r>
+              <a:rPr sz="1300" b="0">
+                <a:solidFill>
                   <a:srgbClr val="555B66"/>
                 </a:solidFill>
                 <a:latin typeface="맑은 고딕"/>
               </a:rPr>
-              <a:t>“포팅 시간 크게 단축”은 그 방식의 자체 보고 수치 — 우리가 실행·검증한 건 아니다</a:t>
+              <a:t>– </a:t>
+            </a:r>
+            <a:r>
+              <a:rPr sz="1300" b="0">
+                <a:solidFill>
+                  <a:srgbClr val="555B66"/>
+                </a:solidFill>
+                <a:latin typeface="맑은 고딕"/>
+              </a:rPr>
+              <a:t>자유서술로 “했다”고 적게 두지 않는다는 뜻. 결국 하네스 방식이 필요하다는 걸 다시 확인한 셈이다</a:t>
             </a:r>
           </a:p>
           <a:p>
@@ -11224,24 +11855,24 @@
             <a:r>
               <a:rPr sz="1500" b="1">
                 <a:solidFill>
+                  <a:srgbClr val="0E8F8F"/>
+                </a:solidFill>
+                <a:latin typeface="맑은 고딕"/>
+              </a:rPr>
+              <a:t>■ </a:t>
+            </a:r>
+            <a:r>
+              <a:rPr sz="1500" b="1">
+                <a:solidFill>
                   <a:srgbClr val="2E6CB1"/>
                 </a:solidFill>
                 <a:latin typeface="맑은 고딕"/>
               </a:rPr>
-              <a:t>■ </a:t>
-            </a:r>
-            <a:r>
-              <a:rPr sz="1500" b="1">
-                <a:solidFill>
-                  <a:srgbClr val="222730"/>
-                </a:solidFill>
-                <a:latin typeface="맑은 고딕"/>
-              </a:rPr>
-              <a:t>구조 — 변경·수정·테스트·결과 기록을 대부분 LLM이 스스로 수행하고, 그 결과도 스스로 문서에 적는다</a:t>
-            </a:r>
-          </a:p>
-          <a:p>
-            <a:pPr>
+              <a:t>최종 목표 — ①②를 과정 단위로 굳혀 ‘스킬’(정해진 작업 절차)로 만들고, 그걸 묶어 OpenMetadata 운영 하네스 템플릿을 갖추는 것</a:t>
+            </a:r>
+          </a:p>
+          <a:p>
+            <a:pPr lvl="1">
               <a:spcBef>
                 <a:spcPts val="200"/>
               </a:spcBef>
@@ -11250,22 +11881,22 @@
               </a:spcAft>
             </a:pPr>
             <a:r>
-              <a:rPr sz="1500" b="1">
-                <a:solidFill>
-                  <a:srgbClr val="2E6CB1"/>
-                </a:solidFill>
-                <a:latin typeface="맑은 고딕"/>
-              </a:rPr>
-              <a:t>■ </a:t>
-            </a:r>
-            <a:r>
-              <a:rPr sz="1500" b="1">
-                <a:solidFill>
-                  <a:srgbClr val="0E8F8F"/>
-                </a:solidFill>
-                <a:latin typeface="맑은 고딕"/>
-              </a:rPr>
-              <a:t>우리 생각 — 검증이 아니라 방향 제안: 이 접근에 검사기로 ‘각 판단의 근거를 자동으로 뒷받침’하는 층을 더하면 속도(LLM)는 살리고 신뢰(근거)는 끌어올릴 수 있겠다. 경쟁이 아니라 보완</a:t>
+              <a:rPr sz="1300" b="0">
+                <a:solidFill>
+                  <a:srgbClr val="555B66"/>
+                </a:solidFill>
+                <a:latin typeface="맑은 고딕"/>
+              </a:rPr>
+              <a:t>– </a:t>
+            </a:r>
+            <a:r>
+              <a:rPr sz="1300" b="0">
+                <a:solidFill>
+                  <a:srgbClr val="555B66"/>
+                </a:solidFill>
+                <a:latin typeface="맑은 고딕"/>
+              </a:rPr>
+              <a:t>버전업 때마다 새로 짜는 게 아니라 템플릿을 꺼내 쓰는 상태 — 다음 버전에도, 다른 시스템에도 같은 절차가 돈다. 아직 만들지 않았다</a:t>
             </a:r>
           </a:p>
         </p:txBody>
@@ -11416,7 +12047,7 @@
             <a:avLst/>
           </a:prstGeom>
           <a:solidFill>
-            <a:srgbClr val="0E8F8F"/>
+            <a:srgbClr val="2E6CB1"/>
           </a:solidFill>
           <a:ln>
             <a:noFill/>
@@ -11470,11 +12101,11 @@
             <a:r>
               <a:rPr sz="1200" b="1">
                 <a:solidFill>
-                  <a:srgbClr val="0E8F8F"/>
-                </a:solidFill>
-                <a:latin typeface="맑은 고딕"/>
-              </a:rPr>
-              <a:t>방향 전환</a:t>
+                  <a:srgbClr val="2E6CB1"/>
+                </a:solidFill>
+                <a:latin typeface="맑은 고딕"/>
+              </a:rPr>
+              <a:t>참고한 다른 접근</a:t>
             </a:r>
           </a:p>
         </p:txBody>
@@ -11508,7 +12139,7 @@
                 </a:solidFill>
                 <a:latin typeface="맑은 고딕"/>
               </a:rPr>
-              <a:t>LLM이 일하고, 검사기가 근거를 붙인다</a:t>
+              <a:t>8/5 공유된 ‘LLM 기반 운영 방식’ (참고)</a:t>
             </a:r>
           </a:p>
         </p:txBody>
@@ -11546,7 +12177,7 @@
             <a:r>
               <a:rPr sz="1500" b="1">
                 <a:solidFill>
-                  <a:srgbClr val="0E8F8F"/>
+                  <a:srgbClr val="2E6CB1"/>
                 </a:solidFill>
                 <a:latin typeface="맑은 고딕"/>
               </a:rPr>
@@ -11559,7 +12190,35 @@
                 </a:solidFill>
                 <a:latin typeface="맑은 고딕"/>
               </a:rPr>
-              <a:t>LLM — 판단·제안: 무엇을 바꿀지, 코드가 어디로 옮겨졌을지, 충돌 해결, 필요한 테스트</a:t>
+              <a:t>개념 — 규칙·지식 문서·자동화로 LLM이 버전 포팅을 빠르게 수행하는 방식</a:t>
+            </a:r>
+          </a:p>
+          <a:p>
+            <a:pPr lvl="1">
+              <a:spcBef>
+                <a:spcPts val="200"/>
+              </a:spcBef>
+              <a:spcAft>
+                <a:spcPts val="600"/>
+              </a:spcAft>
+            </a:pPr>
+            <a:r>
+              <a:rPr sz="1300" b="0">
+                <a:solidFill>
+                  <a:srgbClr val="555B66"/>
+                </a:solidFill>
+                <a:latin typeface="맑은 고딕"/>
+              </a:rPr>
+              <a:t>– </a:t>
+            </a:r>
+            <a:r>
+              <a:rPr sz="1300" b="0">
+                <a:solidFill>
+                  <a:srgbClr val="555B66"/>
+                </a:solidFill>
+                <a:latin typeface="맑은 고딕"/>
+              </a:rPr>
+              <a:t>“포팅 시간 크게 단축”은 그 방식의 자체 보고 수치 — 우리가 실행·검증한 건 아니다</a:t>
             </a:r>
           </a:p>
           <a:p>
@@ -11574,7 +12233,7 @@
             <a:r>
               <a:rPr sz="1500" b="1">
                 <a:solidFill>
-                  <a:srgbClr val="0E8F8F"/>
+                  <a:srgbClr val="2E6CB1"/>
                 </a:solidFill>
                 <a:latin typeface="맑은 고딕"/>
               </a:rPr>
@@ -11583,11 +12242,11 @@
             <a:r>
               <a:rPr sz="1500" b="1">
                 <a:solidFill>
-                  <a:srgbClr val="0E8F8F"/>
-                </a:solidFill>
-                <a:latin typeface="맑은 고딕"/>
-              </a:rPr>
-              <a:t>검사기 — 뒷받침: 그 판단을 실제 코드·실행 증거로 확인하고, 위험하면 막는다</a:t>
+                  <a:srgbClr val="222730"/>
+                </a:solidFill>
+                <a:latin typeface="맑은 고딕"/>
+              </a:rPr>
+              <a:t>구조 — 변경·수정·테스트·결과 기록을 대부분 LLM이 스스로 수행하고, 그 결과도 스스로 문서에 적는다</a:t>
             </a:r>
           </a:p>
           <a:p>
@@ -11602,160 +12261,20 @@
             <a:r>
               <a:rPr sz="1500" b="1">
                 <a:solidFill>
+                  <a:srgbClr val="2E6CB1"/>
+                </a:solidFill>
+                <a:latin typeface="맑은 고딕"/>
+              </a:rPr>
+              <a:t>■ </a:t>
+            </a:r>
+            <a:r>
+              <a:rPr sz="1500" b="1">
+                <a:solidFill>
                   <a:srgbClr val="0E8F8F"/>
                 </a:solidFill>
                 <a:latin typeface="맑은 고딕"/>
               </a:rPr>
-              <a:t>■ </a:t>
-            </a:r>
-            <a:r>
-              <a:rPr sz="1500" b="1">
-                <a:solidFill>
-                  <a:srgbClr val="222730"/>
-                </a:solidFill>
-                <a:latin typeface="맑은 고딕"/>
-              </a:rPr>
-              <a:t>구체적으로 — LLM의 주장을 검사기가 이렇게 확인한다</a:t>
-            </a:r>
-          </a:p>
-          <a:p>
-            <a:pPr lvl="1">
-              <a:spcBef>
-                <a:spcPts val="200"/>
-              </a:spcBef>
-              <a:spcAft>
-                <a:spcPts val="600"/>
-              </a:spcAft>
-            </a:pPr>
-            <a:r>
-              <a:rPr sz="1300" b="0">
-                <a:solidFill>
-                  <a:srgbClr val="555B66"/>
-                </a:solidFill>
-                <a:latin typeface="맑은 고딕"/>
-              </a:rPr>
-              <a:t>– </a:t>
-            </a:r>
-            <a:r>
-              <a:rPr sz="1300" b="0">
-                <a:solidFill>
-                  <a:srgbClr val="222730"/>
-                </a:solidFill>
-                <a:latin typeface="맑은 고딕"/>
-              </a:rPr>
-              <a:t>“이 파일 바꿨다” → 실제 커밋의 변경 내역을 직접 대조</a:t>
-            </a:r>
-          </a:p>
-          <a:p>
-            <a:pPr lvl="1">
-              <a:spcBef>
-                <a:spcPts val="200"/>
-              </a:spcBef>
-              <a:spcAft>
-                <a:spcPts val="600"/>
-              </a:spcAft>
-            </a:pPr>
-            <a:r>
-              <a:rPr sz="1300" b="0">
-                <a:solidFill>
-                  <a:srgbClr val="555B66"/>
-                </a:solidFill>
-                <a:latin typeface="맑은 고딕"/>
-              </a:rPr>
-              <a:t>– </a:t>
-            </a:r>
-            <a:r>
-              <a:rPr sz="1300" b="0">
-                <a:solidFill>
-                  <a:srgbClr val="222730"/>
-                </a:solidFill>
-                <a:latin typeface="맑은 고딕"/>
-              </a:rPr>
-              <a:t>“충돌 0건” → 임시로 실제 병합해 충돌 수를 센다 (안 해보고 적어도 티가 안 나는 주장)</a:t>
-            </a:r>
-          </a:p>
-          <a:p>
-            <a:pPr lvl="1">
-              <a:spcBef>
-                <a:spcPts val="200"/>
-              </a:spcBef>
-              <a:spcAft>
-                <a:spcPts val="600"/>
-              </a:spcAft>
-            </a:pPr>
-            <a:r>
-              <a:rPr sz="1300" b="0">
-                <a:solidFill>
-                  <a:srgbClr val="555B66"/>
-                </a:solidFill>
-                <a:latin typeface="맑은 고딕"/>
-              </a:rPr>
-              <a:t>– </a:t>
-            </a:r>
-            <a:r>
-              <a:rPr sz="1300" b="0">
-                <a:solidFill>
-                  <a:srgbClr val="222730"/>
-                </a:solidFill>
-                <a:latin typeface="맑은 고딕"/>
-              </a:rPr>
-              <a:t>“테스트 통과” → 실제 서버에서 다시 실행 (미실행은 통과가 아니다)</a:t>
-            </a:r>
-          </a:p>
-          <a:p>
-            <a:pPr lvl="1">
-              <a:spcBef>
-                <a:spcPts val="200"/>
-              </a:spcBef>
-              <a:spcAft>
-                <a:spcPts val="600"/>
-              </a:spcAft>
-            </a:pPr>
-            <a:r>
-              <a:rPr sz="1300" b="0">
-                <a:solidFill>
-                  <a:srgbClr val="555B66"/>
-                </a:solidFill>
-                <a:latin typeface="맑은 고딕"/>
-              </a:rPr>
-              <a:t>– </a:t>
-            </a:r>
-            <a:r>
-              <a:rPr sz="1300" b="0">
-                <a:solidFill>
-                  <a:srgbClr val="222730"/>
-                </a:solidFill>
-                <a:latin typeface="맑은 고딕"/>
-              </a:rPr>
-              <a:t>“승인함” → 승인을 결과에 묶어 입력이 바뀌면 자동 무효</a:t>
-            </a:r>
-          </a:p>
-          <a:p>
-            <a:pPr>
-              <a:spcBef>
-                <a:spcPts val="200"/>
-              </a:spcBef>
-              <a:spcAft>
-                <a:spcPts val="600"/>
-              </a:spcAft>
-            </a:pPr>
-            <a:r>
-              <a:rPr sz="1500" b="1">
-                <a:solidFill>
-                  <a:srgbClr val="0E8F8F"/>
-                </a:solidFill>
-                <a:latin typeface="맑은 고딕"/>
-              </a:rPr>
-              <a:t>■ </a:t>
-            </a:r>
-            <a:r>
-              <a:rPr sz="1500" b="1">
-                <a:solidFill>
-                  <a:srgbClr val="0E8F8F"/>
-                </a:solidFill>
-                <a:latin typeface="맑은 고딕"/>
-              </a:rPr>
-              <a:t>핵심 규칙 — LLM이 ‘됐다’고 적어도 증거가 없으면 ‘미확인’으로 표시한다. 증거 없다고 곧장 ‘거짓’으로 몰지 않는다 → 확인·반박·미확인·사람검토 4단계</a:t>
+              <a:t>우리 생각 — 검증이 아니라 방향 제안: 이 접근에 검사기로 ‘각 판단의 근거를 자동으로 뒷받침’하는 층을 더하면 속도(LLM)는 살리고 신뢰(근거)는 끌어올릴 수 있겠다. 경쟁이 아니라 보완</a:t>
             </a:r>
           </a:p>
         </p:txBody>

--- a/docs/CODEX-05-전략발표.pptx
+++ b/docs/CODEX-05-전략발표.pptx
@@ -8661,7 +8661,7 @@
                 </a:solidFill>
                 <a:latin typeface="맑은 고딕"/>
               </a:rPr>
-              <a:t>① 방식 통제 — 규칙으로 못 박던 것을 지시(프롬프트·MD)로 옮겨 AI가 일하는 방식을 통제 (브랜치·커밋·범위)</a:t>
+              <a:t>① 방식 통제 — 어떻게 일을 하는지를 지시(프롬프트·MD)로 통제한다 (순서·범위·남길 것)</a:t>
             </a:r>
           </a:p>
           <a:p>
@@ -11238,7 +11238,26 @@
                 </a:solidFill>
                 <a:latin typeface="맑은 고딕"/>
               </a:rPr>
-              <a:t>· 한계 — 아무것도 안 보는 테스트는 걸러내지만, 덜 보는 테스트는 못 걸러낸다 (status_code==200만 봐도 통과). 그래서 사람이 읽을 것은 불변식 한 줄</a:t>
+              <a:t>· 한계 — 아무것도 안 보는 테스트는 걸러내지만, 덜 보는 테스트는 못 걸러낸다 (status_code==200만 봐도 통과)</a:t>
+            </a:r>
+          </a:p>
+          <a:p>
+            <a:pPr lvl="2">
+              <a:spcBef>
+                <a:spcPts val="200"/>
+              </a:spcBef>
+              <a:spcAft>
+                <a:spcPts val="600"/>
+              </a:spcAft>
+            </a:pPr>
+            <a:r>
+              <a:rPr sz="1200" b="0">
+                <a:solidFill>
+                  <a:srgbClr val="555B66"/>
+                </a:solidFill>
+                <a:latin typeface="맑은 고딕"/>
+              </a:rPr>
+              <a:t>· 향후 개선 — 돌연변이 테스트: 커스텀을 통째로 빼는 대신 한 줄씩만 바꿔 그때도 테스트가 실패하는지 본다 → ‘덜 보는 테스트’까지 드러난다</a:t>
             </a:r>
           </a:p>
           <a:p>
@@ -11696,11 +11715,11 @@
             <a:r>
               <a:rPr sz="1500" b="1">
                 <a:solidFill>
-                  <a:srgbClr val="2E8B57"/>
-                </a:solidFill>
-                <a:latin typeface="맑은 고딕"/>
-              </a:rPr>
-              <a:t>잘 통한 것 — 정해진 틀 안에서는 잘 통했다 (1.13.0→1.13.1은 충돌 0으로 깔끔히 통과)</a:t>
+                  <a:srgbClr val="B03A2E"/>
+                </a:solidFill>
+                <a:latin typeface="맑은 고딕"/>
+              </a:rPr>
+              <a:t>안 된 것 ① — 돌발 상황에는 유연하지 못했다. 규칙은 미리 정해둔 것만 보므로, 예상 못 한 변경이 오면 사람이 손으로 따라가야 한다</a:t>
             </a:r>
           </a:p>
           <a:p>
@@ -11728,7 +11747,7 @@
                 </a:solidFill>
                 <a:latin typeface="맑은 고딕"/>
               </a:rPr>
-              <a:t>안 된 것 ① — 돌발 상황에는 유연하지 못했다. 규칙은 미리 정해둔 것만 보므로, 예상 못 한 변경이 오면 사람이 손으로 따라가야 한다</a:t>
+              <a:t>안 된 것 ② — 유지 비용이 컸다. 그때마다 등록 경로와 관리 파일을 다시 맞춰야 한다</a:t>
             </a:r>
           </a:p>
           <a:p>
@@ -11752,11 +11771,67 @@
             <a:r>
               <a:rPr sz="1500" b="1">
                 <a:solidFill>
-                  <a:srgbClr val="B03A2E"/>
-                </a:solidFill>
-                <a:latin typeface="맑은 고딕"/>
-              </a:rPr>
-              <a:t>안 된 것 ② — 유지 비용이 컸다. 그때마다 등록 경로와 관리 파일을 다시 맞춰야 한다</a:t>
+                  <a:srgbClr val="2E8B57"/>
+                </a:solidFill>
+                <a:latin typeface="맑은 고딕"/>
+              </a:rPr>
+              <a:t>잘 된 것 — 어려웠던 건 대처와 관리였지 판정이 아니었다. 정해진 형식 안에서 PASS/FAIL을 흔들림 없이 내는 일은 규칙 기반이 해냈다</a:t>
+            </a:r>
+          </a:p>
+          <a:p>
+            <a:pPr lvl="1">
+              <a:spcBef>
+                <a:spcPts val="200"/>
+              </a:spcBef>
+              <a:spcAft>
+                <a:spcPts val="600"/>
+              </a:spcAft>
+            </a:pPr>
+            <a:r>
+              <a:rPr sz="1300" b="0">
+                <a:solidFill>
+                  <a:srgbClr val="555B66"/>
+                </a:solidFill>
+                <a:latin typeface="맑은 고딕"/>
+              </a:rPr>
+              <a:t>– </a:t>
+            </a:r>
+            <a:r>
+              <a:rPr sz="1300" b="0">
+                <a:solidFill>
+                  <a:srgbClr val="555B66"/>
+                </a:solidFill>
+                <a:latin typeface="맑은 고딕"/>
+              </a:rPr>
+              <a:t>그 테스트가 진짜인지 · 안 돌린 걸 통과로 세지 않는지 · 검사한 코드가 그대로인지 · 같은 코드면 같은 판정인지 (7페이지의 강점들)</a:t>
+            </a:r>
+          </a:p>
+          <a:p>
+            <a:pPr lvl="1">
+              <a:spcBef>
+                <a:spcPts val="200"/>
+              </a:spcBef>
+              <a:spcAft>
+                <a:spcPts val="600"/>
+              </a:spcAft>
+            </a:pPr>
+            <a:r>
+              <a:rPr sz="1300" b="0">
+                <a:solidFill>
+                  <a:srgbClr val="555B66"/>
+                </a:solidFill>
+                <a:latin typeface="맑은 고딕"/>
+              </a:rPr>
+              <a:t>– </a:t>
+            </a:r>
+            <a:r>
+              <a:rPr sz="1300" b="0">
+                <a:solidFill>
+                  <a:srgbClr val="222730"/>
+                </a:solidFill>
+                <a:latin typeface="맑은 고딕"/>
+              </a:rPr>
+              <a:t>→ 대처와 관리를 LLM에게 넘겨도 이 판정은 그대로 쓸 수 있다</a:t>
             </a:r>
           </a:p>
           <a:p>
@@ -11788,62 +11863,6 @@
             </a:r>
           </a:p>
           <a:p>
-            <a:pPr lvl="1">
-              <a:spcBef>
-                <a:spcPts val="200"/>
-              </a:spcBef>
-              <a:spcAft>
-                <a:spcPts val="600"/>
-              </a:spcAft>
-            </a:pPr>
-            <a:r>
-              <a:rPr sz="1300" b="0">
-                <a:solidFill>
-                  <a:srgbClr val="555B66"/>
-                </a:solidFill>
-                <a:latin typeface="맑은 고딕"/>
-              </a:rPr>
-              <a:t>– </a:t>
-            </a:r>
-            <a:r>
-              <a:rPr sz="1300" b="0">
-                <a:solidFill>
-                  <a:srgbClr val="222730"/>
-                </a:solidFill>
-                <a:latin typeface="맑은 고딕"/>
-              </a:rPr>
-              <a:t>① 같은 효과를 내는 지시(프롬프트·MD)로 주고, ② 과정마다 정해진 형식으로 결과를 받는다</a:t>
-            </a:r>
-          </a:p>
-          <a:p>
-            <a:pPr lvl="1">
-              <a:spcBef>
-                <a:spcPts val="200"/>
-              </a:spcBef>
-              <a:spcAft>
-                <a:spcPts val="600"/>
-              </a:spcAft>
-            </a:pPr>
-            <a:r>
-              <a:rPr sz="1300" b="0">
-                <a:solidFill>
-                  <a:srgbClr val="555B66"/>
-                </a:solidFill>
-                <a:latin typeface="맑은 고딕"/>
-              </a:rPr>
-              <a:t>– </a:t>
-            </a:r>
-            <a:r>
-              <a:rPr sz="1300" b="0">
-                <a:solidFill>
-                  <a:srgbClr val="555B66"/>
-                </a:solidFill>
-                <a:latin typeface="맑은 고딕"/>
-              </a:rPr>
-              <a:t>자유서술로 “했다”고 적게 두지 않는다는 뜻. 결국 하네스 방식이 필요하다는 걸 다시 확인한 셈이다</a:t>
-            </a:r>
-          </a:p>
-          <a:p>
             <a:pPr>
               <a:spcBef>
                 <a:spcPts val="200"/>
@@ -11864,15 +11883,15 @@
             <a:r>
               <a:rPr sz="1500" b="1">
                 <a:solidFill>
-                  <a:srgbClr val="2E6CB1"/>
-                </a:solidFill>
-                <a:latin typeface="맑은 고딕"/>
-              </a:rPr>
-              <a:t>최종 목표 — ①②를 과정 단위로 굳혀 ‘스킬’(정해진 작업 절차)로 만들고, 그걸 묶어 OpenMetadata 운영 하네스 템플릿을 갖추는 것</a:t>
-            </a:r>
-          </a:p>
-          <a:p>
-            <a:pPr lvl="1">
+                  <a:srgbClr val="0E8F8F"/>
+                </a:solidFill>
+                <a:latin typeface="맑은 고딕"/>
+              </a:rPr>
+              <a:t>① 방식 통제 — 어떻게 일을 하는지를 지시(프롬프트·MD)로 통제한다 (순서·범위·남길 것)</a:t>
+            </a:r>
+          </a:p>
+          <a:p>
+            <a:pPr>
               <a:spcBef>
                 <a:spcPts val="200"/>
               </a:spcBef>
@@ -11881,22 +11900,50 @@
               </a:spcAft>
             </a:pPr>
             <a:r>
-              <a:rPr sz="1300" b="0">
-                <a:solidFill>
-                  <a:srgbClr val="555B66"/>
-                </a:solidFill>
-                <a:latin typeface="맑은 고딕"/>
-              </a:rPr>
-              <a:t>– </a:t>
-            </a:r>
-            <a:r>
-              <a:rPr sz="1300" b="0">
-                <a:solidFill>
-                  <a:srgbClr val="555B66"/>
-                </a:solidFill>
-                <a:latin typeface="맑은 고딕"/>
-              </a:rPr>
-              <a:t>버전업 때마다 새로 짜는 게 아니라 템플릿을 꺼내 쓰는 상태 — 다음 버전에도, 다른 시스템에도 같은 절차가 돈다. 아직 만들지 않았다</a:t>
+              <a:rPr sz="1500" b="1">
+                <a:solidFill>
+                  <a:srgbClr val="0E8F8F"/>
+                </a:solidFill>
+                <a:latin typeface="맑은 고딕"/>
+              </a:rPr>
+              <a:t>■ </a:t>
+            </a:r>
+            <a:r>
+              <a:rPr sz="1500" b="1">
+                <a:solidFill>
+                  <a:srgbClr val="2E8B57"/>
+                </a:solidFill>
+                <a:latin typeface="맑은 고딕"/>
+              </a:rPr>
+              <a:t>② 결과 통제 — 과정마다 정해진 형식으로 결과를 뱉게 강제 → 검사기가 판정. 자유서술로 “했다”고 적게 두지 않는다</a:t>
+            </a:r>
+          </a:p>
+          <a:p>
+            <a:pPr>
+              <a:spcBef>
+                <a:spcPts val="200"/>
+              </a:spcBef>
+              <a:spcAft>
+                <a:spcPts val="600"/>
+              </a:spcAft>
+            </a:pPr>
+            <a:r>
+              <a:rPr sz="1500" b="1">
+                <a:solidFill>
+                  <a:srgbClr val="0E8F8F"/>
+                </a:solidFill>
+                <a:latin typeface="맑은 고딕"/>
+              </a:rPr>
+              <a:t>■ </a:t>
+            </a:r>
+            <a:r>
+              <a:rPr sz="1500" b="1">
+                <a:solidFill>
+                  <a:srgbClr val="2E6CB1"/>
+                </a:solidFill>
+                <a:latin typeface="맑은 고딕"/>
+              </a:rPr>
+              <a:t>③ 최종 목표 — ①②를 ‘스킬’(정해진 작업 절차)로 굳혀 OpenMetadata 운영 하네스 템플릿을 갖추는 것 (아직 만들지 않았다)</a:t>
             </a:r>
           </a:p>
         </p:txBody>

--- a/docs/CODEX-05-전략발표.pptx
+++ b/docs/CODEX-05-전략발표.pptx
@@ -3302,986 +3302,6 @@
 </file>
 
 <file path=ppt/slides/slide10.xml><?xml version="1.0" encoding="utf-8"?>
-<p:sld xmlns:a="http://schemas.openxmlformats.org/drawingml/2006/main" xmlns:p="http://schemas.openxmlformats.org/presentationml/2006/main" xmlns:r="http://schemas.openxmlformats.org/officeDocument/2006/relationships">
-  <p:cSld>
-    <p:spTree>
-      <p:nvGrpSpPr>
-        <p:cNvPr id="1" name=""/>
-        <p:cNvGrpSpPr/>
-        <p:nvPr/>
-      </p:nvGrpSpPr>
-      <p:grpSpPr/>
-      <p:sp>
-        <p:nvSpPr>
-          <p:cNvPr id="2" name="Rectangle 1"/>
-          <p:cNvSpPr/>
-          <p:nvPr/>
-        </p:nvSpPr>
-        <p:spPr>
-          <a:xfrm>
-            <a:off x="0" y="0"/>
-            <a:ext cx="12191695" cy="1051560"/>
-          </a:xfrm>
-          <a:prstGeom prst="rect">
-            <a:avLst/>
-          </a:prstGeom>
-          <a:solidFill>
-            <a:srgbClr val="1F2A44"/>
-          </a:solidFill>
-          <a:ln>
-            <a:noFill/>
-          </a:ln>
-          <a:effectLst/>
-        </p:spPr>
-        <p:style>
-          <a:lnRef idx="1">
-            <a:schemeClr val="accent1"/>
-          </a:lnRef>
-          <a:fillRef idx="3">
-            <a:schemeClr val="accent1"/>
-          </a:fillRef>
-          <a:effectRef idx="2">
-            <a:schemeClr val="accent1"/>
-          </a:effectRef>
-          <a:fontRef idx="minor">
-            <a:schemeClr val="lt1"/>
-          </a:fontRef>
-        </p:style>
-        <p:txBody>
-          <a:bodyPr rtlCol="0" anchor="ctr"/>
-          <a:lstStyle/>
-          <a:p>
-            <a:pPr algn="ctr"/>
-          </a:p>
-        </p:txBody>
-      </p:sp>
-      <p:sp>
-        <p:nvSpPr>
-          <p:cNvPr id="3" name="Rectangle 2"/>
-          <p:cNvSpPr/>
-          <p:nvPr/>
-        </p:nvSpPr>
-        <p:spPr>
-          <a:xfrm>
-            <a:off x="0" y="1051560"/>
-            <a:ext cx="12191695" cy="54864"/>
-          </a:xfrm>
-          <a:prstGeom prst="rect">
-            <a:avLst/>
-          </a:prstGeom>
-          <a:solidFill>
-            <a:srgbClr val="0E8F8F"/>
-          </a:solidFill>
-          <a:ln>
-            <a:noFill/>
-          </a:ln>
-          <a:effectLst/>
-        </p:spPr>
-        <p:style>
-          <a:lnRef idx="1">
-            <a:schemeClr val="accent1"/>
-          </a:lnRef>
-          <a:fillRef idx="3">
-            <a:schemeClr val="accent1"/>
-          </a:fillRef>
-          <a:effectRef idx="2">
-            <a:schemeClr val="accent1"/>
-          </a:effectRef>
-          <a:fontRef idx="minor">
-            <a:schemeClr val="lt1"/>
-          </a:fontRef>
-        </p:style>
-        <p:txBody>
-          <a:bodyPr rtlCol="0" anchor="ctr"/>
-          <a:lstStyle/>
-          <a:p>
-            <a:pPr algn="ctr"/>
-          </a:p>
-        </p:txBody>
-      </p:sp>
-      <p:sp>
-        <p:nvSpPr>
-          <p:cNvPr id="4" name="TextBox 3"/>
-          <p:cNvSpPr txBox="1"/>
-          <p:nvPr/>
-        </p:nvSpPr>
-        <p:spPr>
-          <a:xfrm>
-            <a:off x="457200" y="164592"/>
-            <a:ext cx="11155680" cy="320040"/>
-          </a:xfrm>
-          <a:prstGeom prst="rect">
-            <a:avLst/>
-          </a:prstGeom>
-          <a:noFill/>
-        </p:spPr>
-        <p:txBody>
-          <a:bodyPr wrap="square">
-            <a:spAutoFit/>
-          </a:bodyPr>
-          <a:lstStyle/>
-          <a:p>
-            <a:r>
-              <a:rPr sz="1200" b="1">
-                <a:solidFill>
-                  <a:srgbClr val="0E8F8F"/>
-                </a:solidFill>
-                <a:latin typeface="맑은 고딕"/>
-              </a:rPr>
-              <a:t>방향 전환</a:t>
-            </a:r>
-          </a:p>
-        </p:txBody>
-      </p:sp>
-      <p:sp>
-        <p:nvSpPr>
-          <p:cNvPr id="5" name="TextBox 4"/>
-          <p:cNvSpPr txBox="1"/>
-          <p:nvPr/>
-        </p:nvSpPr>
-        <p:spPr>
-          <a:xfrm>
-            <a:off x="457200" y="457200"/>
-            <a:ext cx="11247120" cy="566928"/>
-          </a:xfrm>
-          <a:prstGeom prst="rect">
-            <a:avLst/>
-          </a:prstGeom>
-          <a:noFill/>
-        </p:spPr>
-        <p:txBody>
-          <a:bodyPr wrap="square">
-            <a:spAutoFit/>
-          </a:bodyPr>
-          <a:lstStyle/>
-          <a:p>
-            <a:r>
-              <a:rPr sz="2500" b="1">
-                <a:solidFill>
-                  <a:srgbClr val="FFFFFF"/>
-                </a:solidFill>
-                <a:latin typeface="맑은 고딕"/>
-              </a:rPr>
-              <a:t>LLM이 일하고, 검사기가 근거를 붙인다</a:t>
-            </a:r>
-          </a:p>
-        </p:txBody>
-      </p:sp>
-      <p:sp>
-        <p:nvSpPr>
-          <p:cNvPr id="6" name="TextBox 5"/>
-          <p:cNvSpPr txBox="1"/>
-          <p:nvPr/>
-        </p:nvSpPr>
-        <p:spPr>
-          <a:xfrm>
-            <a:off x="548640" y="1325880"/>
-            <a:ext cx="11064240" cy="4937760"/>
-          </a:xfrm>
-          <a:prstGeom prst="rect">
-            <a:avLst/>
-          </a:prstGeom>
-          <a:noFill/>
-        </p:spPr>
-        <p:txBody>
-          <a:bodyPr wrap="square">
-            <a:spAutoFit/>
-          </a:bodyPr>
-          <a:lstStyle/>
-          <a:p>
-            <a:pPr>
-              <a:spcBef>
-                <a:spcPts val="200"/>
-              </a:spcBef>
-              <a:spcAft>
-                <a:spcPts val="600"/>
-              </a:spcAft>
-            </a:pPr>
-            <a:r>
-              <a:rPr sz="1500" b="1">
-                <a:solidFill>
-                  <a:srgbClr val="0E8F8F"/>
-                </a:solidFill>
-                <a:latin typeface="맑은 고딕"/>
-              </a:rPr>
-              <a:t>■ </a:t>
-            </a:r>
-            <a:r>
-              <a:rPr sz="1500" b="1">
-                <a:solidFill>
-                  <a:srgbClr val="2E6CB1"/>
-                </a:solidFill>
-                <a:latin typeface="맑은 고딕"/>
-              </a:rPr>
-              <a:t>LLM — 판단·제안: 무엇을 바꿀지, 코드가 어디로 옮겨졌을지, 충돌 해결, 필요한 테스트</a:t>
-            </a:r>
-          </a:p>
-          <a:p>
-            <a:pPr>
-              <a:spcBef>
-                <a:spcPts val="200"/>
-              </a:spcBef>
-              <a:spcAft>
-                <a:spcPts val="600"/>
-              </a:spcAft>
-            </a:pPr>
-            <a:r>
-              <a:rPr sz="1500" b="1">
-                <a:solidFill>
-                  <a:srgbClr val="0E8F8F"/>
-                </a:solidFill>
-                <a:latin typeface="맑은 고딕"/>
-              </a:rPr>
-              <a:t>■ </a:t>
-            </a:r>
-            <a:r>
-              <a:rPr sz="1500" b="1">
-                <a:solidFill>
-                  <a:srgbClr val="0E8F8F"/>
-                </a:solidFill>
-                <a:latin typeface="맑은 고딕"/>
-              </a:rPr>
-              <a:t>검사기 — 뒷받침: 그 판단을 실제 코드·실행 증거로 확인하고, 위험하면 막는다</a:t>
-            </a:r>
-          </a:p>
-          <a:p>
-            <a:pPr>
-              <a:spcBef>
-                <a:spcPts val="200"/>
-              </a:spcBef>
-              <a:spcAft>
-                <a:spcPts val="600"/>
-              </a:spcAft>
-            </a:pPr>
-            <a:r>
-              <a:rPr sz="1500" b="1">
-                <a:solidFill>
-                  <a:srgbClr val="0E8F8F"/>
-                </a:solidFill>
-                <a:latin typeface="맑은 고딕"/>
-              </a:rPr>
-              <a:t>■ </a:t>
-            </a:r>
-            <a:r>
-              <a:rPr sz="1500" b="1">
-                <a:solidFill>
-                  <a:srgbClr val="222730"/>
-                </a:solidFill>
-                <a:latin typeface="맑은 고딕"/>
-              </a:rPr>
-              <a:t>구체적으로 — LLM의 주장을 검사기가 이렇게 확인한다</a:t>
-            </a:r>
-          </a:p>
-          <a:p>
-            <a:pPr lvl="1">
-              <a:spcBef>
-                <a:spcPts val="200"/>
-              </a:spcBef>
-              <a:spcAft>
-                <a:spcPts val="600"/>
-              </a:spcAft>
-            </a:pPr>
-            <a:r>
-              <a:rPr sz="1300" b="0">
-                <a:solidFill>
-                  <a:srgbClr val="555B66"/>
-                </a:solidFill>
-                <a:latin typeface="맑은 고딕"/>
-              </a:rPr>
-              <a:t>– </a:t>
-            </a:r>
-            <a:r>
-              <a:rPr sz="1300" b="0">
-                <a:solidFill>
-                  <a:srgbClr val="222730"/>
-                </a:solidFill>
-                <a:latin typeface="맑은 고딕"/>
-              </a:rPr>
-              <a:t>“이 파일 바꿨다” → 실제 커밋의 변경 내역을 직접 대조</a:t>
-            </a:r>
-          </a:p>
-          <a:p>
-            <a:pPr lvl="1">
-              <a:spcBef>
-                <a:spcPts val="200"/>
-              </a:spcBef>
-              <a:spcAft>
-                <a:spcPts val="600"/>
-              </a:spcAft>
-            </a:pPr>
-            <a:r>
-              <a:rPr sz="1300" b="0">
-                <a:solidFill>
-                  <a:srgbClr val="555B66"/>
-                </a:solidFill>
-                <a:latin typeface="맑은 고딕"/>
-              </a:rPr>
-              <a:t>– </a:t>
-            </a:r>
-            <a:r>
-              <a:rPr sz="1300" b="0">
-                <a:solidFill>
-                  <a:srgbClr val="222730"/>
-                </a:solidFill>
-                <a:latin typeface="맑은 고딕"/>
-              </a:rPr>
-              <a:t>“충돌 0건” → 임시로 실제 병합해 충돌 수를 센다 (안 해보고 적어도 티가 안 나는 주장)</a:t>
-            </a:r>
-          </a:p>
-          <a:p>
-            <a:pPr lvl="1">
-              <a:spcBef>
-                <a:spcPts val="200"/>
-              </a:spcBef>
-              <a:spcAft>
-                <a:spcPts val="600"/>
-              </a:spcAft>
-            </a:pPr>
-            <a:r>
-              <a:rPr sz="1300" b="0">
-                <a:solidFill>
-                  <a:srgbClr val="555B66"/>
-                </a:solidFill>
-                <a:latin typeface="맑은 고딕"/>
-              </a:rPr>
-              <a:t>– </a:t>
-            </a:r>
-            <a:r>
-              <a:rPr sz="1300" b="0">
-                <a:solidFill>
-                  <a:srgbClr val="222730"/>
-                </a:solidFill>
-                <a:latin typeface="맑은 고딕"/>
-              </a:rPr>
-              <a:t>“테스트 통과” → 실제 서버에서 다시 실행 (미실행은 통과가 아니다)</a:t>
-            </a:r>
-          </a:p>
-          <a:p>
-            <a:pPr lvl="1">
-              <a:spcBef>
-                <a:spcPts val="200"/>
-              </a:spcBef>
-              <a:spcAft>
-                <a:spcPts val="600"/>
-              </a:spcAft>
-            </a:pPr>
-            <a:r>
-              <a:rPr sz="1300" b="0">
-                <a:solidFill>
-                  <a:srgbClr val="555B66"/>
-                </a:solidFill>
-                <a:latin typeface="맑은 고딕"/>
-              </a:rPr>
-              <a:t>– </a:t>
-            </a:r>
-            <a:r>
-              <a:rPr sz="1300" b="0">
-                <a:solidFill>
-                  <a:srgbClr val="222730"/>
-                </a:solidFill>
-                <a:latin typeface="맑은 고딕"/>
-              </a:rPr>
-              <a:t>“승인함” → 승인을 결과에 묶어 입력이 바뀌면 자동 무효</a:t>
-            </a:r>
-          </a:p>
-          <a:p>
-            <a:pPr>
-              <a:spcBef>
-                <a:spcPts val="200"/>
-              </a:spcBef>
-              <a:spcAft>
-                <a:spcPts val="600"/>
-              </a:spcAft>
-            </a:pPr>
-            <a:r>
-              <a:rPr sz="1500" b="1">
-                <a:solidFill>
-                  <a:srgbClr val="0E8F8F"/>
-                </a:solidFill>
-                <a:latin typeface="맑은 고딕"/>
-              </a:rPr>
-              <a:t>■ </a:t>
-            </a:r>
-            <a:r>
-              <a:rPr sz="1500" b="1">
-                <a:solidFill>
-                  <a:srgbClr val="0E8F8F"/>
-                </a:solidFill>
-                <a:latin typeface="맑은 고딕"/>
-              </a:rPr>
-              <a:t>핵심 규칙 — LLM이 ‘됐다’고 적어도 증거가 없으면 ‘미확인’으로 표시한다. 증거 없다고 곧장 ‘거짓’으로 몰지 않는다 → 확인·반박·미확인·사람검토 4단계</a:t>
-            </a:r>
-          </a:p>
-        </p:txBody>
-      </p:sp>
-      <p:sp>
-        <p:nvSpPr>
-          <p:cNvPr id="7" name="TextBox 6"/>
-          <p:cNvSpPr txBox="1"/>
-          <p:nvPr/>
-        </p:nvSpPr>
-        <p:spPr>
-          <a:xfrm>
-            <a:off x="365760" y="6455664"/>
-            <a:ext cx="9144000" cy="301752"/>
-          </a:xfrm>
-          <a:prstGeom prst="rect">
-            <a:avLst/>
-          </a:prstGeom>
-          <a:noFill/>
-        </p:spPr>
-        <p:txBody>
-          <a:bodyPr wrap="square">
-            <a:spAutoFit/>
-          </a:bodyPr>
-          <a:lstStyle/>
-          <a:p>
-            <a:r>
-              <a:rPr sz="900" b="0">
-                <a:solidFill>
-                  <a:srgbClr val="555B66"/>
-                </a:solidFill>
-                <a:latin typeface="맑은 고딕"/>
-              </a:rPr>
-              <a:t>OpenMetadata 커스텀 버전업 검증 전략 · CODEX-05(정본) 기반</a:t>
-            </a:r>
-          </a:p>
-        </p:txBody>
-      </p:sp>
-      <p:sp>
-        <p:nvSpPr>
-          <p:cNvPr id="8" name="TextBox 7"/>
-          <p:cNvSpPr txBox="1"/>
-          <p:nvPr/>
-        </p:nvSpPr>
-        <p:spPr>
-          <a:xfrm>
-            <a:off x="11338560" y="6455664"/>
-            <a:ext cx="640080" cy="301752"/>
-          </a:xfrm>
-          <a:prstGeom prst="rect">
-            <a:avLst/>
-          </a:prstGeom>
-          <a:noFill/>
-        </p:spPr>
-        <p:txBody>
-          <a:bodyPr wrap="square">
-            <a:spAutoFit/>
-          </a:bodyPr>
-          <a:lstStyle/>
-          <a:p>
-            <a:pPr algn="r"/>
-            <a:r>
-              <a:rPr sz="900" b="0">
-                <a:solidFill>
-                  <a:srgbClr val="555B66"/>
-                </a:solidFill>
-                <a:latin typeface="맑은 고딕"/>
-              </a:rPr>
-              <a:t>10</a:t>
-            </a:r>
-          </a:p>
-        </p:txBody>
-      </p:sp>
-    </p:spTree>
-  </p:cSld>
-  <p:clrMapOvr>
-    <a:masterClrMapping/>
-  </p:clrMapOvr>
-</p:sld>
-</file>
-
-<file path=ppt/slides/slide11.xml><?xml version="1.0" encoding="utf-8"?>
-<p:sld xmlns:a="http://schemas.openxmlformats.org/drawingml/2006/main" xmlns:p="http://schemas.openxmlformats.org/presentationml/2006/main" xmlns:r="http://schemas.openxmlformats.org/officeDocument/2006/relationships">
-  <p:cSld>
-    <p:spTree>
-      <p:nvGrpSpPr>
-        <p:cNvPr id="1" name=""/>
-        <p:cNvGrpSpPr/>
-        <p:nvPr/>
-      </p:nvGrpSpPr>
-      <p:grpSpPr/>
-      <p:sp>
-        <p:nvSpPr>
-          <p:cNvPr id="2" name="Rectangle 1"/>
-          <p:cNvSpPr/>
-          <p:nvPr/>
-        </p:nvSpPr>
-        <p:spPr>
-          <a:xfrm>
-            <a:off x="0" y="0"/>
-            <a:ext cx="12191695" cy="1051560"/>
-          </a:xfrm>
-          <a:prstGeom prst="rect">
-            <a:avLst/>
-          </a:prstGeom>
-          <a:solidFill>
-            <a:srgbClr val="1F2A44"/>
-          </a:solidFill>
-          <a:ln>
-            <a:noFill/>
-          </a:ln>
-          <a:effectLst/>
-        </p:spPr>
-        <p:style>
-          <a:lnRef idx="1">
-            <a:schemeClr val="accent1"/>
-          </a:lnRef>
-          <a:fillRef idx="3">
-            <a:schemeClr val="accent1"/>
-          </a:fillRef>
-          <a:effectRef idx="2">
-            <a:schemeClr val="accent1"/>
-          </a:effectRef>
-          <a:fontRef idx="minor">
-            <a:schemeClr val="lt1"/>
-          </a:fontRef>
-        </p:style>
-        <p:txBody>
-          <a:bodyPr rtlCol="0" anchor="ctr"/>
-          <a:lstStyle/>
-          <a:p>
-            <a:pPr algn="ctr"/>
-          </a:p>
-        </p:txBody>
-      </p:sp>
-      <p:sp>
-        <p:nvSpPr>
-          <p:cNvPr id="3" name="Rectangle 2"/>
-          <p:cNvSpPr/>
-          <p:nvPr/>
-        </p:nvSpPr>
-        <p:spPr>
-          <a:xfrm>
-            <a:off x="0" y="1051560"/>
-            <a:ext cx="12191695" cy="54864"/>
-          </a:xfrm>
-          <a:prstGeom prst="rect">
-            <a:avLst/>
-          </a:prstGeom>
-          <a:solidFill>
-            <a:srgbClr val="0E8F8F"/>
-          </a:solidFill>
-          <a:ln>
-            <a:noFill/>
-          </a:ln>
-          <a:effectLst/>
-        </p:spPr>
-        <p:style>
-          <a:lnRef idx="1">
-            <a:schemeClr val="accent1"/>
-          </a:lnRef>
-          <a:fillRef idx="3">
-            <a:schemeClr val="accent1"/>
-          </a:fillRef>
-          <a:effectRef idx="2">
-            <a:schemeClr val="accent1"/>
-          </a:effectRef>
-          <a:fontRef idx="minor">
-            <a:schemeClr val="lt1"/>
-          </a:fontRef>
-        </p:style>
-        <p:txBody>
-          <a:bodyPr rtlCol="0" anchor="ctr"/>
-          <a:lstStyle/>
-          <a:p>
-            <a:pPr algn="ctr"/>
-          </a:p>
-        </p:txBody>
-      </p:sp>
-      <p:sp>
-        <p:nvSpPr>
-          <p:cNvPr id="4" name="TextBox 3"/>
-          <p:cNvSpPr txBox="1"/>
-          <p:nvPr/>
-        </p:nvSpPr>
-        <p:spPr>
-          <a:xfrm>
-            <a:off x="457200" y="164592"/>
-            <a:ext cx="11155680" cy="320040"/>
-          </a:xfrm>
-          <a:prstGeom prst="rect">
-            <a:avLst/>
-          </a:prstGeom>
-          <a:noFill/>
-        </p:spPr>
-        <p:txBody>
-          <a:bodyPr wrap="square">
-            <a:spAutoFit/>
-          </a:bodyPr>
-          <a:lstStyle/>
-          <a:p>
-            <a:r>
-              <a:rPr sz="1200" b="1">
-                <a:solidFill>
-                  <a:srgbClr val="0E8F8F"/>
-                </a:solidFill>
-                <a:latin typeface="맑은 고딕"/>
-              </a:rPr>
-              <a:t>도입 제안 ① — 검증되는 과정</a:t>
-            </a:r>
-          </a:p>
-        </p:txBody>
-      </p:sp>
-      <p:sp>
-        <p:nvSpPr>
-          <p:cNvPr id="5" name="TextBox 4"/>
-          <p:cNvSpPr txBox="1"/>
-          <p:nvPr/>
-        </p:nvSpPr>
-        <p:spPr>
-          <a:xfrm>
-            <a:off x="457200" y="457200"/>
-            <a:ext cx="11247120" cy="566928"/>
-          </a:xfrm>
-          <a:prstGeom prst="rect">
-            <a:avLst/>
-          </a:prstGeom>
-          <a:noFill/>
-        </p:spPr>
-        <p:txBody>
-          <a:bodyPr wrap="square">
-            <a:spAutoFit/>
-          </a:bodyPr>
-          <a:lstStyle/>
-          <a:p>
-            <a:r>
-              <a:rPr sz="2500" b="1">
-                <a:solidFill>
-                  <a:srgbClr val="FFFFFF"/>
-                </a:solidFill>
-                <a:latin typeface="맑은 고딕"/>
-              </a:rPr>
-              <a:t>커스텀 하나(BANK-OM ID)가 검증되는 과정</a:t>
-            </a:r>
-          </a:p>
-        </p:txBody>
-      </p:sp>
-      <p:sp>
-        <p:nvSpPr>
-          <p:cNvPr id="6" name="TextBox 5"/>
-          <p:cNvSpPr txBox="1"/>
-          <p:nvPr/>
-        </p:nvSpPr>
-        <p:spPr>
-          <a:xfrm>
-            <a:off x="548640" y="1325880"/>
-            <a:ext cx="11064240" cy="4937760"/>
-          </a:xfrm>
-          <a:prstGeom prst="rect">
-            <a:avLst/>
-          </a:prstGeom>
-          <a:noFill/>
-        </p:spPr>
-        <p:txBody>
-          <a:bodyPr wrap="square">
-            <a:spAutoFit/>
-          </a:bodyPr>
-          <a:lstStyle/>
-          <a:p>
-            <a:pPr>
-              <a:spcBef>
-                <a:spcPts val="200"/>
-              </a:spcBef>
-              <a:spcAft>
-                <a:spcPts val="600"/>
-              </a:spcAft>
-            </a:pPr>
-            <a:r>
-              <a:rPr sz="1500" b="1">
-                <a:solidFill>
-                  <a:srgbClr val="0E8F8F"/>
-                </a:solidFill>
-                <a:latin typeface="맑은 고딕"/>
-              </a:rPr>
-              <a:t>■ </a:t>
-            </a:r>
-            <a:r>
-              <a:rPr sz="1500" b="1">
-                <a:solidFill>
-                  <a:srgbClr val="0E8F8F"/>
-                </a:solidFill>
-                <a:latin typeface="맑은 고딕"/>
-              </a:rPr>
-              <a:t>제안 — 하이브리드에서 LLM 작업의 ‘증거 층’으로 이 검사기를 도입한다 (자랑이 아니라 도입 대상)</a:t>
-            </a:r>
-          </a:p>
-          <a:p>
-            <a:pPr lvl="1">
-              <a:spcBef>
-                <a:spcPts val="200"/>
-              </a:spcBef>
-              <a:spcAft>
-                <a:spcPts val="600"/>
-              </a:spcAft>
-            </a:pPr>
-            <a:r>
-              <a:rPr sz="1300" b="0">
-                <a:solidFill>
-                  <a:srgbClr val="555B66"/>
-                </a:solidFill>
-                <a:latin typeface="맑은 고딕"/>
-              </a:rPr>
-              <a:t>– </a:t>
-            </a:r>
-            <a:r>
-              <a:rPr sz="1300" b="0">
-                <a:solidFill>
-                  <a:srgbClr val="222730"/>
-                </a:solidFill>
-                <a:latin typeface="맑은 고딕"/>
-              </a:rPr>
-              <a:t>① 등록 — Manifest·Registry·Contract. 무엇을·어디를 바꿨고 어떤 검사로 지킬지 선언</a:t>
-            </a:r>
-          </a:p>
-          <a:p>
-            <a:pPr lvl="1">
-              <a:spcBef>
-                <a:spcPts val="200"/>
-              </a:spcBef>
-              <a:spcAft>
-                <a:spcPts val="600"/>
-              </a:spcAft>
-            </a:pPr>
-            <a:r>
-              <a:rPr sz="1300" b="0">
-                <a:solidFill>
-                  <a:srgbClr val="555B66"/>
-                </a:solidFill>
-                <a:latin typeface="맑은 고딕"/>
-              </a:rPr>
-              <a:t>– </a:t>
-            </a:r>
-            <a:r>
-              <a:rPr sz="1300" b="0">
-                <a:solidFill>
-                  <a:srgbClr val="222730"/>
-                </a:solidFill>
-                <a:latin typeface="맑은 고딕"/>
-              </a:rPr>
-              <a:t>② 커밋·변경범위 검사 — 선언한 범위만 건드렸는지, 공식 계보 위에 얹혔는지</a:t>
-            </a:r>
-          </a:p>
-          <a:p>
-            <a:pPr lvl="1">
-              <a:spcBef>
-                <a:spcPts val="200"/>
-              </a:spcBef>
-              <a:spcAft>
-                <a:spcPts val="600"/>
-              </a:spcAft>
-            </a:pPr>
-            <a:r>
-              <a:rPr sz="1300" b="0">
-                <a:solidFill>
-                  <a:srgbClr val="555B66"/>
-                </a:solidFill>
-                <a:latin typeface="맑은 고딕"/>
-              </a:rPr>
-              <a:t>– </a:t>
-            </a:r>
-            <a:r>
-              <a:rPr sz="1300" b="0">
-                <a:solidFill>
-                  <a:srgbClr val="222730"/>
-                </a:solidFill>
-                <a:latin typeface="맑은 고딕"/>
-              </a:rPr>
-              <a:t>③ 공용 파일의 ID별 코드 검사 — 공유 파일에서 이 ID 몫의 코드가 살아있는지</a:t>
-            </a:r>
-          </a:p>
-          <a:p>
-            <a:pPr lvl="1">
-              <a:spcBef>
-                <a:spcPts val="200"/>
-              </a:spcBef>
-              <a:spcAft>
-                <a:spcPts val="600"/>
-              </a:spcAft>
-            </a:pPr>
-            <a:r>
-              <a:rPr sz="1300" b="0">
-                <a:solidFill>
-                  <a:srgbClr val="555B66"/>
-                </a:solidFill>
-                <a:latin typeface="맑은 고딕"/>
-              </a:rPr>
-              <a:t>– </a:t>
-            </a:r>
-            <a:r>
-              <a:rPr sz="1300" b="0">
-                <a:solidFill>
-                  <a:srgbClr val="222730"/>
-                </a:solidFill>
-                <a:latin typeface="맑은 고딕"/>
-              </a:rPr>
-              <a:t>④ 전용 검사 실행 — 이 기능만의 검사(API/화면/소스). 속 빈 테스트면 patch-kill로 걸러낸다</a:t>
-            </a:r>
-          </a:p>
-          <a:p>
-            <a:pPr lvl="1">
-              <a:spcBef>
-                <a:spcPts val="200"/>
-              </a:spcBef>
-              <a:spcAft>
-                <a:spcPts val="600"/>
-              </a:spcAft>
-            </a:pPr>
-            <a:r>
-              <a:rPr sz="1300" b="0">
-                <a:solidFill>
-                  <a:srgbClr val="555B66"/>
-                </a:solidFill>
-                <a:latin typeface="맑은 고딕"/>
-              </a:rPr>
-              <a:t>– </a:t>
-            </a:r>
-            <a:r>
-              <a:rPr sz="1300" b="0">
-                <a:solidFill>
-                  <a:srgbClr val="222730"/>
-                </a:solidFill>
-                <a:latin typeface="맑은 고딕"/>
-              </a:rPr>
-              <a:t>⑤ commit·이미지와 결과 결속 — 바꿔치기·사후수정을 감지</a:t>
-            </a:r>
-          </a:p>
-          <a:p>
-            <a:pPr lvl="1">
-              <a:spcBef>
-                <a:spcPts val="200"/>
-              </a:spcBef>
-              <a:spcAft>
-                <a:spcPts val="600"/>
-              </a:spcAft>
-            </a:pPr>
-            <a:r>
-              <a:rPr sz="1300" b="0">
-                <a:solidFill>
-                  <a:srgbClr val="555B66"/>
-                </a:solidFill>
-                <a:latin typeface="맑은 고딕"/>
-              </a:rPr>
-              <a:t>– </a:t>
-            </a:r>
-            <a:r>
-              <a:rPr sz="1300" b="0">
-                <a:solidFill>
-                  <a:srgbClr val="222730"/>
-                </a:solidFill>
-                <a:latin typeface="맑은 고딕"/>
-              </a:rPr>
-              <a:t>⑥ 승인·증거 보관 — 권한자 승인 + 증거 보관. 승인은 결과에 결속</a:t>
-            </a:r>
-          </a:p>
-          <a:p>
-            <a:pPr>
-              <a:spcBef>
-                <a:spcPts val="200"/>
-              </a:spcBef>
-              <a:spcAft>
-                <a:spcPts val="600"/>
-              </a:spcAft>
-            </a:pPr>
-            <a:r>
-              <a:rPr sz="1500" b="1">
-                <a:solidFill>
-                  <a:srgbClr val="0E8F8F"/>
-                </a:solidFill>
-                <a:latin typeface="맑은 고딕"/>
-              </a:rPr>
-              <a:t>■ </a:t>
-            </a:r>
-            <a:r>
-              <a:rPr sz="1500" b="1">
-                <a:solidFill>
-                  <a:srgbClr val="0E8F8F"/>
-                </a:solidFill>
-                <a:latin typeface="맑은 고딕"/>
-              </a:rPr>
-              <a:t>6페이지 한계와의 연결 — “관리 파일이 많다”는 부담을 그대로 두지 않는다. 이 산출물을 사람이 아니라 LLM이 생성·갱신하고, 검사기는 검증만 한다</a:t>
-            </a:r>
-          </a:p>
-        </p:txBody>
-      </p:sp>
-      <p:sp>
-        <p:nvSpPr>
-          <p:cNvPr id="7" name="TextBox 6"/>
-          <p:cNvSpPr txBox="1"/>
-          <p:nvPr/>
-        </p:nvSpPr>
-        <p:spPr>
-          <a:xfrm>
-            <a:off x="365760" y="6455664"/>
-            <a:ext cx="9144000" cy="301752"/>
-          </a:xfrm>
-          <a:prstGeom prst="rect">
-            <a:avLst/>
-          </a:prstGeom>
-          <a:noFill/>
-        </p:spPr>
-        <p:txBody>
-          <a:bodyPr wrap="square">
-            <a:spAutoFit/>
-          </a:bodyPr>
-          <a:lstStyle/>
-          <a:p>
-            <a:r>
-              <a:rPr sz="900" b="0">
-                <a:solidFill>
-                  <a:srgbClr val="555B66"/>
-                </a:solidFill>
-                <a:latin typeface="맑은 고딕"/>
-              </a:rPr>
-              <a:t>OpenMetadata 커스텀 버전업 검증 전략 · CODEX-05(정본) 기반</a:t>
-            </a:r>
-          </a:p>
-        </p:txBody>
-      </p:sp>
-      <p:sp>
-        <p:nvSpPr>
-          <p:cNvPr id="8" name="TextBox 7"/>
-          <p:cNvSpPr txBox="1"/>
-          <p:nvPr/>
-        </p:nvSpPr>
-        <p:spPr>
-          <a:xfrm>
-            <a:off x="11338560" y="6455664"/>
-            <a:ext cx="640080" cy="301752"/>
-          </a:xfrm>
-          <a:prstGeom prst="rect">
-            <a:avLst/>
-          </a:prstGeom>
-          <a:noFill/>
-        </p:spPr>
-        <p:txBody>
-          <a:bodyPr wrap="square">
-            <a:spAutoFit/>
-          </a:bodyPr>
-          <a:lstStyle/>
-          <a:p>
-            <a:pPr algn="r"/>
-            <a:r>
-              <a:rPr sz="900" b="0">
-                <a:solidFill>
-                  <a:srgbClr val="555B66"/>
-                </a:solidFill>
-                <a:latin typeface="맑은 고딕"/>
-              </a:rPr>
-              <a:t>11</a:t>
-            </a:r>
-          </a:p>
-        </p:txBody>
-      </p:sp>
-    </p:spTree>
-  </p:cSld>
-  <p:clrMapOvr>
-    <a:masterClrMapping/>
-  </p:clrMapOvr>
-</p:sld>
-</file>
-
-<file path=ppt/slides/slide12.xml><?xml version="1.0" encoding="utf-8"?>
 <p:sld xmlns:a="http://schemas.openxmlformats.org/drawingml/2006/main" xmlns:p="http://schemas.openxmlformats.org/presentationml/2006/main" xmlns:r="http://schemas.openxmlformats.org/officeDocument/2006/relationships">
   <p:cSld>
     <p:spTree>
@@ -5473,7 +4493,7 @@
                 </a:solidFill>
                 <a:latin typeface="맑은 고딕"/>
               </a:rPr>
-              <a:t>12</a:t>
+              <a:t>10</a:t>
             </a:r>
           </a:p>
         </p:txBody>
@@ -5486,7 +4506,7 @@
 </p:sld>
 </file>
 
-<file path=ppt/slides/slide13.xml><?xml version="1.0" encoding="utf-8"?>
+<file path=ppt/slides/slide11.xml><?xml version="1.0" encoding="utf-8"?>
 <p:sld xmlns:a="http://schemas.openxmlformats.org/drawingml/2006/main" xmlns:p="http://schemas.openxmlformats.org/presentationml/2006/main" xmlns:r="http://schemas.openxmlformats.org/officeDocument/2006/relationships">
   <p:cSld>
     <p:spTree>
@@ -6318,7 +5338,7 @@
                 </a:solidFill>
                 <a:latin typeface="맑은 고딕"/>
               </a:rPr>
-              <a:t>13</a:t>
+              <a:t>11</a:t>
             </a:r>
           </a:p>
         </p:txBody>
@@ -6331,7 +5351,7 @@
 </p:sld>
 </file>
 
-<file path=ppt/slides/slide14.xml><?xml version="1.0" encoding="utf-8"?>
+<file path=ppt/slides/slide12.xml><?xml version="1.0" encoding="utf-8"?>
 <p:sld xmlns:a="http://schemas.openxmlformats.org/drawingml/2006/main" xmlns:p="http://schemas.openxmlformats.org/presentationml/2006/main" xmlns:r="http://schemas.openxmlformats.org/officeDocument/2006/relationships">
   <p:cSld>
     <p:spTree>
@@ -7073,7 +6093,7 @@
                 </a:solidFill>
                 <a:latin typeface="맑은 고딕"/>
               </a:rPr>
-              <a:t>14</a:t>
+              <a:t>12</a:t>
             </a:r>
           </a:p>
         </p:txBody>
@@ -7086,7 +6106,7 @@
 </p:sld>
 </file>
 
-<file path=ppt/slides/slide15.xml><?xml version="1.0" encoding="utf-8"?>
+<file path=ppt/slides/slide13.xml><?xml version="1.0" encoding="utf-8"?>
 <p:sld xmlns:a="http://schemas.openxmlformats.org/drawingml/2006/main" xmlns:p="http://schemas.openxmlformats.org/presentationml/2006/main" xmlns:r="http://schemas.openxmlformats.org/officeDocument/2006/relationships">
   <p:cSld>
     <p:spTree>
@@ -7918,6 +6938,893 @@
                 </a:solidFill>
                 <a:latin typeface="맑은 고딕"/>
               </a:rPr>
+              <a:t>13</a:t>
+            </a:r>
+          </a:p>
+        </p:txBody>
+      </p:sp>
+    </p:spTree>
+  </p:cSld>
+  <p:clrMapOvr>
+    <a:masterClrMapping/>
+  </p:clrMapOvr>
+</p:sld>
+</file>
+
+<file path=ppt/slides/slide14.xml><?xml version="1.0" encoding="utf-8"?>
+<p:sld xmlns:a="http://schemas.openxmlformats.org/drawingml/2006/main" xmlns:p="http://schemas.openxmlformats.org/presentationml/2006/main" xmlns:r="http://schemas.openxmlformats.org/officeDocument/2006/relationships">
+  <p:cSld>
+    <p:spTree>
+      <p:nvGrpSpPr>
+        <p:cNvPr id="1" name=""/>
+        <p:cNvGrpSpPr/>
+        <p:nvPr/>
+      </p:nvGrpSpPr>
+      <p:grpSpPr/>
+      <p:sp>
+        <p:nvSpPr>
+          <p:cNvPr id="2" name="Rectangle 1"/>
+          <p:cNvSpPr/>
+          <p:nvPr/>
+        </p:nvSpPr>
+        <p:spPr>
+          <a:xfrm>
+            <a:off x="0" y="0"/>
+            <a:ext cx="12191695" cy="1051560"/>
+          </a:xfrm>
+          <a:prstGeom prst="rect">
+            <a:avLst/>
+          </a:prstGeom>
+          <a:solidFill>
+            <a:srgbClr val="1F2A44"/>
+          </a:solidFill>
+          <a:ln>
+            <a:noFill/>
+          </a:ln>
+          <a:effectLst/>
+        </p:spPr>
+        <p:style>
+          <a:lnRef idx="1">
+            <a:schemeClr val="accent1"/>
+          </a:lnRef>
+          <a:fillRef idx="3">
+            <a:schemeClr val="accent1"/>
+          </a:fillRef>
+          <a:effectRef idx="2">
+            <a:schemeClr val="accent1"/>
+          </a:effectRef>
+          <a:fontRef idx="minor">
+            <a:schemeClr val="lt1"/>
+          </a:fontRef>
+        </p:style>
+        <p:txBody>
+          <a:bodyPr rtlCol="0" anchor="ctr"/>
+          <a:lstStyle/>
+          <a:p>
+            <a:pPr algn="ctr"/>
+          </a:p>
+        </p:txBody>
+      </p:sp>
+      <p:sp>
+        <p:nvSpPr>
+          <p:cNvPr id="3" name="Rectangle 2"/>
+          <p:cNvSpPr/>
+          <p:nvPr/>
+        </p:nvSpPr>
+        <p:spPr>
+          <a:xfrm>
+            <a:off x="0" y="1051560"/>
+            <a:ext cx="12191695" cy="54864"/>
+          </a:xfrm>
+          <a:prstGeom prst="rect">
+            <a:avLst/>
+          </a:prstGeom>
+          <a:solidFill>
+            <a:srgbClr val="0E8F8F"/>
+          </a:solidFill>
+          <a:ln>
+            <a:noFill/>
+          </a:ln>
+          <a:effectLst/>
+        </p:spPr>
+        <p:style>
+          <a:lnRef idx="1">
+            <a:schemeClr val="accent1"/>
+          </a:lnRef>
+          <a:fillRef idx="3">
+            <a:schemeClr val="accent1"/>
+          </a:fillRef>
+          <a:effectRef idx="2">
+            <a:schemeClr val="accent1"/>
+          </a:effectRef>
+          <a:fontRef idx="minor">
+            <a:schemeClr val="lt1"/>
+          </a:fontRef>
+        </p:style>
+        <p:txBody>
+          <a:bodyPr rtlCol="0" anchor="ctr"/>
+          <a:lstStyle/>
+          <a:p>
+            <a:pPr algn="ctr"/>
+          </a:p>
+        </p:txBody>
+      </p:sp>
+      <p:sp>
+        <p:nvSpPr>
+          <p:cNvPr id="4" name="TextBox 3"/>
+          <p:cNvSpPr txBox="1"/>
+          <p:nvPr/>
+        </p:nvSpPr>
+        <p:spPr>
+          <a:xfrm>
+            <a:off x="457200" y="164592"/>
+            <a:ext cx="11155680" cy="320040"/>
+          </a:xfrm>
+          <a:prstGeom prst="rect">
+            <a:avLst/>
+          </a:prstGeom>
+          <a:noFill/>
+        </p:spPr>
+        <p:txBody>
+          <a:bodyPr wrap="square">
+            <a:spAutoFit/>
+          </a:bodyPr>
+          <a:lstStyle/>
+          <a:p>
+            <a:r>
+              <a:rPr sz="1200" b="1">
+                <a:solidFill>
+                  <a:srgbClr val="0E8F8F"/>
+                </a:solidFill>
+                <a:latin typeface="맑은 고딕"/>
+              </a:rPr>
+              <a:t>오해 방지</a:t>
+            </a:r>
+          </a:p>
+        </p:txBody>
+      </p:sp>
+      <p:sp>
+        <p:nvSpPr>
+          <p:cNvPr id="5" name="TextBox 4"/>
+          <p:cNvSpPr txBox="1"/>
+          <p:nvPr/>
+        </p:nvSpPr>
+        <p:spPr>
+          <a:xfrm>
+            <a:off x="457200" y="457200"/>
+            <a:ext cx="11247120" cy="566928"/>
+          </a:xfrm>
+          <a:prstGeom prst="rect">
+            <a:avLst/>
+          </a:prstGeom>
+          <a:noFill/>
+        </p:spPr>
+        <p:txBody>
+          <a:bodyPr wrap="square">
+            <a:spAutoFit/>
+          </a:bodyPr>
+          <a:lstStyle/>
+          <a:p>
+            <a:r>
+              <a:rPr sz="2500" b="1">
+                <a:solidFill>
+                  <a:srgbClr val="FFFFFF"/>
+                </a:solidFill>
+                <a:latin typeface="맑은 고딕"/>
+              </a:rPr>
+              <a:t>검사기의 정확한 위치 — LLM 위에 얹는 안전장치</a:t>
+            </a:r>
+          </a:p>
+        </p:txBody>
+      </p:sp>
+      <p:sp>
+        <p:nvSpPr>
+          <p:cNvPr id="6" name="TextBox 5"/>
+          <p:cNvSpPr txBox="1"/>
+          <p:nvPr/>
+        </p:nvSpPr>
+        <p:spPr>
+          <a:xfrm>
+            <a:off x="548640" y="1325880"/>
+            <a:ext cx="11064240" cy="4937760"/>
+          </a:xfrm>
+          <a:prstGeom prst="rect">
+            <a:avLst/>
+          </a:prstGeom>
+          <a:noFill/>
+        </p:spPr>
+        <p:txBody>
+          <a:bodyPr wrap="square">
+            <a:spAutoFit/>
+          </a:bodyPr>
+          <a:lstStyle/>
+          <a:p>
+            <a:pPr>
+              <a:spcBef>
+                <a:spcPts val="200"/>
+              </a:spcBef>
+              <a:spcAft>
+                <a:spcPts val="600"/>
+              </a:spcAft>
+            </a:pPr>
+            <a:r>
+              <a:rPr sz="1500" b="1">
+                <a:solidFill>
+                  <a:srgbClr val="0E8F8F"/>
+                </a:solidFill>
+                <a:latin typeface="맑은 고딕"/>
+              </a:rPr>
+              <a:t>■ </a:t>
+            </a:r>
+            <a:r>
+              <a:rPr sz="1500" b="1">
+                <a:solidFill>
+                  <a:srgbClr val="0E8F8F"/>
+                </a:solidFill>
+                <a:latin typeface="맑은 고딕"/>
+              </a:rPr>
+              <a:t>검사기는 LLM을 대신하지 않는다. 검사도 판단도 LLM이 먼저 한다 — 검사기는 그 결과를 한 번 더 확인할 뿐이다</a:t>
+            </a:r>
+          </a:p>
+          <a:p>
+            <a:pPr>
+              <a:spcBef>
+                <a:spcPts val="200"/>
+              </a:spcBef>
+              <a:spcAft>
+                <a:spcPts val="600"/>
+              </a:spcAft>
+            </a:pPr>
+            <a:r>
+              <a:rPr sz="1500" b="1">
+                <a:solidFill>
+                  <a:srgbClr val="0E8F8F"/>
+                </a:solidFill>
+                <a:latin typeface="맑은 고딕"/>
+              </a:rPr>
+              <a:t>■ </a:t>
+            </a:r>
+            <a:r>
+              <a:rPr sz="1500" b="1">
+                <a:solidFill>
+                  <a:srgbClr val="2E6CB1"/>
+                </a:solidFill>
+                <a:latin typeface="맑은 고딕"/>
+              </a:rPr>
+              <a:t>1차 — LLM: 무엇을 바꿀지 정하고, 옮겨간 코드를 찾고, 충돌을 풀고, 검사까지 직접 돌린다. 속도는 전부 여기서 나온다</a:t>
+            </a:r>
+          </a:p>
+          <a:p>
+            <a:pPr>
+              <a:spcBef>
+                <a:spcPts val="200"/>
+              </a:spcBef>
+              <a:spcAft>
+                <a:spcPts val="600"/>
+              </a:spcAft>
+            </a:pPr>
+            <a:r>
+              <a:rPr sz="1500" b="1">
+                <a:solidFill>
+                  <a:srgbClr val="0E8F8F"/>
+                </a:solidFill>
+                <a:latin typeface="맑은 고딕"/>
+              </a:rPr>
+              <a:t>■ </a:t>
+            </a:r>
+            <a:r>
+              <a:rPr sz="1500" b="1">
+                <a:solidFill>
+                  <a:srgbClr val="0E8F8F"/>
+                </a:solidFill>
+                <a:latin typeface="맑은 고딕"/>
+              </a:rPr>
+              <a:t>2차 — 검사기: 같은 일을 다시 하지 않는다. LLM이 자기 자신에 대해 답할 수 없는 것만 확인한다</a:t>
+            </a:r>
+          </a:p>
+          <a:p>
+            <a:pPr lvl="1">
+              <a:spcBef>
+                <a:spcPts val="200"/>
+              </a:spcBef>
+              <a:spcAft>
+                <a:spcPts val="600"/>
+              </a:spcAft>
+            </a:pPr>
+            <a:r>
+              <a:rPr sz="1300" b="0">
+                <a:solidFill>
+                  <a:srgbClr val="555B66"/>
+                </a:solidFill>
+                <a:latin typeface="맑은 고딕"/>
+              </a:rPr>
+              <a:t>– </a:t>
+            </a:r>
+            <a:r>
+              <a:rPr sz="1300" b="0">
+                <a:solidFill>
+                  <a:srgbClr val="222730"/>
+                </a:solidFill>
+                <a:latin typeface="맑은 고딕"/>
+              </a:rPr>
+              <a:t>① 정말 돌렸는가  ② 검사한 코드가 배포할 코드와 같은가  ③ 그 결과가 나중에 바뀌지 않았는가</a:t>
+            </a:r>
+          </a:p>
+          <a:p>
+            <a:pPr>
+              <a:spcBef>
+                <a:spcPts val="200"/>
+              </a:spcBef>
+              <a:spcAft>
+                <a:spcPts val="600"/>
+              </a:spcAft>
+            </a:pPr>
+            <a:r>
+              <a:rPr sz="1500" b="1">
+                <a:solidFill>
+                  <a:srgbClr val="0E8F8F"/>
+                </a:solidFill>
+                <a:latin typeface="맑은 고딕"/>
+              </a:rPr>
+              <a:t>■ </a:t>
+            </a:r>
+            <a:r>
+              <a:rPr sz="1500" b="1">
+                <a:solidFill>
+                  <a:srgbClr val="B03A2E"/>
+                </a:solidFill>
+                <a:latin typeface="맑은 고딕"/>
+              </a:rPr>
+              <a:t>그래서 독립성 — LLM이 실행·기록·증거·승인을 다 하면 ‘한 번 더’가 성립하지 않는다. 별도의 보호된 자동화(CI)가 실제 코드를 받아 검사를 돌려야 한다</a:t>
+            </a:r>
+          </a:p>
+          <a:p>
+            <a:pPr>
+              <a:spcBef>
+                <a:spcPts val="200"/>
+              </a:spcBef>
+              <a:spcAft>
+                <a:spcPts val="600"/>
+              </a:spcAft>
+            </a:pPr>
+            <a:r>
+              <a:rPr sz="1500" b="1">
+                <a:solidFill>
+                  <a:srgbClr val="0E8F8F"/>
+                </a:solidFill>
+                <a:latin typeface="맑은 고딕"/>
+              </a:rPr>
+              <a:t>■ </a:t>
+            </a:r>
+            <a:r>
+              <a:rPr sz="1500" b="1">
+                <a:solidFill>
+                  <a:srgbClr val="2E8B57"/>
+                </a:solidFill>
+                <a:latin typeface="맑은 고딕"/>
+              </a:rPr>
+              <a:t>검사기를 ‘LLM보다 똑똑한 판정자’로 쓰면 실패한다 — 그건 이미 해봤다. ‘LLM이 한 일을 한 번 더 확인하는 안전장치’로 쓰면 부담은 작고 얻는 건 크다</a:t>
+            </a:r>
+          </a:p>
+        </p:txBody>
+      </p:sp>
+      <p:sp>
+        <p:nvSpPr>
+          <p:cNvPr id="7" name="TextBox 6"/>
+          <p:cNvSpPr txBox="1"/>
+          <p:nvPr/>
+        </p:nvSpPr>
+        <p:spPr>
+          <a:xfrm>
+            <a:off x="365760" y="6455664"/>
+            <a:ext cx="9144000" cy="301752"/>
+          </a:xfrm>
+          <a:prstGeom prst="rect">
+            <a:avLst/>
+          </a:prstGeom>
+          <a:noFill/>
+        </p:spPr>
+        <p:txBody>
+          <a:bodyPr wrap="square">
+            <a:spAutoFit/>
+          </a:bodyPr>
+          <a:lstStyle/>
+          <a:p>
+            <a:r>
+              <a:rPr sz="900" b="0">
+                <a:solidFill>
+                  <a:srgbClr val="555B66"/>
+                </a:solidFill>
+                <a:latin typeface="맑은 고딕"/>
+              </a:rPr>
+              <a:t>OpenMetadata 커스텀 버전업 검증 전략 · CODEX-05(정본) 기반</a:t>
+            </a:r>
+          </a:p>
+        </p:txBody>
+      </p:sp>
+      <p:sp>
+        <p:nvSpPr>
+          <p:cNvPr id="8" name="TextBox 7"/>
+          <p:cNvSpPr txBox="1"/>
+          <p:nvPr/>
+        </p:nvSpPr>
+        <p:spPr>
+          <a:xfrm>
+            <a:off x="11338560" y="6455664"/>
+            <a:ext cx="640080" cy="301752"/>
+          </a:xfrm>
+          <a:prstGeom prst="rect">
+            <a:avLst/>
+          </a:prstGeom>
+          <a:noFill/>
+        </p:spPr>
+        <p:txBody>
+          <a:bodyPr wrap="square">
+            <a:spAutoFit/>
+          </a:bodyPr>
+          <a:lstStyle/>
+          <a:p>
+            <a:pPr algn="r"/>
+            <a:r>
+              <a:rPr sz="900" b="0">
+                <a:solidFill>
+                  <a:srgbClr val="555B66"/>
+                </a:solidFill>
+                <a:latin typeface="맑은 고딕"/>
+              </a:rPr>
+              <a:t>14</a:t>
+            </a:r>
+          </a:p>
+        </p:txBody>
+      </p:sp>
+    </p:spTree>
+  </p:cSld>
+  <p:clrMapOvr>
+    <a:masterClrMapping/>
+  </p:clrMapOvr>
+</p:sld>
+</file>
+
+<file path=ppt/slides/slide15.xml><?xml version="1.0" encoding="utf-8"?>
+<p:sld xmlns:a="http://schemas.openxmlformats.org/drawingml/2006/main" xmlns:p="http://schemas.openxmlformats.org/presentationml/2006/main" xmlns:r="http://schemas.openxmlformats.org/officeDocument/2006/relationships">
+  <p:cSld>
+    <p:spTree>
+      <p:nvGrpSpPr>
+        <p:cNvPr id="1" name=""/>
+        <p:cNvGrpSpPr/>
+        <p:nvPr/>
+      </p:nvGrpSpPr>
+      <p:grpSpPr/>
+      <p:sp>
+        <p:nvSpPr>
+          <p:cNvPr id="2" name="Rectangle 1"/>
+          <p:cNvSpPr/>
+          <p:nvPr/>
+        </p:nvSpPr>
+        <p:spPr>
+          <a:xfrm>
+            <a:off x="0" y="0"/>
+            <a:ext cx="12191695" cy="1051560"/>
+          </a:xfrm>
+          <a:prstGeom prst="rect">
+            <a:avLst/>
+          </a:prstGeom>
+          <a:solidFill>
+            <a:srgbClr val="1F2A44"/>
+          </a:solidFill>
+          <a:ln>
+            <a:noFill/>
+          </a:ln>
+          <a:effectLst/>
+        </p:spPr>
+        <p:style>
+          <a:lnRef idx="1">
+            <a:schemeClr val="accent1"/>
+          </a:lnRef>
+          <a:fillRef idx="3">
+            <a:schemeClr val="accent1"/>
+          </a:fillRef>
+          <a:effectRef idx="2">
+            <a:schemeClr val="accent1"/>
+          </a:effectRef>
+          <a:fontRef idx="minor">
+            <a:schemeClr val="lt1"/>
+          </a:fontRef>
+        </p:style>
+        <p:txBody>
+          <a:bodyPr rtlCol="0" anchor="ctr"/>
+          <a:lstStyle/>
+          <a:p>
+            <a:pPr algn="ctr"/>
+          </a:p>
+        </p:txBody>
+      </p:sp>
+      <p:sp>
+        <p:nvSpPr>
+          <p:cNvPr id="3" name="Rectangle 2"/>
+          <p:cNvSpPr/>
+          <p:nvPr/>
+        </p:nvSpPr>
+        <p:spPr>
+          <a:xfrm>
+            <a:off x="0" y="1051560"/>
+            <a:ext cx="12191695" cy="54864"/>
+          </a:xfrm>
+          <a:prstGeom prst="rect">
+            <a:avLst/>
+          </a:prstGeom>
+          <a:solidFill>
+            <a:srgbClr val="0E8F8F"/>
+          </a:solidFill>
+          <a:ln>
+            <a:noFill/>
+          </a:ln>
+          <a:effectLst/>
+        </p:spPr>
+        <p:style>
+          <a:lnRef idx="1">
+            <a:schemeClr val="accent1"/>
+          </a:lnRef>
+          <a:fillRef idx="3">
+            <a:schemeClr val="accent1"/>
+          </a:fillRef>
+          <a:effectRef idx="2">
+            <a:schemeClr val="accent1"/>
+          </a:effectRef>
+          <a:fontRef idx="minor">
+            <a:schemeClr val="lt1"/>
+          </a:fontRef>
+        </p:style>
+        <p:txBody>
+          <a:bodyPr rtlCol="0" anchor="ctr"/>
+          <a:lstStyle/>
+          <a:p>
+            <a:pPr algn="ctr"/>
+          </a:p>
+        </p:txBody>
+      </p:sp>
+      <p:sp>
+        <p:nvSpPr>
+          <p:cNvPr id="4" name="TextBox 3"/>
+          <p:cNvSpPr txBox="1"/>
+          <p:nvPr/>
+        </p:nvSpPr>
+        <p:spPr>
+          <a:xfrm>
+            <a:off x="457200" y="164592"/>
+            <a:ext cx="11155680" cy="320040"/>
+          </a:xfrm>
+          <a:prstGeom prst="rect">
+            <a:avLst/>
+          </a:prstGeom>
+          <a:noFill/>
+        </p:spPr>
+        <p:txBody>
+          <a:bodyPr wrap="square">
+            <a:spAutoFit/>
+          </a:bodyPr>
+          <a:lstStyle/>
+          <a:p>
+            <a:r>
+              <a:rPr sz="1200" b="1">
+                <a:solidFill>
+                  <a:srgbClr val="0E8F8F"/>
+                </a:solidFill>
+                <a:latin typeface="맑은 고딕"/>
+              </a:rPr>
+              <a:t>한 장 요약</a:t>
+            </a:r>
+          </a:p>
+        </p:txBody>
+      </p:sp>
+      <p:sp>
+        <p:nvSpPr>
+          <p:cNvPr id="5" name="TextBox 4"/>
+          <p:cNvSpPr txBox="1"/>
+          <p:nvPr/>
+        </p:nvSpPr>
+        <p:spPr>
+          <a:xfrm>
+            <a:off x="457200" y="457200"/>
+            <a:ext cx="11247120" cy="566928"/>
+          </a:xfrm>
+          <a:prstGeom prst="rect">
+            <a:avLst/>
+          </a:prstGeom>
+          <a:noFill/>
+        </p:spPr>
+        <p:txBody>
+          <a:bodyPr wrap="square">
+            <a:spAutoFit/>
+          </a:bodyPr>
+          <a:lstStyle/>
+          <a:p>
+            <a:r>
+              <a:rPr sz="2500" b="1">
+                <a:solidFill>
+                  <a:srgbClr val="FFFFFF"/>
+                </a:solidFill>
+                <a:latin typeface="맑은 고딕"/>
+              </a:rPr>
+              <a:t>결론</a:t>
+            </a:r>
+          </a:p>
+        </p:txBody>
+      </p:sp>
+      <p:sp>
+        <p:nvSpPr>
+          <p:cNvPr id="6" name="TextBox 5"/>
+          <p:cNvSpPr txBox="1"/>
+          <p:nvPr/>
+        </p:nvSpPr>
+        <p:spPr>
+          <a:xfrm>
+            <a:off x="548640" y="1325880"/>
+            <a:ext cx="11064240" cy="4937760"/>
+          </a:xfrm>
+          <a:prstGeom prst="rect">
+            <a:avLst/>
+          </a:prstGeom>
+          <a:noFill/>
+        </p:spPr>
+        <p:txBody>
+          <a:bodyPr wrap="square">
+            <a:spAutoFit/>
+          </a:bodyPr>
+          <a:lstStyle/>
+          <a:p>
+            <a:pPr>
+              <a:spcBef>
+                <a:spcPts val="200"/>
+              </a:spcBef>
+              <a:spcAft>
+                <a:spcPts val="600"/>
+              </a:spcAft>
+            </a:pPr>
+            <a:r>
+              <a:rPr sz="1500" b="1">
+                <a:solidFill>
+                  <a:srgbClr val="0E8F8F"/>
+                </a:solidFill>
+                <a:latin typeface="맑은 고딕"/>
+              </a:rPr>
+              <a:t>■ </a:t>
+            </a:r>
+            <a:r>
+              <a:rPr sz="1500" b="1">
+                <a:solidFill>
+                  <a:srgbClr val="2E8B57"/>
+                </a:solidFill>
+                <a:latin typeface="맑은 고딕"/>
+              </a:rPr>
+              <a:t>작은 변화 — 하위 패치엔 규칙 기반이 그대로 유효. 충돌 0·자동 병합 (4·5p)</a:t>
+            </a:r>
+          </a:p>
+          <a:p>
+            <a:pPr>
+              <a:spcBef>
+                <a:spcPts val="200"/>
+              </a:spcBef>
+              <a:spcAft>
+                <a:spcPts val="600"/>
+              </a:spcAft>
+            </a:pPr>
+            <a:r>
+              <a:rPr sz="1500" b="1">
+                <a:solidFill>
+                  <a:srgbClr val="0E8F8F"/>
+                </a:solidFill>
+                <a:latin typeface="맑은 고딕"/>
+              </a:rPr>
+              <a:t>■ </a:t>
+            </a:r>
+            <a:r>
+              <a:rPr sz="1500" b="1">
+                <a:solidFill>
+                  <a:srgbClr val="B03A2E"/>
+                </a:solidFill>
+                <a:latin typeface="맑은 고딕"/>
+              </a:rPr>
+              <a:t>큰 변화 — 1.13.2처럼 구조가 바뀌면 오판(리로케이션) + 관리 파일 ~25개 운영 부담(6p) → 한계</a:t>
+            </a:r>
+          </a:p>
+          <a:p>
+            <a:pPr>
+              <a:spcBef>
+                <a:spcPts val="200"/>
+              </a:spcBef>
+              <a:spcAft>
+                <a:spcPts val="600"/>
+              </a:spcAft>
+            </a:pPr>
+            <a:r>
+              <a:rPr sz="1500" b="1">
+                <a:solidFill>
+                  <a:srgbClr val="0E8F8F"/>
+                </a:solidFill>
+                <a:latin typeface="맑은 고딕"/>
+              </a:rPr>
+              <a:t>■ </a:t>
+            </a:r>
+            <a:r>
+              <a:rPr sz="1500" b="1">
+                <a:solidFill>
+                  <a:srgbClr val="2E6CB1"/>
+                </a:solidFill>
+                <a:latin typeface="맑은 고딕"/>
+              </a:rPr>
+              <a:t>그래서 — 규칙 기반은 버리지 않는다. 예측 가능 범위엔 그대로, 불확실할 때만 하이브리드. 그 관리 산출물은 LLM이 만들고 검사기는 검증만 (9p)</a:t>
+            </a:r>
+          </a:p>
+          <a:p>
+            <a:pPr>
+              <a:spcBef>
+                <a:spcPts val="200"/>
+              </a:spcBef>
+              <a:spcAft>
+                <a:spcPts val="600"/>
+              </a:spcAft>
+            </a:pPr>
+            <a:r>
+              <a:rPr sz="1500" b="1">
+                <a:solidFill>
+                  <a:srgbClr val="0E8F8F"/>
+                </a:solidFill>
+                <a:latin typeface="맑은 고딕"/>
+              </a:rPr>
+              <a:t>■ </a:t>
+            </a:r>
+            <a:r>
+              <a:rPr sz="1500" b="1">
+                <a:solidFill>
+                  <a:srgbClr val="0E8F8F"/>
+                </a:solidFill>
+                <a:latin typeface="맑은 고딕"/>
+              </a:rPr>
+              <a:t>① 방식 통제 — 어떻게 일을 하는지를 지시(프롬프트·MD)로 통제한다 (순서·범위·남길 것)</a:t>
+            </a:r>
+          </a:p>
+          <a:p>
+            <a:pPr>
+              <a:spcBef>
+                <a:spcPts val="200"/>
+              </a:spcBef>
+              <a:spcAft>
+                <a:spcPts val="600"/>
+              </a:spcAft>
+            </a:pPr>
+            <a:r>
+              <a:rPr sz="1500" b="1">
+                <a:solidFill>
+                  <a:srgbClr val="0E8F8F"/>
+                </a:solidFill>
+                <a:latin typeface="맑은 고딕"/>
+              </a:rPr>
+              <a:t>■ </a:t>
+            </a:r>
+            <a:r>
+              <a:rPr sz="1500" b="1">
+                <a:solidFill>
+                  <a:srgbClr val="2E8B57"/>
+                </a:solidFill>
+                <a:latin typeface="맑은 고딕"/>
+              </a:rPr>
+              <a:t>② 결과 통제 — 과정마다 정해진 형식으로 결과를 뱉게 강제 → 검사기가 판정</a:t>
+            </a:r>
+          </a:p>
+          <a:p>
+            <a:pPr>
+              <a:spcBef>
+                <a:spcPts val="200"/>
+              </a:spcBef>
+              <a:spcAft>
+                <a:spcPts val="600"/>
+              </a:spcAft>
+            </a:pPr>
+            <a:r>
+              <a:rPr sz="1500" b="1">
+                <a:solidFill>
+                  <a:srgbClr val="0E8F8F"/>
+                </a:solidFill>
+                <a:latin typeface="맑은 고딕"/>
+              </a:rPr>
+              <a:t>■ </a:t>
+            </a:r>
+            <a:r>
+              <a:rPr sz="1500" b="1">
+                <a:solidFill>
+                  <a:srgbClr val="0E8F8F"/>
+                </a:solidFill>
+                <a:latin typeface="맑은 고딕"/>
+              </a:rPr>
+              <a:t>한 줄 (harness = 고삐) — 업그레이드가 불확실해도 산출물을 예측 가능하게 만들어 통제한다. AI를 덜 쓰는(minimize) 게 아니라 고삐를 채우는(harness) 것</a:t>
+            </a:r>
+          </a:p>
+          <a:p>
+            <a:pPr lvl="2">
+              <a:spcBef>
+                <a:spcPts val="200"/>
+              </a:spcBef>
+              <a:spcAft>
+                <a:spcPts val="600"/>
+              </a:spcAft>
+            </a:pPr>
+            <a:r>
+              <a:rPr sz="1200" b="0">
+                <a:solidFill>
+                  <a:srgbClr val="555B66"/>
+                </a:solidFill>
+                <a:latin typeface="맑은 고딕"/>
+              </a:rPr>
+              <a:t>· 현재: 1.13.1 9/9 · 1.13.2 부분 / 다음: 주장–증거 자동 대조기</a:t>
+            </a:r>
+          </a:p>
+        </p:txBody>
+      </p:sp>
+      <p:sp>
+        <p:nvSpPr>
+          <p:cNvPr id="7" name="TextBox 6"/>
+          <p:cNvSpPr txBox="1"/>
+          <p:nvPr/>
+        </p:nvSpPr>
+        <p:spPr>
+          <a:xfrm>
+            <a:off x="365760" y="6455664"/>
+            <a:ext cx="9144000" cy="301752"/>
+          </a:xfrm>
+          <a:prstGeom prst="rect">
+            <a:avLst/>
+          </a:prstGeom>
+          <a:noFill/>
+        </p:spPr>
+        <p:txBody>
+          <a:bodyPr wrap="square">
+            <a:spAutoFit/>
+          </a:bodyPr>
+          <a:lstStyle/>
+          <a:p>
+            <a:r>
+              <a:rPr sz="900" b="0">
+                <a:solidFill>
+                  <a:srgbClr val="555B66"/>
+                </a:solidFill>
+                <a:latin typeface="맑은 고딕"/>
+              </a:rPr>
+              <a:t>OpenMetadata 커스텀 버전업 검증 전략 · CODEX-05(정본) 기반</a:t>
+            </a:r>
+          </a:p>
+        </p:txBody>
+      </p:sp>
+      <p:sp>
+        <p:nvSpPr>
+          <p:cNvPr id="8" name="TextBox 7"/>
+          <p:cNvSpPr txBox="1"/>
+          <p:nvPr/>
+        </p:nvSpPr>
+        <p:spPr>
+          <a:xfrm>
+            <a:off x="11338560" y="6455664"/>
+            <a:ext cx="640080" cy="301752"/>
+          </a:xfrm>
+          <a:prstGeom prst="rect">
+            <a:avLst/>
+          </a:prstGeom>
+          <a:noFill/>
+        </p:spPr>
+        <p:txBody>
+          <a:bodyPr wrap="square">
+            <a:spAutoFit/>
+          </a:bodyPr>
+          <a:lstStyle/>
+          <a:p>
+            <a:pPr algn="r"/>
+            <a:r>
+              <a:rPr sz="900" b="0">
+                <a:solidFill>
+                  <a:srgbClr val="555B66"/>
+                </a:solidFill>
+                <a:latin typeface="맑은 고딕"/>
+              </a:rPr>
               <a:t>15</a:t>
             </a:r>
           </a:p>
@@ -8000,7 +7907,7 @@
             <a:avLst/>
           </a:prstGeom>
           <a:solidFill>
-            <a:srgbClr val="0E8F8F"/>
+            <a:srgbClr val="2E6CB1"/>
           </a:solidFill>
           <a:ln>
             <a:noFill/>
@@ -8054,11 +7961,11 @@
             <a:r>
               <a:rPr sz="1200" b="1">
                 <a:solidFill>
-                  <a:srgbClr val="0E8F8F"/>
-                </a:solidFill>
-                <a:latin typeface="맑은 고딕"/>
-              </a:rPr>
-              <a:t>오해 방지</a:t>
+                  <a:srgbClr val="2E6CB1"/>
+                </a:solidFill>
+                <a:latin typeface="맑은 고딕"/>
+              </a:rPr>
+              <a:t>부록 A — 참고한 다른 접근</a:t>
             </a:r>
           </a:p>
         </p:txBody>
@@ -8092,7 +7999,7 @@
                 </a:solidFill>
                 <a:latin typeface="맑은 고딕"/>
               </a:rPr>
-              <a:t>검사기의 정확한 위치 — LLM 위에 얹는 안전장치</a:t>
+              <a:t>8/5 공유된 ‘LLM 기반 운영 방식’ (참고)</a:t>
             </a:r>
           </a:p>
         </p:txBody>
@@ -8130,7 +8037,7 @@
             <a:r>
               <a:rPr sz="1500" b="1">
                 <a:solidFill>
-                  <a:srgbClr val="0E8F8F"/>
+                  <a:srgbClr val="2E6CB1"/>
                 </a:solidFill>
                 <a:latin typeface="맑은 고딕"/>
               </a:rPr>
@@ -8139,11 +8046,39 @@
             <a:r>
               <a:rPr sz="1500" b="1">
                 <a:solidFill>
-                  <a:srgbClr val="0E8F8F"/>
-                </a:solidFill>
-                <a:latin typeface="맑은 고딕"/>
-              </a:rPr>
-              <a:t>검사기는 LLM을 대신하지 않는다. 검사도 판단도 LLM이 먼저 한다 — 검사기는 그 결과를 한 번 더 확인할 뿐이다</a:t>
+                  <a:srgbClr val="2E6CB1"/>
+                </a:solidFill>
+                <a:latin typeface="맑은 고딕"/>
+              </a:rPr>
+              <a:t>개념 — 규칙·지식 문서·자동화로 LLM이 버전 포팅을 빠르게 수행하는 방식</a:t>
+            </a:r>
+          </a:p>
+          <a:p>
+            <a:pPr lvl="1">
+              <a:spcBef>
+                <a:spcPts val="200"/>
+              </a:spcBef>
+              <a:spcAft>
+                <a:spcPts val="600"/>
+              </a:spcAft>
+            </a:pPr>
+            <a:r>
+              <a:rPr sz="1300" b="0">
+                <a:solidFill>
+                  <a:srgbClr val="555B66"/>
+                </a:solidFill>
+                <a:latin typeface="맑은 고딕"/>
+              </a:rPr>
+              <a:t>– </a:t>
+            </a:r>
+            <a:r>
+              <a:rPr sz="1300" b="0">
+                <a:solidFill>
+                  <a:srgbClr val="555B66"/>
+                </a:solidFill>
+                <a:latin typeface="맑은 고딕"/>
+              </a:rPr>
+              <a:t>“포팅 시간 크게 단축”은 그 방식의 자체 보고 수치 — 우리가 실행·검증한 건 아니다</a:t>
             </a:r>
           </a:p>
           <a:p>
@@ -8158,7 +8093,7 @@
             <a:r>
               <a:rPr sz="1500" b="1">
                 <a:solidFill>
-                  <a:srgbClr val="0E8F8F"/>
+                  <a:srgbClr val="2E6CB1"/>
                 </a:solidFill>
                 <a:latin typeface="맑은 고딕"/>
               </a:rPr>
@@ -8167,11 +8102,11 @@
             <a:r>
               <a:rPr sz="1500" b="1">
                 <a:solidFill>
-                  <a:srgbClr val="2E6CB1"/>
-                </a:solidFill>
-                <a:latin typeface="맑은 고딕"/>
-              </a:rPr>
-              <a:t>1차 — LLM: 무엇을 바꿀지 정하고, 옮겨간 코드를 찾고, 충돌을 풀고, 검사까지 직접 돌린다. 속도는 전부 여기서 나온다</a:t>
+                  <a:srgbClr val="222730"/>
+                </a:solidFill>
+                <a:latin typeface="맑은 고딕"/>
+              </a:rPr>
+              <a:t>구조 — 변경·수정·테스트·결과 기록을 대부분 LLM이 스스로 수행하고, 그 결과도 스스로 문서에 적는다</a:t>
             </a:r>
           </a:p>
           <a:p>
@@ -8186,104 +8121,20 @@
             <a:r>
               <a:rPr sz="1500" b="1">
                 <a:solidFill>
+                  <a:srgbClr val="2E6CB1"/>
+                </a:solidFill>
+                <a:latin typeface="맑은 고딕"/>
+              </a:rPr>
+              <a:t>■ </a:t>
+            </a:r>
+            <a:r>
+              <a:rPr sz="1500" b="1">
+                <a:solidFill>
                   <a:srgbClr val="0E8F8F"/>
                 </a:solidFill>
                 <a:latin typeface="맑은 고딕"/>
               </a:rPr>
-              <a:t>■ </a:t>
-            </a:r>
-            <a:r>
-              <a:rPr sz="1500" b="1">
-                <a:solidFill>
-                  <a:srgbClr val="0E8F8F"/>
-                </a:solidFill>
-                <a:latin typeface="맑은 고딕"/>
-              </a:rPr>
-              <a:t>2차 — 검사기: 같은 일을 다시 하지 않는다. LLM이 자기 자신에 대해 답할 수 없는 것만 확인한다</a:t>
-            </a:r>
-          </a:p>
-          <a:p>
-            <a:pPr lvl="1">
-              <a:spcBef>
-                <a:spcPts val="200"/>
-              </a:spcBef>
-              <a:spcAft>
-                <a:spcPts val="600"/>
-              </a:spcAft>
-            </a:pPr>
-            <a:r>
-              <a:rPr sz="1300" b="0">
-                <a:solidFill>
-                  <a:srgbClr val="555B66"/>
-                </a:solidFill>
-                <a:latin typeface="맑은 고딕"/>
-              </a:rPr>
-              <a:t>– </a:t>
-            </a:r>
-            <a:r>
-              <a:rPr sz="1300" b="0">
-                <a:solidFill>
-                  <a:srgbClr val="222730"/>
-                </a:solidFill>
-                <a:latin typeface="맑은 고딕"/>
-              </a:rPr>
-              <a:t>① 정말 돌렸는가  ② 검사한 코드가 배포할 코드와 같은가  ③ 그 결과가 나중에 바뀌지 않았는가</a:t>
-            </a:r>
-          </a:p>
-          <a:p>
-            <a:pPr>
-              <a:spcBef>
-                <a:spcPts val="200"/>
-              </a:spcBef>
-              <a:spcAft>
-                <a:spcPts val="600"/>
-              </a:spcAft>
-            </a:pPr>
-            <a:r>
-              <a:rPr sz="1500" b="1">
-                <a:solidFill>
-                  <a:srgbClr val="0E8F8F"/>
-                </a:solidFill>
-                <a:latin typeface="맑은 고딕"/>
-              </a:rPr>
-              <a:t>■ </a:t>
-            </a:r>
-            <a:r>
-              <a:rPr sz="1500" b="1">
-                <a:solidFill>
-                  <a:srgbClr val="B03A2E"/>
-                </a:solidFill>
-                <a:latin typeface="맑은 고딕"/>
-              </a:rPr>
-              <a:t>그래서 독립성 — LLM이 실행·기록·증거·승인을 다 하면 ‘한 번 더’가 성립하지 않는다. 별도의 보호된 자동화(CI)가 실제 코드를 받아 검사를 돌려야 한다</a:t>
-            </a:r>
-          </a:p>
-          <a:p>
-            <a:pPr>
-              <a:spcBef>
-                <a:spcPts val="200"/>
-              </a:spcBef>
-              <a:spcAft>
-                <a:spcPts val="600"/>
-              </a:spcAft>
-            </a:pPr>
-            <a:r>
-              <a:rPr sz="1500" b="1">
-                <a:solidFill>
-                  <a:srgbClr val="0E8F8F"/>
-                </a:solidFill>
-                <a:latin typeface="맑은 고딕"/>
-              </a:rPr>
-              <a:t>■ </a:t>
-            </a:r>
-            <a:r>
-              <a:rPr sz="1500" b="1">
-                <a:solidFill>
-                  <a:srgbClr val="2E8B57"/>
-                </a:solidFill>
-                <a:latin typeface="맑은 고딕"/>
-              </a:rPr>
-              <a:t>검사기를 ‘LLM보다 똑똑한 판정자’로 쓰면 실패한다 — 그건 이미 해봤다. ‘LLM이 한 일을 한 번 더 확인하는 안전장치’로 쓰면 부담은 작고 얻는 건 크다</a:t>
+              <a:t>우리 생각 — 검증이 아니라 방향 제안: 이 접근에 검사기로 ‘각 판단의 근거를 자동으로 뒷받침’하는 층을 더하면 속도(LLM)는 살리고 신뢰(근거)는 끌어올릴 수 있겠다. 경쟁이 아니라 보완</a:t>
             </a:r>
           </a:p>
         </p:txBody>
@@ -8492,7 +8343,7 @@
                 </a:solidFill>
                 <a:latin typeface="맑은 고딕"/>
               </a:rPr>
-              <a:t>한 장 요약</a:t>
+              <a:t>부록 B — 방향 전환</a:t>
             </a:r>
           </a:p>
         </p:txBody>
@@ -8526,7 +8377,7 @@
                 </a:solidFill>
                 <a:latin typeface="맑은 고딕"/>
               </a:rPr>
-              <a:t>결론</a:t>
+              <a:t>LLM이 일하고, 검사기가 근거를 붙인다</a:t>
             </a:r>
           </a:p>
         </p:txBody>
@@ -8573,11 +8424,11 @@
             <a:r>
               <a:rPr sz="1500" b="1">
                 <a:solidFill>
-                  <a:srgbClr val="2E8B57"/>
-                </a:solidFill>
-                <a:latin typeface="맑은 고딕"/>
-              </a:rPr>
-              <a:t>작은 변화 — 하위 패치엔 규칙 기반이 그대로 유효. 충돌 0·자동 병합 (4·5p)</a:t>
+                  <a:srgbClr val="2E6CB1"/>
+                </a:solidFill>
+                <a:latin typeface="맑은 고딕"/>
+              </a:rPr>
+              <a:t>LLM — 판단·제안: 무엇을 바꿀지, 코드가 어디로 옮겨졌을지, 충돌 해결, 필요한 테스트</a:t>
             </a:r>
           </a:p>
           <a:p>
@@ -8601,11 +8452,11 @@
             <a:r>
               <a:rPr sz="1500" b="1">
                 <a:solidFill>
-                  <a:srgbClr val="B03A2E"/>
-                </a:solidFill>
-                <a:latin typeface="맑은 고딕"/>
-              </a:rPr>
-              <a:t>큰 변화 — 1.13.2처럼 구조가 바뀌면 오판(리로케이션) + 관리 파일 ~25개 운영 부담(6p) → 한계</a:t>
+                  <a:srgbClr val="0E8F8F"/>
+                </a:solidFill>
+                <a:latin typeface="맑은 고딕"/>
+              </a:rPr>
+              <a:t>검사기 — 뒷받침: 그 판단을 실제 코드·실행 증거로 확인하고, 위험하면 막는다</a:t>
             </a:r>
           </a:p>
           <a:p>
@@ -8629,11 +8480,123 @@
             <a:r>
               <a:rPr sz="1500" b="1">
                 <a:solidFill>
-                  <a:srgbClr val="2E6CB1"/>
-                </a:solidFill>
-                <a:latin typeface="맑은 고딕"/>
-              </a:rPr>
-              <a:t>그래서 — 규칙 기반은 버리지 않는다. 예측 가능 범위엔 그대로, 불확실할 때만 하이브리드. 그 관리 산출물은 LLM이 만들고 검사기는 검증만 (10·11p)</a:t>
+                  <a:srgbClr val="222730"/>
+                </a:solidFill>
+                <a:latin typeface="맑은 고딕"/>
+              </a:rPr>
+              <a:t>구체적으로 — LLM의 주장을 검사기가 이렇게 확인한다</a:t>
+            </a:r>
+          </a:p>
+          <a:p>
+            <a:pPr lvl="1">
+              <a:spcBef>
+                <a:spcPts val="200"/>
+              </a:spcBef>
+              <a:spcAft>
+                <a:spcPts val="600"/>
+              </a:spcAft>
+            </a:pPr>
+            <a:r>
+              <a:rPr sz="1300" b="0">
+                <a:solidFill>
+                  <a:srgbClr val="555B66"/>
+                </a:solidFill>
+                <a:latin typeface="맑은 고딕"/>
+              </a:rPr>
+              <a:t>– </a:t>
+            </a:r>
+            <a:r>
+              <a:rPr sz="1300" b="0">
+                <a:solidFill>
+                  <a:srgbClr val="222730"/>
+                </a:solidFill>
+                <a:latin typeface="맑은 고딕"/>
+              </a:rPr>
+              <a:t>“이 파일 바꿨다” → 실제 커밋의 변경 내역을 직접 대조</a:t>
+            </a:r>
+          </a:p>
+          <a:p>
+            <a:pPr lvl="1">
+              <a:spcBef>
+                <a:spcPts val="200"/>
+              </a:spcBef>
+              <a:spcAft>
+                <a:spcPts val="600"/>
+              </a:spcAft>
+            </a:pPr>
+            <a:r>
+              <a:rPr sz="1300" b="0">
+                <a:solidFill>
+                  <a:srgbClr val="555B66"/>
+                </a:solidFill>
+                <a:latin typeface="맑은 고딕"/>
+              </a:rPr>
+              <a:t>– </a:t>
+            </a:r>
+            <a:r>
+              <a:rPr sz="1300" b="0">
+                <a:solidFill>
+                  <a:srgbClr val="222730"/>
+                </a:solidFill>
+                <a:latin typeface="맑은 고딕"/>
+              </a:rPr>
+              <a:t>“충돌 0건” → 임시로 실제 병합해 충돌 수를 센다 (안 해보고 적어도 티가 안 나는 주장)</a:t>
+            </a:r>
+          </a:p>
+          <a:p>
+            <a:pPr lvl="1">
+              <a:spcBef>
+                <a:spcPts val="200"/>
+              </a:spcBef>
+              <a:spcAft>
+                <a:spcPts val="600"/>
+              </a:spcAft>
+            </a:pPr>
+            <a:r>
+              <a:rPr sz="1300" b="0">
+                <a:solidFill>
+                  <a:srgbClr val="555B66"/>
+                </a:solidFill>
+                <a:latin typeface="맑은 고딕"/>
+              </a:rPr>
+              <a:t>– </a:t>
+            </a:r>
+            <a:r>
+              <a:rPr sz="1300" b="0">
+                <a:solidFill>
+                  <a:srgbClr val="222730"/>
+                </a:solidFill>
+                <a:latin typeface="맑은 고딕"/>
+              </a:rPr>
+              <a:t>“테스트 통과” → 실제 서버에서 다시 실행 (미실행은 통과가 아니다)</a:t>
+            </a:r>
+          </a:p>
+          <a:p>
+            <a:pPr lvl="1">
+              <a:spcBef>
+                <a:spcPts val="200"/>
+              </a:spcBef>
+              <a:spcAft>
+                <a:spcPts val="600"/>
+              </a:spcAft>
+            </a:pPr>
+            <a:r>
+              <a:rPr sz="1300" b="0">
+                <a:solidFill>
+                  <a:srgbClr val="555B66"/>
+                </a:solidFill>
+                <a:latin typeface="맑은 고딕"/>
+              </a:rPr>
+              <a:t>– </a:t>
+            </a:r>
+            <a:r>
+              <a:rPr sz="1300" b="0">
+                <a:solidFill>
+                  <a:srgbClr val="222730"/>
+                </a:solidFill>
+                <a:latin typeface="맑은 고딕"/>
+              </a:rPr>
+              <a:t>“승인함” → 승인을 결과에 묶어 입력이 바뀌면 자동 무효</a:t>
             </a:r>
           </a:p>
           <a:p>
@@ -8661,82 +8624,7 @@
                 </a:solidFill>
                 <a:latin typeface="맑은 고딕"/>
               </a:rPr>
-              <a:t>① 방식 통제 — 어떻게 일을 하는지를 지시(프롬프트·MD)로 통제한다 (순서·범위·남길 것)</a:t>
-            </a:r>
-          </a:p>
-          <a:p>
-            <a:pPr>
-              <a:spcBef>
-                <a:spcPts val="200"/>
-              </a:spcBef>
-              <a:spcAft>
-                <a:spcPts val="600"/>
-              </a:spcAft>
-            </a:pPr>
-            <a:r>
-              <a:rPr sz="1500" b="1">
-                <a:solidFill>
-                  <a:srgbClr val="0E8F8F"/>
-                </a:solidFill>
-                <a:latin typeface="맑은 고딕"/>
-              </a:rPr>
-              <a:t>■ </a:t>
-            </a:r>
-            <a:r>
-              <a:rPr sz="1500" b="1">
-                <a:solidFill>
-                  <a:srgbClr val="2E8B57"/>
-                </a:solidFill>
-                <a:latin typeface="맑은 고딕"/>
-              </a:rPr>
-              <a:t>② 결과 통제 — 과정마다 정해진 형식으로 결과를 뱉게 강제 → 검사기가 판정</a:t>
-            </a:r>
-          </a:p>
-          <a:p>
-            <a:pPr>
-              <a:spcBef>
-                <a:spcPts val="200"/>
-              </a:spcBef>
-              <a:spcAft>
-                <a:spcPts val="600"/>
-              </a:spcAft>
-            </a:pPr>
-            <a:r>
-              <a:rPr sz="1500" b="1">
-                <a:solidFill>
-                  <a:srgbClr val="0E8F8F"/>
-                </a:solidFill>
-                <a:latin typeface="맑은 고딕"/>
-              </a:rPr>
-              <a:t>■ </a:t>
-            </a:r>
-            <a:r>
-              <a:rPr sz="1500" b="1">
-                <a:solidFill>
-                  <a:srgbClr val="0E8F8F"/>
-                </a:solidFill>
-                <a:latin typeface="맑은 고딕"/>
-              </a:rPr>
-              <a:t>한 줄 (harness = 고삐) — 업그레이드가 불확실해도 산출물을 예측 가능하게 만들어 통제한다. AI를 덜 쓰는(minimize) 게 아니라 고삐를 채우는(harness) 것</a:t>
-            </a:r>
-          </a:p>
-          <a:p>
-            <a:pPr lvl="2">
-              <a:spcBef>
-                <a:spcPts val="200"/>
-              </a:spcBef>
-              <a:spcAft>
-                <a:spcPts val="600"/>
-              </a:spcAft>
-            </a:pPr>
-            <a:r>
-              <a:rPr sz="1200" b="0">
-                <a:solidFill>
-                  <a:srgbClr val="555B66"/>
-                </a:solidFill>
-                <a:latin typeface="맑은 고딕"/>
-              </a:rPr>
-              <a:t>· 현재: 1.13.1 9/9 · 1.13.2 부분 / 다음: 주장–증거 자동 대조기</a:t>
+              <a:t>핵심 규칙 — LLM이 ‘됐다’고 적어도 증거가 없으면 ‘미확인’으로 표시한다. 증거 없다고 곧장 ‘거짓’으로 몰지 않는다 → 확인·반박·미확인·사람검토 4단계</a:t>
             </a:r>
           </a:p>
         </p:txBody>
@@ -12094,7 +11982,7 @@
             <a:avLst/>
           </a:prstGeom>
           <a:solidFill>
-            <a:srgbClr val="2E6CB1"/>
+            <a:srgbClr val="0E8F8F"/>
           </a:solidFill>
           <a:ln>
             <a:noFill/>
@@ -12148,11 +12036,11 @@
             <a:r>
               <a:rPr sz="1200" b="1">
                 <a:solidFill>
-                  <a:srgbClr val="2E6CB1"/>
-                </a:solidFill>
-                <a:latin typeface="맑은 고딕"/>
-              </a:rPr>
-              <a:t>참고한 다른 접근</a:t>
+                  <a:srgbClr val="0E8F8F"/>
+                </a:solidFill>
+                <a:latin typeface="맑은 고딕"/>
+              </a:rPr>
+              <a:t>도입 제안 ① — 검증되는 과정</a:t>
             </a:r>
           </a:p>
         </p:txBody>
@@ -12186,7 +12074,7 @@
                 </a:solidFill>
                 <a:latin typeface="맑은 고딕"/>
               </a:rPr>
-              <a:t>8/5 공유된 ‘LLM 기반 운영 방식’ (참고)</a:t>
+              <a:t>커스텀 하나(BANK-OM ID)가 검증되는 과정</a:t>
             </a:r>
           </a:p>
         </p:txBody>
@@ -12224,7 +12112,7 @@
             <a:r>
               <a:rPr sz="1500" b="1">
                 <a:solidFill>
-                  <a:srgbClr val="2E6CB1"/>
+                  <a:srgbClr val="0E8F8F"/>
                 </a:solidFill>
                 <a:latin typeface="맑은 고딕"/>
               </a:rPr>
@@ -12233,11 +12121,11 @@
             <a:r>
               <a:rPr sz="1500" b="1">
                 <a:solidFill>
-                  <a:srgbClr val="2E6CB1"/>
-                </a:solidFill>
-                <a:latin typeface="맑은 고딕"/>
-              </a:rPr>
-              <a:t>개념 — 규칙·지식 문서·자동화로 LLM이 버전 포팅을 빠르게 수행하는 방식</a:t>
+                  <a:srgbClr val="0E8F8F"/>
+                </a:solidFill>
+                <a:latin typeface="맑은 고딕"/>
+              </a:rPr>
+              <a:t>제안 — 하이브리드에서 LLM 작업의 ‘증거 층’으로 이 검사기를 도입한다 (자랑이 아니라 도입 대상)</a:t>
             </a:r>
           </a:p>
           <a:p>
@@ -12261,11 +12149,151 @@
             <a:r>
               <a:rPr sz="1300" b="0">
                 <a:solidFill>
+                  <a:srgbClr val="222730"/>
+                </a:solidFill>
+                <a:latin typeface="맑은 고딕"/>
+              </a:rPr>
+              <a:t>① 등록 — Manifest·Registry·Contract. 무엇을·어디를 바꿨고 어떤 검사로 지킬지 선언</a:t>
+            </a:r>
+          </a:p>
+          <a:p>
+            <a:pPr lvl="1">
+              <a:spcBef>
+                <a:spcPts val="200"/>
+              </a:spcBef>
+              <a:spcAft>
+                <a:spcPts val="600"/>
+              </a:spcAft>
+            </a:pPr>
+            <a:r>
+              <a:rPr sz="1300" b="0">
+                <a:solidFill>
                   <a:srgbClr val="555B66"/>
                 </a:solidFill>
                 <a:latin typeface="맑은 고딕"/>
               </a:rPr>
-              <a:t>“포팅 시간 크게 단축”은 그 방식의 자체 보고 수치 — 우리가 실행·검증한 건 아니다</a:t>
+              <a:t>– </a:t>
+            </a:r>
+            <a:r>
+              <a:rPr sz="1300" b="0">
+                <a:solidFill>
+                  <a:srgbClr val="222730"/>
+                </a:solidFill>
+                <a:latin typeface="맑은 고딕"/>
+              </a:rPr>
+              <a:t>② 커밋·변경범위 검사 — 선언한 범위만 건드렸는지, 공식 계보 위에 얹혔는지</a:t>
+            </a:r>
+          </a:p>
+          <a:p>
+            <a:pPr lvl="1">
+              <a:spcBef>
+                <a:spcPts val="200"/>
+              </a:spcBef>
+              <a:spcAft>
+                <a:spcPts val="600"/>
+              </a:spcAft>
+            </a:pPr>
+            <a:r>
+              <a:rPr sz="1300" b="0">
+                <a:solidFill>
+                  <a:srgbClr val="555B66"/>
+                </a:solidFill>
+                <a:latin typeface="맑은 고딕"/>
+              </a:rPr>
+              <a:t>– </a:t>
+            </a:r>
+            <a:r>
+              <a:rPr sz="1300" b="0">
+                <a:solidFill>
+                  <a:srgbClr val="222730"/>
+                </a:solidFill>
+                <a:latin typeface="맑은 고딕"/>
+              </a:rPr>
+              <a:t>③ 공용 파일의 ID별 코드 검사 — 공유 파일에서 이 ID 몫의 코드가 살아있는지</a:t>
+            </a:r>
+          </a:p>
+          <a:p>
+            <a:pPr lvl="1">
+              <a:spcBef>
+                <a:spcPts val="200"/>
+              </a:spcBef>
+              <a:spcAft>
+                <a:spcPts val="600"/>
+              </a:spcAft>
+            </a:pPr>
+            <a:r>
+              <a:rPr sz="1300" b="0">
+                <a:solidFill>
+                  <a:srgbClr val="555B66"/>
+                </a:solidFill>
+                <a:latin typeface="맑은 고딕"/>
+              </a:rPr>
+              <a:t>– </a:t>
+            </a:r>
+            <a:r>
+              <a:rPr sz="1300" b="0">
+                <a:solidFill>
+                  <a:srgbClr val="222730"/>
+                </a:solidFill>
+                <a:latin typeface="맑은 고딕"/>
+              </a:rPr>
+              <a:t>④ 전용 검사 실행 — 이 기능만의 검사(API/화면/소스). 속 빈 테스트면 patch-kill로 걸러낸다</a:t>
+            </a:r>
+          </a:p>
+          <a:p>
+            <a:pPr lvl="1">
+              <a:spcBef>
+                <a:spcPts val="200"/>
+              </a:spcBef>
+              <a:spcAft>
+                <a:spcPts val="600"/>
+              </a:spcAft>
+            </a:pPr>
+            <a:r>
+              <a:rPr sz="1300" b="0">
+                <a:solidFill>
+                  <a:srgbClr val="555B66"/>
+                </a:solidFill>
+                <a:latin typeface="맑은 고딕"/>
+              </a:rPr>
+              <a:t>– </a:t>
+            </a:r>
+            <a:r>
+              <a:rPr sz="1300" b="0">
+                <a:solidFill>
+                  <a:srgbClr val="222730"/>
+                </a:solidFill>
+                <a:latin typeface="맑은 고딕"/>
+              </a:rPr>
+              <a:t>⑤ commit·이미지와 결과 결속 — 바꿔치기·사후수정을 감지</a:t>
+            </a:r>
+          </a:p>
+          <a:p>
+            <a:pPr lvl="1">
+              <a:spcBef>
+                <a:spcPts val="200"/>
+              </a:spcBef>
+              <a:spcAft>
+                <a:spcPts val="600"/>
+              </a:spcAft>
+            </a:pPr>
+            <a:r>
+              <a:rPr sz="1300" b="0">
+                <a:solidFill>
+                  <a:srgbClr val="555B66"/>
+                </a:solidFill>
+                <a:latin typeface="맑은 고딕"/>
+              </a:rPr>
+              <a:t>– </a:t>
+            </a:r>
+            <a:r>
+              <a:rPr sz="1300" b="0">
+                <a:solidFill>
+                  <a:srgbClr val="222730"/>
+                </a:solidFill>
+                <a:latin typeface="맑은 고딕"/>
+              </a:rPr>
+              <a:t>⑥ 승인·증거 보관 — 권한자 승인 + 증거 보관. 승인은 결과에 결속</a:t>
             </a:r>
           </a:p>
           <a:p>
@@ -12280,7 +12308,7 @@
             <a:r>
               <a:rPr sz="1500" b="1">
                 <a:solidFill>
-                  <a:srgbClr val="2E6CB1"/>
+                  <a:srgbClr val="0E8F8F"/>
                 </a:solidFill>
                 <a:latin typeface="맑은 고딕"/>
               </a:rPr>
@@ -12289,39 +12317,11 @@
             <a:r>
               <a:rPr sz="1500" b="1">
                 <a:solidFill>
-                  <a:srgbClr val="222730"/>
-                </a:solidFill>
-                <a:latin typeface="맑은 고딕"/>
-              </a:rPr>
-              <a:t>구조 — 변경·수정·테스트·결과 기록을 대부분 LLM이 스스로 수행하고, 그 결과도 스스로 문서에 적는다</a:t>
-            </a:r>
-          </a:p>
-          <a:p>
-            <a:pPr>
-              <a:spcBef>
-                <a:spcPts val="200"/>
-              </a:spcBef>
-              <a:spcAft>
-                <a:spcPts val="600"/>
-              </a:spcAft>
-            </a:pPr>
-            <a:r>
-              <a:rPr sz="1500" b="1">
-                <a:solidFill>
-                  <a:srgbClr val="2E6CB1"/>
-                </a:solidFill>
-                <a:latin typeface="맑은 고딕"/>
-              </a:rPr>
-              <a:t>■ </a:t>
-            </a:r>
-            <a:r>
-              <a:rPr sz="1500" b="1">
-                <a:solidFill>
                   <a:srgbClr val="0E8F8F"/>
                 </a:solidFill>
                 <a:latin typeface="맑은 고딕"/>
               </a:rPr>
-              <a:t>우리 생각 — 검증이 아니라 방향 제안: 이 접근에 검사기로 ‘각 판단의 근거를 자동으로 뒷받침’하는 층을 더하면 속도(LLM)는 살리고 신뢰(근거)는 끌어올릴 수 있겠다. 경쟁이 아니라 보완</a:t>
+              <a:t>6페이지 한계와의 연결 — “관리 파일이 많다”는 부담을 그대로 두지 않는다. 이 산출물을 사람이 아니라 LLM이 생성·갱신하고, 검사기는 검증만 한다</a:t>
             </a:r>
           </a:p>
         </p:txBody>
